--- a/lecons/F3/06_FORM4_LESSON04_Local_Time_Standard_Time_Time_Zones.pptx
+++ b/lecons/F3/06_FORM4_LESSON04_Local_Time_Standard_Time_Time_Zones.pptx
@@ -51,9 +51,16 @@
     <p:sldId id="299" r:id="rId45"/>
     <p:sldId id="300" r:id="rId46"/>
     <p:sldId id="301" r:id="rId47"/>
+    <p:sldId id="302" r:id="rId48"/>
+    <p:sldId id="303" r:id="rId49"/>
+    <p:sldId id="304" r:id="rId50"/>
+    <p:sldId id="305" r:id="rId51"/>
+    <p:sldId id="306" r:id="rId52"/>
+    <p:sldId id="307" r:id="rId53"/>
+    <p:sldId id="308" r:id="rId54"/>
   </p:sldIdLst>
   <p:notesMasterIdLst>
-    <p:notesMasterId r:id="rId48"/>
+    <p:notesMasterId r:id="rId55"/>
   </p:notesMasterIdLst>
   <p:sldSz cx="12192000" cy="6858000"/>
   <p:notesSz cx="6858000" cy="12192000"/>
@@ -635,7 +642,7 @@
           <a:p>
             <a:r>
               <a:rPr lang="en-US" dirty="0"/>
-              <a:t>Listen carefully to this situation from real life. The Indomitable Lions play a match in Brazil. The match starts at 3 p.m. in Brazil, but in Garoua we watch it at 7 p.m. Alima wonders why the time is not the same everywhere. Think about it, because I am going to ask you some questions.</a:t>
+              <a:t>Listen carefully to this situation from real life. The Indomitable Lions play a match in Brazil. The match starts at 3 p.m. in Brazil, but in Garoua we watch it at 7 p.m. Alima asks: "Why is the time not the same in Brazil and in Garoua at the same moment?" Think about it, because I am going to ask you some questions.</a:t>
             </a:r>
             <a:endParaRPr lang="en-US" dirty="0"/>
           </a:p>
@@ -811,7 +818,7 @@
           <a:p>
             <a:r>
               <a:rPr lang="en-US" dirty="0"/>
-              <a:t>Good. Alima does not know why Brazil and Garoua have different times.</a:t>
+              <a:t>Good. Alima does not understand why Brazil and Garoua have different times.</a:t>
             </a:r>
             <a:endParaRPr lang="en-US" dirty="0"/>
           </a:p>
@@ -1163,7 +1170,7 @@
           <a:p>
             <a:r>
               <a:rPr lang="en-US" dirty="0"/>
-              <a:t>Good. Garoua is east of Brazil. The Sun rises there first.</a:t>
+              <a:t>Good. Garoua is east of Brazil, so it sees the Sun first.</a:t>
             </a:r>
             <a:endParaRPr lang="en-US" dirty="0"/>
           </a:p>
@@ -1603,7 +1610,7 @@
           <a:p>
             <a:r>
               <a:rPr lang="en-US" dirty="0"/>
-              <a:t>Here is the question for Activity 1: It is 12:00 at 0°. What time is it at 15° E and at 15° W? Take one minute to think and write your answer in your rough notebook.</a:t>
+              <a:t>Here is the question for Activity 1: It is 12:00 at 0°. What time is it at 15° E? Take one minute to think and write your answer in your rough notebook.</a:t>
             </a:r>
             <a:endParaRPr lang="en-US" dirty="0"/>
           </a:p>
@@ -1691,7 +1698,7 @@
           <a:p>
             <a:r>
               <a:rPr lang="en-US" dirty="0"/>
-              <a:t>Let us check the answer together. 13:00 at 15° E, 11:00 at 15° W.</a:t>
+              <a:t>Let us check the answer together. 13:00.</a:t>
             </a:r>
             <a:endParaRPr lang="en-US" dirty="0"/>
           </a:p>
@@ -1779,7 +1786,7 @@
           <a:p>
             <a:r>
               <a:rPr lang="en-US" dirty="0"/>
-              <a:t>Activity 2. Look carefully at this diagram: the time zones of the world. Observe every detail before I ask the question.</a:t>
+              <a:t>Here is the next question: What time is it at 15° W? Take one minute to think and write your answer in your rough notebook.</a:t>
             </a:r>
             <a:endParaRPr lang="en-US" dirty="0"/>
           </a:p>
@@ -1867,7 +1874,7 @@
           <a:p>
             <a:r>
               <a:rPr lang="en-US" dirty="0"/>
-              <a:t>Here is the question for Activity 2: How many time zones are there? In which one is Cameroon? Take one minute to think and write your answer in your rough notebook.</a:t>
+              <a:t>Let us check the answer together. 11:00.</a:t>
             </a:r>
             <a:endParaRPr lang="en-US" dirty="0"/>
           </a:p>
@@ -1955,7 +1962,7 @@
           <a:p>
             <a:r>
               <a:rPr lang="en-US" dirty="0"/>
-              <a:t>Let us check the answer together. 24 time zones. Cameroon is in GMT + 1.</a:t>
+              <a:t>Activity 2. Look carefully at this diagram: the time zones of the world. Observe every detail before I ask the question.</a:t>
             </a:r>
             <a:endParaRPr lang="en-US" dirty="0"/>
           </a:p>
@@ -2043,7 +2050,7 @@
           <a:p>
             <a:r>
               <a:rPr lang="en-US" dirty="0"/>
-              <a:t>Activity 3. Look carefully at this picture: clocks showing the time in different cities. Observe every detail before I ask the question.</a:t>
+              <a:t>Here is the question for Activity 2: In which time zone is Cameroon? Take one minute to think and write your answer in your rough notebook.</a:t>
             </a:r>
             <a:endParaRPr lang="en-US" dirty="0"/>
           </a:p>
@@ -2131,7 +2138,7 @@
           <a:p>
             <a:r>
               <a:rPr lang="en-US" dirty="0"/>
-              <a:t>Here is the question for Activity 3: Why do these clocks show different times? Take one minute to think and write your answer in your rough notebook.</a:t>
+              <a:t>Let us check the answer together. GMT + 1 (West Africa Time).</a:t>
             </a:r>
             <a:endParaRPr lang="en-US" dirty="0"/>
           </a:p>
@@ -2219,7 +2226,7 @@
           <a:p>
             <a:r>
               <a:rPr lang="en-US" dirty="0"/>
-              <a:t>Let us check the answer together. Each city is in a different time zone.</a:t>
+              <a:t>Activity 3. Look carefully at this picture: clocks showing the time in different cities. Observe every detail before I ask the question.</a:t>
             </a:r>
             <a:endParaRPr lang="en-US" dirty="0"/>
           </a:p>
@@ -2307,7 +2314,7 @@
           <a:p>
             <a:r>
               <a:rPr lang="en-US" dirty="0"/>
-              <a:t>Now we are going to copy the board summary. Write the title and the headings neatly in your notebooks. I will give you enough time for each slide, so do not rush.</a:t>
+              <a:t>Here is the question for Activity 3: Why do these clocks show different times at the same moment? Take one minute to think and write your answer in your rough notebook.</a:t>
             </a:r>
             <a:endParaRPr lang="en-US" dirty="0"/>
           </a:p>
@@ -2395,7 +2402,7 @@
           <a:p>
             <a:r>
               <a:rPr lang="en-US" dirty="0"/>
-              <a:t>Let us copy the definitions. The key terms of this lesson are defined as follows. On this slide we have Local time and Standard time. Write each point on a new line, with the key term first, and explain it in your own words when we revise.</a:t>
+              <a:t>Let us check the answer together. Each city is in a different time zone.</a:t>
             </a:r>
             <a:endParaRPr lang="en-US" dirty="0"/>
           </a:p>
@@ -2571,7 +2578,7 @@
           <a:p>
             <a:r>
               <a:rPr lang="en-US" dirty="0"/>
-              <a:t>Let us copy Local and Standard Time. Local and standard time follow these rules. On this slide we have The rule and East and west. Write each point on a new line, with the key term first, and explain it in your own words when we revise. When you finish, we go to the next slide.</a:t>
+              <a:t>Now we are going to copy the board summary. Write the title and the headings neatly in your notebooks. I will give you enough time for each slide, so do not rush.</a:t>
             </a:r>
             <a:endParaRPr lang="en-US" dirty="0"/>
           </a:p>
@@ -2659,7 +2666,7 @@
           <a:p>
             <a:r>
               <a:rPr lang="en-US" dirty="0"/>
-              <a:t>We continue with Local and Standard Time. On this slide we have Cameroon. Write each point on a new line, with the key term first, and explain it in your own words when we revise.</a:t>
+              <a:t>Let us copy the definitions. The key terms of this lesson are defined as follows. On this slide we have Local time (sun time) and Standard time. Write each point on a new line, with the key term first, and explain it in your own words when we revise. When you finish, we go to the next slide.</a:t>
             </a:r>
             <a:endParaRPr lang="en-US" dirty="0"/>
           </a:p>
@@ -2747,7 +2754,7 @@
           <a:p>
             <a:r>
               <a:rPr lang="en-US" dirty="0"/>
-              <a:t>Now draw this illustration in your notebook: time and longitude. Give it a title and label it clearly.</a:t>
+              <a:t>We continue with the definitions. On this slide we have Time zone. Write each point on a new line, with the key term first, and explain it in your own words when we revise.</a:t>
             </a:r>
             <a:endParaRPr lang="en-US" dirty="0"/>
           </a:p>
@@ -2835,7 +2842,7 @@
           <a:p>
             <a:r>
               <a:rPr lang="en-US" dirty="0"/>
-              <a:t>Let us copy Time Zones. Time zones are explained as follows. On this slide we have Time zone and Number and width. Write each point on a new line, with the key term first, and explain it in your own words when we revise. When you finish, we go to the next slide.</a:t>
+              <a:t>Let us copy Local Time. Local time is illustrated as follows. Copy the point on The rule on the left, then draw the diagram on the right: time and longitude. Give it a title and label it clearly.</a:t>
             </a:r>
             <a:endParaRPr lang="en-US" dirty="0"/>
           </a:p>
@@ -2923,7 +2930,7 @@
           <a:p>
             <a:r>
               <a:rPr lang="en-US" dirty="0"/>
-              <a:t>We continue with Time Zones. On this slide we have Reason and Countries with many zones. Write each point on a new line, with the key term first, and explain it in your own words when we revise.</a:t>
+              <a:t>We continue with Local Time. On this slide we have East is ahead and West is behind. Write each point on a new line, with the key term first, and explain it in your own words when we revise.</a:t>
             </a:r>
             <a:endParaRPr lang="en-US" dirty="0"/>
           </a:p>
@@ -3011,7 +3018,7 @@
           <a:p>
             <a:r>
               <a:rPr lang="en-US" dirty="0"/>
-              <a:t>Now let us check what you have understood. Question 1: How many degrees does the Earth turn in one hour? Answer in your exercise book.</a:t>
+              <a:t>Let us copy Illustration. Standard time and time zones are organised as follows. Copy the point on Number of zones on the left, then draw the diagram on the right: the time zones of the world. Give it a title and label it clearly.</a:t>
             </a:r>
             <a:endParaRPr lang="en-US" dirty="0"/>
           </a:p>
@@ -3099,7 +3106,7 @@
           <a:p>
             <a:r>
               <a:rPr lang="en-US" dirty="0"/>
-              <a:t>The expected answer is: 15°. If you got it right, well done.</a:t>
+              <a:t>We continue with Illustration. On this slide we have Reference and Cameroon. Write each point on a new line, with the key term first, and explain it in your own words when we revise. When you finish, we go to the next slide.</a:t>
             </a:r>
             <a:endParaRPr lang="en-US" dirty="0"/>
           </a:p>
@@ -3187,7 +3194,7 @@
           <a:p>
             <a:r>
               <a:rPr lang="en-US" dirty="0"/>
-              <a:t>Now let us check what you have understood. Question 2: What is the standard time of Cameroon? Answer in your exercise book.</a:t>
+              <a:t>We continue with Illustration. On this slide we have Boundaries. Write each point on a new line, with the key term first, and explain it in your own words when we revise.</a:t>
             </a:r>
             <a:endParaRPr lang="en-US" dirty="0"/>
           </a:p>
@@ -3275,7 +3282,7 @@
           <a:p>
             <a:r>
               <a:rPr lang="en-US" dirty="0"/>
-              <a:t>The expected answer is: west Africa Time, GMT + 1. If you got it right, well done.</a:t>
+              <a:t>Let us copy Reasons for Time Zones. Time zones were created for the following reasons. On this slide we have Avoid confusion and Transport. Write each point on a new line, with the key term first, and explain it in your own words when we revise. When you finish, we go to the next slide.</a:t>
             </a:r>
             <a:endParaRPr lang="en-US" dirty="0"/>
           </a:p>
@@ -3363,7 +3370,7 @@
           <a:p>
             <a:r>
               <a:rPr lang="en-US" dirty="0"/>
-              <a:t>For those who need more practice, fill in the blanks in your exercise book. The answers are: number 1, 15; number 2, 24; number 3, ahead.</a:t>
+              <a:t>We continue with Reasons for Time Zones. On this slide we have Communication and trade. Write each point on a new line, with the key term first, and explain it in your own words when we revise.</a:t>
             </a:r>
             <a:endParaRPr lang="en-US" dirty="0"/>
           </a:p>
@@ -3539,7 +3546,7 @@
           <a:p>
             <a:r>
               <a:rPr lang="en-US" dirty="0"/>
-              <a:t>For your homework: Find the time in Garoua when it is 12 noon in London in winter (GMT). Then try: what time is it in a town at 45° E when it is 12 noon at 0°? We shall correct it at the beginning of our next lesson.</a:t>
+              <a:t>Let us copy Why Some Countries Have Many Time Zones. Some countries have many time zones for the following reasons. On this slide we have Great width from east to west. Write each point on a new line, with the key term first, and explain it in your own words when we revise. When you finish, we go to the next slide.</a:t>
             </a:r>
             <a:endParaRPr lang="en-US" dirty="0"/>
           </a:p>
@@ -3627,7 +3634,7 @@
           <a:p>
             <a:r>
               <a:rPr lang="en-US" dirty="0"/>
-              <a:t>Our next lesson will be on Practical Work 2: Calculation of Time and Date. Thank you for your attention, and see you next time.</a:t>
+              <a:t>We continue with Why Some Countries Have Many Time Zones. On this slide we have Difference in sunrise and Examples. Write each point on a new line, with the key term first, and explain it in your own words when we revise.</a:t>
             </a:r>
             <a:endParaRPr lang="en-US" dirty="0"/>
           </a:p>
@@ -3715,7 +3722,7 @@
           <a:p>
             <a:r>
               <a:rPr lang="en-US" dirty="0"/>
-              <a:t>Let us play the bilingual game. I say a word in English, and you give me the French word. Then we do the reverse.</a:t>
+              <a:t>Now let us check what you have understood. Question 1: How many degrees does the Earth turn in one hour? Answer in your exercise book.</a:t>
             </a:r>
             <a:endParaRPr lang="en-US" dirty="0"/>
           </a:p>
@@ -3803,7 +3810,7 @@
           <a:p>
             <a:r>
               <a:rPr lang="en-US" dirty="0"/>
-              <a:t>I record this information in the official logbook of the class after the lesson.</a:t>
+              <a:t>The expected answer is: 15°. If you got it right, well done.</a:t>
             </a:r>
             <a:endParaRPr lang="en-US" dirty="0"/>
           </a:p>
@@ -3891,7 +3898,7 @@
           <a:p>
             <a:r>
               <a:rPr lang="en-US" dirty="0"/>
-              <a:t>I complete the second page of the logbook: the matter taught, the evaluation, the homework and the attendance.</a:t>
+              <a:t>Now let us check what you have understood. Question 2: What is the standard time of Cameroon? Answer in your exercise book.</a:t>
             </a:r>
             <a:endParaRPr lang="en-US" dirty="0"/>
           </a:p>
@@ -3979,7 +3986,7 @@
           <a:p>
             <a:r>
               <a:rPr lang="en-US" dirty="0"/>
-              <a:t>This slide is for me, the teacher: it gives the timing of the lesson and what to do if the projector is not available.</a:t>
+              <a:t>The expected answer is: west Africa Time, GMT + 1. If you got it right, well done.</a:t>
             </a:r>
             <a:endParaRPr lang="en-US" dirty="0"/>
           </a:p>
@@ -4067,7 +4074,7 @@
           <a:p>
             <a:r>
               <a:rPr lang="en-US" dirty="0"/>
-              <a:t>These are the references and picture credits used to prepare this lesson.</a:t>
+              <a:t>For those who need more practice, fill in the blanks in your exercise book. The answers are: number 1, 15; number 2, 24; number 3, ahead.</a:t>
             </a:r>
             <a:endParaRPr lang="en-US" dirty="0"/>
           </a:p>
@@ -4091,6 +4098,270 @@
             <a:fld id="{F7021451-1387-4CA6-816F-3879F97B5CBC}" type="slidenum">
               <a:rPr lang="en-US"/>
               <a:t>46</a:t>
+            </a:fld>
+            <a:endParaRPr lang="en-US"/>
+          </a:p>
+        </p:txBody>
+      </p:sp>
+    </p:spTree>
+    <p:extLst>
+      <p:ext uri="{BB962C8B-B14F-4D97-AF65-F5344CB8AC3E}">
+        <p14:creationId xmlns:p14="http://schemas.microsoft.com/office/powerpoint/2010/main" val="1024086991"/>
+      </p:ext>
+    </p:extLst>
+  </p:cSld>
+  <p:clrMapOvr>
+    <a:masterClrMapping/>
+  </p:clrMapOvr>
+</p:notes>
+</file>
+
+<file path=ppt/notesSlides/notesSlide47.xml><?xml version="1.0" encoding="utf-8"?>
+<p:notes xmlns:a="http://schemas.openxmlformats.org/drawingml/2006/main" xmlns:r="http://schemas.openxmlformats.org/officeDocument/2006/relationships" xmlns:p="http://schemas.openxmlformats.org/presentationml/2006/main">
+  <p:cSld>
+    <p:spTree>
+      <p:nvGrpSpPr>
+        <p:cNvPr id="1" name=""/>
+        <p:cNvGrpSpPr/>
+        <p:nvPr/>
+      </p:nvGrpSpPr>
+      <p:grpSpPr>
+        <a:xfrm>
+          <a:off x="0" y="0"/>
+          <a:ext cx="0" cy="0"/>
+          <a:chOff x="0" y="0"/>
+          <a:chExt cx="0" cy="0"/>
+        </a:xfrm>
+      </p:grpSpPr>
+      <p:sp>
+        <p:nvSpPr>
+          <p:cNvPr id="2" name="Slide Image Placeholder 1"/>
+          <p:cNvSpPr>
+            <a:spLocks noGrp="1" noRot="1" noChangeAspect="1"/>
+          </p:cNvSpPr>
+          <p:nvPr>
+            <p:ph type="sldImg"/>
+          </p:nvPr>
+        </p:nvSpPr>
+        <p:spPr/>
+      </p:sp>
+      <p:sp>
+        <p:nvSpPr>
+          <p:cNvPr id="3" name="Notes Placeholder 2"/>
+          <p:cNvSpPr>
+            <a:spLocks noGrp="1"/>
+          </p:cNvSpPr>
+          <p:nvPr>
+            <p:ph type="body" idx="1"/>
+          </p:nvPr>
+        </p:nvSpPr>
+        <p:spPr/>
+        <p:txBody>
+          <a:bodyPr/>
+          <a:lstStyle/>
+          <a:p>
+            <a:r>
+              <a:rPr lang="en-US" dirty="0"/>
+              <a:t>For your homework: Find the time in Garoua when it is 12 noon in London in winter (GMT). Then try: what time is it in a town at 45° E when it is 12 noon at 0°? We shall correct it at the beginning of our next lesson.</a:t>
+            </a:r>
+            <a:endParaRPr lang="en-US" dirty="0"/>
+          </a:p>
+        </p:txBody>
+      </p:sp>
+      <p:sp>
+        <p:nvSpPr>
+          <p:cNvPr id="4" name="Slide Number Placeholder 3"/>
+          <p:cNvSpPr>
+            <a:spLocks noGrp="1"/>
+          </p:cNvSpPr>
+          <p:nvPr>
+            <p:ph type="sldNum" sz="quarter" idx="10"/>
+          </p:nvPr>
+        </p:nvSpPr>
+        <p:spPr/>
+        <p:txBody>
+          <a:bodyPr/>
+          <a:lstStyle/>
+          <a:p>
+            <a:fld id="{F7021451-1387-4CA6-816F-3879F97B5CBC}" type="slidenum">
+              <a:rPr lang="en-US"/>
+              <a:t>47</a:t>
+            </a:fld>
+            <a:endParaRPr lang="en-US"/>
+          </a:p>
+        </p:txBody>
+      </p:sp>
+    </p:spTree>
+    <p:extLst>
+      <p:ext uri="{BB962C8B-B14F-4D97-AF65-F5344CB8AC3E}">
+        <p14:creationId xmlns:p14="http://schemas.microsoft.com/office/powerpoint/2010/main" val="1024086991"/>
+      </p:ext>
+    </p:extLst>
+  </p:cSld>
+  <p:clrMapOvr>
+    <a:masterClrMapping/>
+  </p:clrMapOvr>
+</p:notes>
+</file>
+
+<file path=ppt/notesSlides/notesSlide48.xml><?xml version="1.0" encoding="utf-8"?>
+<p:notes xmlns:a="http://schemas.openxmlformats.org/drawingml/2006/main" xmlns:r="http://schemas.openxmlformats.org/officeDocument/2006/relationships" xmlns:p="http://schemas.openxmlformats.org/presentationml/2006/main">
+  <p:cSld>
+    <p:spTree>
+      <p:nvGrpSpPr>
+        <p:cNvPr id="1" name=""/>
+        <p:cNvGrpSpPr/>
+        <p:nvPr/>
+      </p:nvGrpSpPr>
+      <p:grpSpPr>
+        <a:xfrm>
+          <a:off x="0" y="0"/>
+          <a:ext cx="0" cy="0"/>
+          <a:chOff x="0" y="0"/>
+          <a:chExt cx="0" cy="0"/>
+        </a:xfrm>
+      </p:grpSpPr>
+      <p:sp>
+        <p:nvSpPr>
+          <p:cNvPr id="2" name="Slide Image Placeholder 1"/>
+          <p:cNvSpPr>
+            <a:spLocks noGrp="1" noRot="1" noChangeAspect="1"/>
+          </p:cNvSpPr>
+          <p:nvPr>
+            <p:ph type="sldImg"/>
+          </p:nvPr>
+        </p:nvSpPr>
+        <p:spPr/>
+      </p:sp>
+      <p:sp>
+        <p:nvSpPr>
+          <p:cNvPr id="3" name="Notes Placeholder 2"/>
+          <p:cNvSpPr>
+            <a:spLocks noGrp="1"/>
+          </p:cNvSpPr>
+          <p:nvPr>
+            <p:ph type="body" idx="1"/>
+          </p:nvPr>
+        </p:nvSpPr>
+        <p:spPr/>
+        <p:txBody>
+          <a:bodyPr/>
+          <a:lstStyle/>
+          <a:p>
+            <a:r>
+              <a:rPr lang="en-US" dirty="0"/>
+              <a:t>Our next lesson will be on Practical Work 2: Calculation of Time and Date. Thank you for your attention, and see you next time.</a:t>
+            </a:r>
+            <a:endParaRPr lang="en-US" dirty="0"/>
+          </a:p>
+        </p:txBody>
+      </p:sp>
+      <p:sp>
+        <p:nvSpPr>
+          <p:cNvPr id="4" name="Slide Number Placeholder 3"/>
+          <p:cNvSpPr>
+            <a:spLocks noGrp="1"/>
+          </p:cNvSpPr>
+          <p:nvPr>
+            <p:ph type="sldNum" sz="quarter" idx="10"/>
+          </p:nvPr>
+        </p:nvSpPr>
+        <p:spPr/>
+        <p:txBody>
+          <a:bodyPr/>
+          <a:lstStyle/>
+          <a:p>
+            <a:fld id="{F7021451-1387-4CA6-816F-3879F97B5CBC}" type="slidenum">
+              <a:rPr lang="en-US"/>
+              <a:t>48</a:t>
+            </a:fld>
+            <a:endParaRPr lang="en-US"/>
+          </a:p>
+        </p:txBody>
+      </p:sp>
+    </p:spTree>
+    <p:extLst>
+      <p:ext uri="{BB962C8B-B14F-4D97-AF65-F5344CB8AC3E}">
+        <p14:creationId xmlns:p14="http://schemas.microsoft.com/office/powerpoint/2010/main" val="1024086991"/>
+      </p:ext>
+    </p:extLst>
+  </p:cSld>
+  <p:clrMapOvr>
+    <a:masterClrMapping/>
+  </p:clrMapOvr>
+</p:notes>
+</file>
+
+<file path=ppt/notesSlides/notesSlide49.xml><?xml version="1.0" encoding="utf-8"?>
+<p:notes xmlns:a="http://schemas.openxmlformats.org/drawingml/2006/main" xmlns:r="http://schemas.openxmlformats.org/officeDocument/2006/relationships" xmlns:p="http://schemas.openxmlformats.org/presentationml/2006/main">
+  <p:cSld>
+    <p:spTree>
+      <p:nvGrpSpPr>
+        <p:cNvPr id="1" name=""/>
+        <p:cNvGrpSpPr/>
+        <p:nvPr/>
+      </p:nvGrpSpPr>
+      <p:grpSpPr>
+        <a:xfrm>
+          <a:off x="0" y="0"/>
+          <a:ext cx="0" cy="0"/>
+          <a:chOff x="0" y="0"/>
+          <a:chExt cx="0" cy="0"/>
+        </a:xfrm>
+      </p:grpSpPr>
+      <p:sp>
+        <p:nvSpPr>
+          <p:cNvPr id="2" name="Slide Image Placeholder 1"/>
+          <p:cNvSpPr>
+            <a:spLocks noGrp="1" noRot="1" noChangeAspect="1"/>
+          </p:cNvSpPr>
+          <p:nvPr>
+            <p:ph type="sldImg"/>
+          </p:nvPr>
+        </p:nvSpPr>
+        <p:spPr/>
+      </p:sp>
+      <p:sp>
+        <p:nvSpPr>
+          <p:cNvPr id="3" name="Notes Placeholder 2"/>
+          <p:cNvSpPr>
+            <a:spLocks noGrp="1"/>
+          </p:cNvSpPr>
+          <p:nvPr>
+            <p:ph type="body" idx="1"/>
+          </p:nvPr>
+        </p:nvSpPr>
+        <p:spPr/>
+        <p:txBody>
+          <a:bodyPr/>
+          <a:lstStyle/>
+          <a:p>
+            <a:r>
+              <a:rPr lang="en-US" dirty="0"/>
+              <a:t>Let us play the bilingual game. I say a word in English, and you give me the French word. Then we do the reverse.</a:t>
+            </a:r>
+            <a:endParaRPr lang="en-US" dirty="0"/>
+          </a:p>
+        </p:txBody>
+      </p:sp>
+      <p:sp>
+        <p:nvSpPr>
+          <p:cNvPr id="4" name="Slide Number Placeholder 3"/>
+          <p:cNvSpPr>
+            <a:spLocks noGrp="1"/>
+          </p:cNvSpPr>
+          <p:nvPr>
+            <p:ph type="sldNum" sz="quarter" idx="10"/>
+          </p:nvPr>
+        </p:nvSpPr>
+        <p:spPr/>
+        <p:txBody>
+          <a:bodyPr/>
+          <a:lstStyle/>
+          <a:p>
+            <a:fld id="{F7021451-1387-4CA6-816F-3879F97B5CBC}" type="slidenum">
+              <a:rPr lang="en-US"/>
+              <a:t>49</a:t>
             </a:fld>
             <a:endParaRPr lang="en-US"/>
           </a:p>
@@ -4179,6 +4450,358 @@
             <a:fld id="{F7021451-1387-4CA6-816F-3879F97B5CBC}" type="slidenum">
               <a:rPr lang="en-US"/>
               <a:t>5</a:t>
+            </a:fld>
+            <a:endParaRPr lang="en-US"/>
+          </a:p>
+        </p:txBody>
+      </p:sp>
+    </p:spTree>
+    <p:extLst>
+      <p:ext uri="{BB962C8B-B14F-4D97-AF65-F5344CB8AC3E}">
+        <p14:creationId xmlns:p14="http://schemas.microsoft.com/office/powerpoint/2010/main" val="1024086991"/>
+      </p:ext>
+    </p:extLst>
+  </p:cSld>
+  <p:clrMapOvr>
+    <a:masterClrMapping/>
+  </p:clrMapOvr>
+</p:notes>
+</file>
+
+<file path=ppt/notesSlides/notesSlide50.xml><?xml version="1.0" encoding="utf-8"?>
+<p:notes xmlns:a="http://schemas.openxmlformats.org/drawingml/2006/main" xmlns:r="http://schemas.openxmlformats.org/officeDocument/2006/relationships" xmlns:p="http://schemas.openxmlformats.org/presentationml/2006/main">
+  <p:cSld>
+    <p:spTree>
+      <p:nvGrpSpPr>
+        <p:cNvPr id="1" name=""/>
+        <p:cNvGrpSpPr/>
+        <p:nvPr/>
+      </p:nvGrpSpPr>
+      <p:grpSpPr>
+        <a:xfrm>
+          <a:off x="0" y="0"/>
+          <a:ext cx="0" cy="0"/>
+          <a:chOff x="0" y="0"/>
+          <a:chExt cx="0" cy="0"/>
+        </a:xfrm>
+      </p:grpSpPr>
+      <p:sp>
+        <p:nvSpPr>
+          <p:cNvPr id="2" name="Slide Image Placeholder 1"/>
+          <p:cNvSpPr>
+            <a:spLocks noGrp="1" noRot="1" noChangeAspect="1"/>
+          </p:cNvSpPr>
+          <p:nvPr>
+            <p:ph type="sldImg"/>
+          </p:nvPr>
+        </p:nvSpPr>
+        <p:spPr/>
+      </p:sp>
+      <p:sp>
+        <p:nvSpPr>
+          <p:cNvPr id="3" name="Notes Placeholder 2"/>
+          <p:cNvSpPr>
+            <a:spLocks noGrp="1"/>
+          </p:cNvSpPr>
+          <p:nvPr>
+            <p:ph type="body" idx="1"/>
+          </p:nvPr>
+        </p:nvSpPr>
+        <p:spPr/>
+        <p:txBody>
+          <a:bodyPr/>
+          <a:lstStyle/>
+          <a:p>
+            <a:r>
+              <a:rPr lang="en-US" dirty="0"/>
+              <a:t>I record this information in the official logbook of the class after the lesson.</a:t>
+            </a:r>
+            <a:endParaRPr lang="en-US" dirty="0"/>
+          </a:p>
+        </p:txBody>
+      </p:sp>
+      <p:sp>
+        <p:nvSpPr>
+          <p:cNvPr id="4" name="Slide Number Placeholder 3"/>
+          <p:cNvSpPr>
+            <a:spLocks noGrp="1"/>
+          </p:cNvSpPr>
+          <p:nvPr>
+            <p:ph type="sldNum" sz="quarter" idx="10"/>
+          </p:nvPr>
+        </p:nvSpPr>
+        <p:spPr/>
+        <p:txBody>
+          <a:bodyPr/>
+          <a:lstStyle/>
+          <a:p>
+            <a:fld id="{F7021451-1387-4CA6-816F-3879F97B5CBC}" type="slidenum">
+              <a:rPr lang="en-US"/>
+              <a:t>50</a:t>
+            </a:fld>
+            <a:endParaRPr lang="en-US"/>
+          </a:p>
+        </p:txBody>
+      </p:sp>
+    </p:spTree>
+    <p:extLst>
+      <p:ext uri="{BB962C8B-B14F-4D97-AF65-F5344CB8AC3E}">
+        <p14:creationId xmlns:p14="http://schemas.microsoft.com/office/powerpoint/2010/main" val="1024086991"/>
+      </p:ext>
+    </p:extLst>
+  </p:cSld>
+  <p:clrMapOvr>
+    <a:masterClrMapping/>
+  </p:clrMapOvr>
+</p:notes>
+</file>
+
+<file path=ppt/notesSlides/notesSlide51.xml><?xml version="1.0" encoding="utf-8"?>
+<p:notes xmlns:a="http://schemas.openxmlformats.org/drawingml/2006/main" xmlns:r="http://schemas.openxmlformats.org/officeDocument/2006/relationships" xmlns:p="http://schemas.openxmlformats.org/presentationml/2006/main">
+  <p:cSld>
+    <p:spTree>
+      <p:nvGrpSpPr>
+        <p:cNvPr id="1" name=""/>
+        <p:cNvGrpSpPr/>
+        <p:nvPr/>
+      </p:nvGrpSpPr>
+      <p:grpSpPr>
+        <a:xfrm>
+          <a:off x="0" y="0"/>
+          <a:ext cx="0" cy="0"/>
+          <a:chOff x="0" y="0"/>
+          <a:chExt cx="0" cy="0"/>
+        </a:xfrm>
+      </p:grpSpPr>
+      <p:sp>
+        <p:nvSpPr>
+          <p:cNvPr id="2" name="Slide Image Placeholder 1"/>
+          <p:cNvSpPr>
+            <a:spLocks noGrp="1" noRot="1" noChangeAspect="1"/>
+          </p:cNvSpPr>
+          <p:nvPr>
+            <p:ph type="sldImg"/>
+          </p:nvPr>
+        </p:nvSpPr>
+        <p:spPr/>
+      </p:sp>
+      <p:sp>
+        <p:nvSpPr>
+          <p:cNvPr id="3" name="Notes Placeholder 2"/>
+          <p:cNvSpPr>
+            <a:spLocks noGrp="1"/>
+          </p:cNvSpPr>
+          <p:nvPr>
+            <p:ph type="body" idx="1"/>
+          </p:nvPr>
+        </p:nvSpPr>
+        <p:spPr/>
+        <p:txBody>
+          <a:bodyPr/>
+          <a:lstStyle/>
+          <a:p>
+            <a:r>
+              <a:rPr lang="en-US" dirty="0"/>
+              <a:t>I complete the second page of the logbook: the matter taught, the evaluation, the homework and the attendance.</a:t>
+            </a:r>
+            <a:endParaRPr lang="en-US" dirty="0"/>
+          </a:p>
+        </p:txBody>
+      </p:sp>
+      <p:sp>
+        <p:nvSpPr>
+          <p:cNvPr id="4" name="Slide Number Placeholder 3"/>
+          <p:cNvSpPr>
+            <a:spLocks noGrp="1"/>
+          </p:cNvSpPr>
+          <p:nvPr>
+            <p:ph type="sldNum" sz="quarter" idx="10"/>
+          </p:nvPr>
+        </p:nvSpPr>
+        <p:spPr/>
+        <p:txBody>
+          <a:bodyPr/>
+          <a:lstStyle/>
+          <a:p>
+            <a:fld id="{F7021451-1387-4CA6-816F-3879F97B5CBC}" type="slidenum">
+              <a:rPr lang="en-US"/>
+              <a:t>51</a:t>
+            </a:fld>
+            <a:endParaRPr lang="en-US"/>
+          </a:p>
+        </p:txBody>
+      </p:sp>
+    </p:spTree>
+    <p:extLst>
+      <p:ext uri="{BB962C8B-B14F-4D97-AF65-F5344CB8AC3E}">
+        <p14:creationId xmlns:p14="http://schemas.microsoft.com/office/powerpoint/2010/main" val="1024086991"/>
+      </p:ext>
+    </p:extLst>
+  </p:cSld>
+  <p:clrMapOvr>
+    <a:masterClrMapping/>
+  </p:clrMapOvr>
+</p:notes>
+</file>
+
+<file path=ppt/notesSlides/notesSlide52.xml><?xml version="1.0" encoding="utf-8"?>
+<p:notes xmlns:a="http://schemas.openxmlformats.org/drawingml/2006/main" xmlns:r="http://schemas.openxmlformats.org/officeDocument/2006/relationships" xmlns:p="http://schemas.openxmlformats.org/presentationml/2006/main">
+  <p:cSld>
+    <p:spTree>
+      <p:nvGrpSpPr>
+        <p:cNvPr id="1" name=""/>
+        <p:cNvGrpSpPr/>
+        <p:nvPr/>
+      </p:nvGrpSpPr>
+      <p:grpSpPr>
+        <a:xfrm>
+          <a:off x="0" y="0"/>
+          <a:ext cx="0" cy="0"/>
+          <a:chOff x="0" y="0"/>
+          <a:chExt cx="0" cy="0"/>
+        </a:xfrm>
+      </p:grpSpPr>
+      <p:sp>
+        <p:nvSpPr>
+          <p:cNvPr id="2" name="Slide Image Placeholder 1"/>
+          <p:cNvSpPr>
+            <a:spLocks noGrp="1" noRot="1" noChangeAspect="1"/>
+          </p:cNvSpPr>
+          <p:nvPr>
+            <p:ph type="sldImg"/>
+          </p:nvPr>
+        </p:nvSpPr>
+        <p:spPr/>
+      </p:sp>
+      <p:sp>
+        <p:nvSpPr>
+          <p:cNvPr id="3" name="Notes Placeholder 2"/>
+          <p:cNvSpPr>
+            <a:spLocks noGrp="1"/>
+          </p:cNvSpPr>
+          <p:nvPr>
+            <p:ph type="body" idx="1"/>
+          </p:nvPr>
+        </p:nvSpPr>
+        <p:spPr/>
+        <p:txBody>
+          <a:bodyPr/>
+          <a:lstStyle/>
+          <a:p>
+            <a:r>
+              <a:rPr lang="en-US" dirty="0"/>
+              <a:t>This slide is for me, the teacher: it gives the timing of the lesson and what to do if the projector is not available.</a:t>
+            </a:r>
+            <a:endParaRPr lang="en-US" dirty="0"/>
+          </a:p>
+        </p:txBody>
+      </p:sp>
+      <p:sp>
+        <p:nvSpPr>
+          <p:cNvPr id="4" name="Slide Number Placeholder 3"/>
+          <p:cNvSpPr>
+            <a:spLocks noGrp="1"/>
+          </p:cNvSpPr>
+          <p:nvPr>
+            <p:ph type="sldNum" sz="quarter" idx="10"/>
+          </p:nvPr>
+        </p:nvSpPr>
+        <p:spPr/>
+        <p:txBody>
+          <a:bodyPr/>
+          <a:lstStyle/>
+          <a:p>
+            <a:fld id="{F7021451-1387-4CA6-816F-3879F97B5CBC}" type="slidenum">
+              <a:rPr lang="en-US"/>
+              <a:t>52</a:t>
+            </a:fld>
+            <a:endParaRPr lang="en-US"/>
+          </a:p>
+        </p:txBody>
+      </p:sp>
+    </p:spTree>
+    <p:extLst>
+      <p:ext uri="{BB962C8B-B14F-4D97-AF65-F5344CB8AC3E}">
+        <p14:creationId xmlns:p14="http://schemas.microsoft.com/office/powerpoint/2010/main" val="1024086991"/>
+      </p:ext>
+    </p:extLst>
+  </p:cSld>
+  <p:clrMapOvr>
+    <a:masterClrMapping/>
+  </p:clrMapOvr>
+</p:notes>
+</file>
+
+<file path=ppt/notesSlides/notesSlide53.xml><?xml version="1.0" encoding="utf-8"?>
+<p:notes xmlns:a="http://schemas.openxmlformats.org/drawingml/2006/main" xmlns:r="http://schemas.openxmlformats.org/officeDocument/2006/relationships" xmlns:p="http://schemas.openxmlformats.org/presentationml/2006/main">
+  <p:cSld>
+    <p:spTree>
+      <p:nvGrpSpPr>
+        <p:cNvPr id="1" name=""/>
+        <p:cNvGrpSpPr/>
+        <p:nvPr/>
+      </p:nvGrpSpPr>
+      <p:grpSpPr>
+        <a:xfrm>
+          <a:off x="0" y="0"/>
+          <a:ext cx="0" cy="0"/>
+          <a:chOff x="0" y="0"/>
+          <a:chExt cx="0" cy="0"/>
+        </a:xfrm>
+      </p:grpSpPr>
+      <p:sp>
+        <p:nvSpPr>
+          <p:cNvPr id="2" name="Slide Image Placeholder 1"/>
+          <p:cNvSpPr>
+            <a:spLocks noGrp="1" noRot="1" noChangeAspect="1"/>
+          </p:cNvSpPr>
+          <p:nvPr>
+            <p:ph type="sldImg"/>
+          </p:nvPr>
+        </p:nvSpPr>
+        <p:spPr/>
+      </p:sp>
+      <p:sp>
+        <p:nvSpPr>
+          <p:cNvPr id="3" name="Notes Placeholder 2"/>
+          <p:cNvSpPr>
+            <a:spLocks noGrp="1"/>
+          </p:cNvSpPr>
+          <p:nvPr>
+            <p:ph type="body" idx="1"/>
+          </p:nvPr>
+        </p:nvSpPr>
+        <p:spPr/>
+        <p:txBody>
+          <a:bodyPr/>
+          <a:lstStyle/>
+          <a:p>
+            <a:r>
+              <a:rPr lang="en-US" dirty="0"/>
+              <a:t>These are the references and picture credits used to prepare this lesson.</a:t>
+            </a:r>
+            <a:endParaRPr lang="en-US" dirty="0"/>
+          </a:p>
+        </p:txBody>
+      </p:sp>
+      <p:sp>
+        <p:nvSpPr>
+          <p:cNvPr id="4" name="Slide Number Placeholder 3"/>
+          <p:cNvSpPr>
+            <a:spLocks noGrp="1"/>
+          </p:cNvSpPr>
+          <p:nvPr>
+            <p:ph type="sldNum" sz="quarter" idx="10"/>
+          </p:nvPr>
+        </p:nvSpPr>
+        <p:spPr/>
+        <p:txBody>
+          <a:bodyPr/>
+          <a:lstStyle/>
+          <a:p>
+            <a:fld id="{F7021451-1387-4CA6-816F-3879F97B5CBC}" type="slidenum">
+              <a:rPr lang="en-US"/>
+              <a:t>53</a:t>
             </a:fld>
             <a:endParaRPr lang="en-US"/>
           </a:p>
@@ -5887,7 +6510,7 @@
         <p:spPr>
           <a:xfrm>
             <a:off x="0" y="658368"/>
-            <a:ext cx="5120640" cy="5833872"/>
+            <a:ext cx="3840480" cy="5833872"/>
           </a:xfrm>
           <a:prstGeom prst="rect">
             <a:avLst/>
@@ -5902,8 +6525,8 @@
         </p:nvSpPr>
         <p:spPr>
           <a:xfrm>
-            <a:off x="5349240" y="1005840"/>
-            <a:ext cx="6522415" cy="731520"/>
+            <a:off x="4069080" y="1005840"/>
+            <a:ext cx="7802575" cy="731520"/>
           </a:xfrm>
           <a:prstGeom prst="rect">
             <a:avLst/>
@@ -5943,8 +6566,8 @@
         </p:nvSpPr>
         <p:spPr>
           <a:xfrm>
-            <a:off x="5349240" y="1783080"/>
-            <a:ext cx="6522415" cy="4663440"/>
+            <a:off x="4069080" y="1783080"/>
+            <a:ext cx="7802575" cy="4663440"/>
           </a:xfrm>
           <a:prstGeom prst="rect">
             <a:avLst/>
@@ -5971,7 +6594,7 @@
                 <a:ea typeface="Times New Roman" pitchFamily="34" charset="-122"/>
                 <a:cs typeface="Times New Roman" pitchFamily="34" charset="-120"/>
               </a:rPr>
-              <a:t>The Indomitable Lions play a match in Brazil. The match starts at 3 p.m. in Brazil, but in Garoua we watch it at 7 p.m. Alima wonders why the time is not the same everywhere.</a:t>
+              <a:t>The Indomitable Lions play a match in Brazil. The match starts at 3 p.m. in Brazil, but in Garoua we watch it at 7 p.m. Alima asks: "Why is the time not the same in Brazil and in Garoua at the same moment?"</a:t>
             </a:r>
             <a:endParaRPr lang="en-US" sz="4000" dirty="0"/>
           </a:p>
@@ -6409,7 +7032,7 @@
                 <a:ea typeface="Times New Roman" pitchFamily="34" charset="-122"/>
                 <a:cs typeface="Times New Roman" pitchFamily="34" charset="-120"/>
               </a:rPr>
-              <a:t>Alima does not know why Brazil and Garoua have different times.</a:t>
+              <a:t>Alima does not understand why Brazil and Garoua have different times.</a:t>
             </a:r>
             <a:endParaRPr lang="en-US" sz="4000" dirty="0"/>
           </a:p>
@@ -7285,7 +7908,7 @@
                 <a:ea typeface="Times New Roman" pitchFamily="34" charset="-122"/>
                 <a:cs typeface="Times New Roman" pitchFamily="34" charset="-120"/>
               </a:rPr>
-              <a:t>Garoua is east of Brazil. The Sun rises there first.</a:t>
+              <a:t>Garoua is east of Brazil, so it sees the Sun first.</a:t>
             </a:r>
             <a:endParaRPr lang="en-US" sz="4000" dirty="0"/>
           </a:p>
@@ -8709,7 +9332,7 @@
                 <a:ea typeface="Times New Roman" pitchFamily="34" charset="-122"/>
                 <a:cs typeface="Times New Roman" pitchFamily="34" charset="-120"/>
               </a:rPr>
-              <a:t>Activity 1: Question</a:t>
+              <a:t>Activity 1: Question 1</a:t>
             </a:r>
             <a:endParaRPr lang="en-US" sz="3600" dirty="0"/>
           </a:p>
@@ -8751,7 +9374,7 @@
                 <a:ea typeface="Times New Roman" pitchFamily="34" charset="-122"/>
                 <a:cs typeface="Times New Roman" pitchFamily="34" charset="-120"/>
               </a:rPr>
-              <a:t>It is 12:00 at 0°. What time is it at 15° E and at 15° W?</a:t>
+              <a:t>It is 12:00 at 0°. What time is it at 15° E?</a:t>
             </a:r>
             <a:endParaRPr lang="en-US" sz="4000" dirty="0"/>
           </a:p>
@@ -8928,7 +9551,7 @@
                 <a:ea typeface="Times New Roman" pitchFamily="34" charset="-122"/>
                 <a:cs typeface="Times New Roman" pitchFamily="34" charset="-120"/>
               </a:rPr>
-              <a:t>Activity 1: Answer</a:t>
+              <a:t>Activity 1: Answer 1</a:t>
             </a:r>
             <a:endParaRPr lang="en-US" sz="3600" dirty="0"/>
           </a:p>
@@ -8970,7 +9593,7 @@
                 <a:ea typeface="Times New Roman" pitchFamily="34" charset="-122"/>
                 <a:cs typeface="Times New Roman" pitchFamily="34" charset="-120"/>
               </a:rPr>
-              <a:t>13:00 at 15° E, 11:00 at 15° W.</a:t>
+              <a:t>13:00.</a:t>
             </a:r>
             <a:endParaRPr lang="en-US" sz="4000" dirty="0"/>
           </a:p>
@@ -9082,54 +9705,15 @@
                 <a:ea typeface="Calibri" pitchFamily="34" charset="-122"/>
                 <a:cs typeface="Calibri" pitchFamily="34" charset="-120"/>
               </a:rPr>
-              <a:t>2. TIME ZONES</a:t>
+              <a:t>1. LOCAL TIME</a:t>
             </a:r>
             <a:endParaRPr lang="en-US" sz="1400" dirty="0"/>
-          </a:p>
-        </p:txBody>
-      </p:sp>
-      <p:sp>
-        <p:nvSpPr>
-          <p:cNvPr id="3" name="Text 1"/>
-          <p:cNvSpPr/>
-          <p:nvPr/>
-        </p:nvSpPr>
-        <p:spPr>
-          <a:xfrm>
-            <a:off x="457200" y="1005840"/>
-            <a:ext cx="11277295" cy="731520"/>
-          </a:xfrm>
-          <a:prstGeom prst="rect">
-            <a:avLst/>
-          </a:prstGeom>
-          <a:noFill/>
-          <a:ln/>
-        </p:spPr>
-        <p:txBody>
-          <a:bodyPr wrap="square" lIns="0" tIns="0" rIns="0" bIns="0" rtlCol="0" anchor="ctr"/>
-          <a:lstStyle/>
-          <a:p>
-            <a:pPr algn="ctr" indent="0" marL="0">
-              <a:buNone/>
-            </a:pPr>
-            <a:r>
-              <a:rPr lang="en-US" sz="3600" b="1" dirty="0">
-                <a:solidFill>
-                  <a:srgbClr val="990011"/>
-                </a:solidFill>
-                <a:latin typeface="Times New Roman" pitchFamily="34" charset="0"/>
-                <a:ea typeface="Times New Roman" pitchFamily="34" charset="-122"/>
-                <a:cs typeface="Times New Roman" pitchFamily="34" charset="-120"/>
-              </a:rPr>
-              <a:t>Activity 2</a:t>
-            </a:r>
-            <a:endParaRPr lang="en-US" sz="3600" dirty="0"/>
           </a:p>
         </p:txBody>
       </p:sp>
       <p:pic>
         <p:nvPicPr>
-          <p:cNvPr id="4" name="Image 0" descr="/home/claude/f4/img/v2/time_zones_big.png">    </p:cNvPr>
+          <p:cNvPr id="3" name="Image 0" descr="/home/claude/f4/img/minesec_sheet.png">    </p:cNvPr>
           <p:cNvPicPr>
             <a:picLocks noChangeAspect="1"/>
           </p:cNvPicPr>
@@ -9143,8 +9727,8 @@
         </p:blipFill>
         <p:spPr>
           <a:xfrm>
-            <a:off x="1034813" y="1783080"/>
-            <a:ext cx="10122069" cy="4270248"/>
+            <a:off x="0" y="658368"/>
+            <a:ext cx="5120640" cy="5833872"/>
           </a:xfrm>
           <a:prstGeom prst="rect">
             <a:avLst/>
@@ -9153,14 +9737,14 @@
       </p:pic>
       <p:sp>
         <p:nvSpPr>
-          <p:cNvPr id="5" name="Text 2"/>
+          <p:cNvPr id="4" name="Text 1"/>
           <p:cNvSpPr/>
           <p:nvPr/>
         </p:nvSpPr>
         <p:spPr>
           <a:xfrm>
-            <a:off x="457200" y="6089904"/>
-            <a:ext cx="11277295" cy="347472"/>
+            <a:off x="5349240" y="1005840"/>
+            <a:ext cx="6522415" cy="731520"/>
           </a:xfrm>
           <a:prstGeom prst="rect">
             <a:avLst/>
@@ -9169,24 +9753,68 @@
           <a:ln/>
         </p:spPr>
         <p:txBody>
-          <a:bodyPr wrap="square" lIns="0" tIns="0" rIns="0" bIns="0" rtlCol="0" anchor="ctr"/>
+          <a:bodyPr wrap="square" lIns="0" tIns="0" rIns="0" bIns="0" rtlCol="0" anchor="ctr">
+            <a:normAutofit/>
+          </a:bodyPr>
           <a:lstStyle/>
           <a:p>
             <a:pPr algn="ctr" indent="0" marL="0">
               <a:buNone/>
             </a:pPr>
             <a:r>
-              <a:rPr lang="en-US" sz="1800" i="1" dirty="0">
-                <a:solidFill>
-                  <a:srgbClr val="555555"/>
+              <a:rPr lang="en-US" sz="3600" b="1" dirty="0">
+                <a:solidFill>
+                  <a:srgbClr val="990011"/>
                 </a:solidFill>
                 <a:latin typeface="Times New Roman" pitchFamily="34" charset="0"/>
                 <a:ea typeface="Times New Roman" pitchFamily="34" charset="-122"/>
                 <a:cs typeface="Times New Roman" pitchFamily="34" charset="-120"/>
               </a:rPr>
-              <a:t>The time zones of the world.</a:t>
-            </a:r>
-            <a:endParaRPr lang="en-US" sz="1800" dirty="0"/>
+              <a:t>Activity 1: Question 2</a:t>
+            </a:r>
+            <a:endParaRPr lang="en-US" sz="3600" dirty="0"/>
+          </a:p>
+        </p:txBody>
+      </p:sp>
+      <p:sp>
+        <p:nvSpPr>
+          <p:cNvPr id="5" name="Text 2"/>
+          <p:cNvSpPr/>
+          <p:nvPr/>
+        </p:nvSpPr>
+        <p:spPr>
+          <a:xfrm>
+            <a:off x="5349240" y="1783080"/>
+            <a:ext cx="6522415" cy="4663440"/>
+          </a:xfrm>
+          <a:prstGeom prst="rect">
+            <a:avLst/>
+          </a:prstGeom>
+          <a:noFill/>
+          <a:ln/>
+        </p:spPr>
+        <p:txBody>
+          <a:bodyPr wrap="square" lIns="0" tIns="0" rIns="0" bIns="0" rtlCol="0" anchor="t"/>
+          <a:lstStyle/>
+          <a:p>
+            <a:pPr algn="l" indent="0" marL="0">
+              <a:spcAft>
+                <a:spcPts val="800"/>
+              </a:spcAft>
+              <a:buNone/>
+            </a:pPr>
+            <a:r>
+              <a:rPr lang="en-US" sz="4000" dirty="0">
+                <a:solidFill>
+                  <a:srgbClr val="111111"/>
+                </a:solidFill>
+                <a:latin typeface="Times New Roman" pitchFamily="34" charset="0"/>
+                <a:ea typeface="Times New Roman" pitchFamily="34" charset="-122"/>
+                <a:cs typeface="Times New Roman" pitchFamily="34" charset="-120"/>
+              </a:rPr>
+              <a:t>What time is it at 15° W?</a:t>
+            </a:r>
+            <a:endParaRPr lang="en-US" sz="4000" dirty="0"/>
           </a:p>
         </p:txBody>
       </p:sp>
@@ -9296,7 +9924,7 @@
                 <a:ea typeface="Calibri" pitchFamily="34" charset="-122"/>
                 <a:cs typeface="Calibri" pitchFamily="34" charset="-120"/>
               </a:rPr>
-              <a:t>2. TIME ZONES</a:t>
+              <a:t>1. LOCAL TIME</a:t>
             </a:r>
             <a:endParaRPr lang="en-US" sz="1400" dirty="0"/>
           </a:p>
@@ -9361,7 +9989,7 @@
                 <a:ea typeface="Times New Roman" pitchFamily="34" charset="-122"/>
                 <a:cs typeface="Times New Roman" pitchFamily="34" charset="-120"/>
               </a:rPr>
-              <a:t>Activity 2: Question</a:t>
+              <a:t>Activity 1: Answer 2</a:t>
             </a:r>
             <a:endParaRPr lang="en-US" sz="3600" dirty="0"/>
           </a:p>
@@ -9403,7 +10031,7 @@
                 <a:ea typeface="Times New Roman" pitchFamily="34" charset="-122"/>
                 <a:cs typeface="Times New Roman" pitchFamily="34" charset="-120"/>
               </a:rPr>
-              <a:t>How many time zones are there? In which one is Cameroon?</a:t>
+              <a:t>11:00.</a:t>
             </a:r>
             <a:endParaRPr lang="en-US" sz="4000" dirty="0"/>
           </a:p>
@@ -9521,9 +10149,48 @@
           </a:p>
         </p:txBody>
       </p:sp>
+      <p:sp>
+        <p:nvSpPr>
+          <p:cNvPr id="3" name="Text 1"/>
+          <p:cNvSpPr/>
+          <p:nvPr/>
+        </p:nvSpPr>
+        <p:spPr>
+          <a:xfrm>
+            <a:off x="457200" y="1005840"/>
+            <a:ext cx="11277295" cy="731520"/>
+          </a:xfrm>
+          <a:prstGeom prst="rect">
+            <a:avLst/>
+          </a:prstGeom>
+          <a:noFill/>
+          <a:ln/>
+        </p:spPr>
+        <p:txBody>
+          <a:bodyPr wrap="square" lIns="0" tIns="0" rIns="0" bIns="0" rtlCol="0" anchor="ctr"/>
+          <a:lstStyle/>
+          <a:p>
+            <a:pPr algn="ctr" indent="0" marL="0">
+              <a:buNone/>
+            </a:pPr>
+            <a:r>
+              <a:rPr lang="en-US" sz="3600" b="1" dirty="0">
+                <a:solidFill>
+                  <a:srgbClr val="990011"/>
+                </a:solidFill>
+                <a:latin typeface="Times New Roman" pitchFamily="34" charset="0"/>
+                <a:ea typeface="Times New Roman" pitchFamily="34" charset="-122"/>
+                <a:cs typeface="Times New Roman" pitchFamily="34" charset="-120"/>
+              </a:rPr>
+              <a:t>Activity 2</a:t>
+            </a:r>
+            <a:endParaRPr lang="en-US" sz="3600" dirty="0"/>
+          </a:p>
+        </p:txBody>
+      </p:sp>
       <p:pic>
         <p:nvPicPr>
-          <p:cNvPr id="3" name="Image 0" descr="/home/claude/f4/img/minesec_sheet.png">    </p:cNvPr>
+          <p:cNvPr id="4" name="Image 0" descr="/home/claude/f4/img/v2/time_zones_big.png">    </p:cNvPr>
           <p:cNvPicPr>
             <a:picLocks noChangeAspect="1"/>
           </p:cNvPicPr>
@@ -9537,8 +10204,8 @@
         </p:blipFill>
         <p:spPr>
           <a:xfrm>
-            <a:off x="0" y="658368"/>
-            <a:ext cx="5120640" cy="5833872"/>
+            <a:off x="1034813" y="1783080"/>
+            <a:ext cx="10122069" cy="4270248"/>
           </a:xfrm>
           <a:prstGeom prst="rect">
             <a:avLst/>
@@ -9547,14 +10214,14 @@
       </p:pic>
       <p:sp>
         <p:nvSpPr>
-          <p:cNvPr id="4" name="Text 1"/>
+          <p:cNvPr id="5" name="Text 2"/>
           <p:cNvSpPr/>
           <p:nvPr/>
         </p:nvSpPr>
         <p:spPr>
           <a:xfrm>
-            <a:off x="5349240" y="1005840"/>
-            <a:ext cx="6522415" cy="731520"/>
+            <a:off x="457200" y="6089904"/>
+            <a:ext cx="11277295" cy="347472"/>
           </a:xfrm>
           <a:prstGeom prst="rect">
             <a:avLst/>
@@ -9563,68 +10230,24 @@
           <a:ln/>
         </p:spPr>
         <p:txBody>
-          <a:bodyPr wrap="square" lIns="0" tIns="0" rIns="0" bIns="0" rtlCol="0" anchor="ctr">
-            <a:normAutofit/>
-          </a:bodyPr>
+          <a:bodyPr wrap="square" lIns="0" tIns="0" rIns="0" bIns="0" rtlCol="0" anchor="ctr"/>
           <a:lstStyle/>
           <a:p>
             <a:pPr algn="ctr" indent="0" marL="0">
               <a:buNone/>
             </a:pPr>
             <a:r>
-              <a:rPr lang="en-US" sz="3600" b="1" dirty="0">
-                <a:solidFill>
-                  <a:srgbClr val="990011"/>
+              <a:rPr lang="en-US" sz="1800" i="1" dirty="0">
+                <a:solidFill>
+                  <a:srgbClr val="555555"/>
                 </a:solidFill>
                 <a:latin typeface="Times New Roman" pitchFamily="34" charset="0"/>
                 <a:ea typeface="Times New Roman" pitchFamily="34" charset="-122"/>
                 <a:cs typeface="Times New Roman" pitchFamily="34" charset="-120"/>
               </a:rPr>
-              <a:t>Activity 2: Answer</a:t>
-            </a:r>
-            <a:endParaRPr lang="en-US" sz="3600" dirty="0"/>
-          </a:p>
-        </p:txBody>
-      </p:sp>
-      <p:sp>
-        <p:nvSpPr>
-          <p:cNvPr id="5" name="Text 2"/>
-          <p:cNvSpPr/>
-          <p:nvPr/>
-        </p:nvSpPr>
-        <p:spPr>
-          <a:xfrm>
-            <a:off x="5349240" y="1783080"/>
-            <a:ext cx="6522415" cy="4663440"/>
-          </a:xfrm>
-          <a:prstGeom prst="rect">
-            <a:avLst/>
-          </a:prstGeom>
-          <a:noFill/>
-          <a:ln/>
-        </p:spPr>
-        <p:txBody>
-          <a:bodyPr wrap="square" lIns="0" tIns="0" rIns="0" bIns="0" rtlCol="0" anchor="t"/>
-          <a:lstStyle/>
-          <a:p>
-            <a:pPr algn="l" indent="0" marL="0">
-              <a:spcAft>
-                <a:spcPts val="800"/>
-              </a:spcAft>
-              <a:buNone/>
-            </a:pPr>
-            <a:r>
-              <a:rPr lang="en-US" sz="4000" dirty="0">
-                <a:solidFill>
-                  <a:srgbClr val="111111"/>
-                </a:solidFill>
-                <a:latin typeface="Times New Roman" pitchFamily="34" charset="0"/>
-                <a:ea typeface="Times New Roman" pitchFamily="34" charset="-122"/>
-                <a:cs typeface="Times New Roman" pitchFamily="34" charset="-120"/>
-              </a:rPr>
-              <a:t>24 time zones. Cameroon is in GMT + 1.</a:t>
-            </a:r>
-            <a:endParaRPr lang="en-US" sz="4000" dirty="0"/>
+              <a:t>The time zones of the world.</a:t>
+            </a:r>
+            <a:endParaRPr lang="en-US" sz="1800" dirty="0"/>
           </a:p>
         </p:txBody>
       </p:sp>
@@ -9740,48 +10363,9 @@
           </a:p>
         </p:txBody>
       </p:sp>
-      <p:sp>
-        <p:nvSpPr>
-          <p:cNvPr id="3" name="Text 1"/>
-          <p:cNvSpPr/>
-          <p:nvPr/>
-        </p:nvSpPr>
-        <p:spPr>
-          <a:xfrm>
-            <a:off x="457200" y="1005840"/>
-            <a:ext cx="11277295" cy="731520"/>
-          </a:xfrm>
-          <a:prstGeom prst="rect">
-            <a:avLst/>
-          </a:prstGeom>
-          <a:noFill/>
-          <a:ln/>
-        </p:spPr>
-        <p:txBody>
-          <a:bodyPr wrap="square" lIns="0" tIns="0" rIns="0" bIns="0" rtlCol="0" anchor="ctr"/>
-          <a:lstStyle/>
-          <a:p>
-            <a:pPr algn="ctr" indent="0" marL="0">
-              <a:buNone/>
-            </a:pPr>
-            <a:r>
-              <a:rPr lang="en-US" sz="3600" b="1" dirty="0">
-                <a:solidFill>
-                  <a:srgbClr val="990011"/>
-                </a:solidFill>
-                <a:latin typeface="Times New Roman" pitchFamily="34" charset="0"/>
-                <a:ea typeface="Times New Roman" pitchFamily="34" charset="-122"/>
-                <a:cs typeface="Times New Roman" pitchFamily="34" charset="-120"/>
-              </a:rPr>
-              <a:t>Activity 3</a:t>
-            </a:r>
-            <a:endParaRPr lang="en-US" sz="3600" dirty="0"/>
-          </a:p>
-        </p:txBody>
-      </p:sp>
       <p:pic>
         <p:nvPicPr>
-          <p:cNvPr id="4" name="Image 0" descr="/home/claude/f4/img/v2/f4_worldclocks.jpg">    </p:cNvPr>
+          <p:cNvPr id="3" name="Image 0" descr="/home/claude/f4/img/minesec_sheet.png">    </p:cNvPr>
           <p:cNvPicPr>
             <a:picLocks noChangeAspect="1"/>
           </p:cNvPicPr>
@@ -9795,8 +10379,8 @@
         </p:blipFill>
         <p:spPr>
           <a:xfrm>
-            <a:off x="2246610" y="1783080"/>
-            <a:ext cx="7698475" cy="4270248"/>
+            <a:off x="0" y="658368"/>
+            <a:ext cx="5120640" cy="5833872"/>
           </a:xfrm>
           <a:prstGeom prst="rect">
             <a:avLst/>
@@ -9805,14 +10389,14 @@
       </p:pic>
       <p:sp>
         <p:nvSpPr>
-          <p:cNvPr id="5" name="Text 2"/>
+          <p:cNvPr id="4" name="Text 1"/>
           <p:cNvSpPr/>
           <p:nvPr/>
         </p:nvSpPr>
         <p:spPr>
           <a:xfrm>
-            <a:off x="457200" y="6089904"/>
-            <a:ext cx="11277295" cy="347472"/>
+            <a:off x="5349240" y="1005840"/>
+            <a:ext cx="6522415" cy="731520"/>
           </a:xfrm>
           <a:prstGeom prst="rect">
             <a:avLst/>
@@ -9821,24 +10405,68 @@
           <a:ln/>
         </p:spPr>
         <p:txBody>
-          <a:bodyPr wrap="square" lIns="0" tIns="0" rIns="0" bIns="0" rtlCol="0" anchor="ctr"/>
+          <a:bodyPr wrap="square" lIns="0" tIns="0" rIns="0" bIns="0" rtlCol="0" anchor="ctr">
+            <a:normAutofit/>
+          </a:bodyPr>
           <a:lstStyle/>
           <a:p>
             <a:pPr algn="ctr" indent="0" marL="0">
               <a:buNone/>
             </a:pPr>
             <a:r>
-              <a:rPr lang="en-US" sz="1800" i="1" dirty="0">
-                <a:solidFill>
-                  <a:srgbClr val="555555"/>
+              <a:rPr lang="en-US" sz="3600" b="1" dirty="0">
+                <a:solidFill>
+                  <a:srgbClr val="990011"/>
                 </a:solidFill>
                 <a:latin typeface="Times New Roman" pitchFamily="34" charset="0"/>
                 <a:ea typeface="Times New Roman" pitchFamily="34" charset="-122"/>
                 <a:cs typeface="Times New Roman" pitchFamily="34" charset="-120"/>
               </a:rPr>
-              <a:t>Clocks showing the time in different cities.</a:t>
-            </a:r>
-            <a:endParaRPr lang="en-US" sz="1800" dirty="0"/>
+              <a:t>Activity 2: Question</a:t>
+            </a:r>
+            <a:endParaRPr lang="en-US" sz="3600" dirty="0"/>
+          </a:p>
+        </p:txBody>
+      </p:sp>
+      <p:sp>
+        <p:nvSpPr>
+          <p:cNvPr id="5" name="Text 2"/>
+          <p:cNvSpPr/>
+          <p:nvPr/>
+        </p:nvSpPr>
+        <p:spPr>
+          <a:xfrm>
+            <a:off x="5349240" y="1783080"/>
+            <a:ext cx="6522415" cy="4663440"/>
+          </a:xfrm>
+          <a:prstGeom prst="rect">
+            <a:avLst/>
+          </a:prstGeom>
+          <a:noFill/>
+          <a:ln/>
+        </p:spPr>
+        <p:txBody>
+          <a:bodyPr wrap="square" lIns="0" tIns="0" rIns="0" bIns="0" rtlCol="0" anchor="t"/>
+          <a:lstStyle/>
+          <a:p>
+            <a:pPr algn="l" indent="0" marL="0">
+              <a:spcAft>
+                <a:spcPts val="800"/>
+              </a:spcAft>
+              <a:buNone/>
+            </a:pPr>
+            <a:r>
+              <a:rPr lang="en-US" sz="4000" dirty="0">
+                <a:solidFill>
+                  <a:srgbClr val="111111"/>
+                </a:solidFill>
+                <a:latin typeface="Times New Roman" pitchFamily="34" charset="0"/>
+                <a:ea typeface="Times New Roman" pitchFamily="34" charset="-122"/>
+                <a:cs typeface="Times New Roman" pitchFamily="34" charset="-120"/>
+              </a:rPr>
+              <a:t>In which time zone is Cameroon?</a:t>
+            </a:r>
+            <a:endParaRPr lang="en-US" sz="4000" dirty="0"/>
           </a:p>
         </p:txBody>
       </p:sp>
@@ -10013,7 +10641,7 @@
                 <a:ea typeface="Times New Roman" pitchFamily="34" charset="-122"/>
                 <a:cs typeface="Times New Roman" pitchFamily="34" charset="-120"/>
               </a:rPr>
-              <a:t>Activity 3: Question</a:t>
+              <a:t>Activity 2: Answer</a:t>
             </a:r>
             <a:endParaRPr lang="en-US" sz="3600" dirty="0"/>
           </a:p>
@@ -10055,7 +10683,7 @@
                 <a:ea typeface="Times New Roman" pitchFamily="34" charset="-122"/>
                 <a:cs typeface="Times New Roman" pitchFamily="34" charset="-120"/>
               </a:rPr>
-              <a:t>Why do these clocks show different times?</a:t>
+              <a:t>GMT + 1 (West Africa Time).</a:t>
             </a:r>
             <a:endParaRPr lang="en-US" sz="4000" dirty="0"/>
           </a:p>
@@ -10173,9 +10801,48 @@
           </a:p>
         </p:txBody>
       </p:sp>
+      <p:sp>
+        <p:nvSpPr>
+          <p:cNvPr id="3" name="Text 1"/>
+          <p:cNvSpPr/>
+          <p:nvPr/>
+        </p:nvSpPr>
+        <p:spPr>
+          <a:xfrm>
+            <a:off x="457200" y="1005840"/>
+            <a:ext cx="11277295" cy="731520"/>
+          </a:xfrm>
+          <a:prstGeom prst="rect">
+            <a:avLst/>
+          </a:prstGeom>
+          <a:noFill/>
+          <a:ln/>
+        </p:spPr>
+        <p:txBody>
+          <a:bodyPr wrap="square" lIns="0" tIns="0" rIns="0" bIns="0" rtlCol="0" anchor="ctr"/>
+          <a:lstStyle/>
+          <a:p>
+            <a:pPr algn="ctr" indent="0" marL="0">
+              <a:buNone/>
+            </a:pPr>
+            <a:r>
+              <a:rPr lang="en-US" sz="3600" b="1" dirty="0">
+                <a:solidFill>
+                  <a:srgbClr val="990011"/>
+                </a:solidFill>
+                <a:latin typeface="Times New Roman" pitchFamily="34" charset="0"/>
+                <a:ea typeface="Times New Roman" pitchFamily="34" charset="-122"/>
+                <a:cs typeface="Times New Roman" pitchFamily="34" charset="-120"/>
+              </a:rPr>
+              <a:t>Activity 3</a:t>
+            </a:r>
+            <a:endParaRPr lang="en-US" sz="3600" dirty="0"/>
+          </a:p>
+        </p:txBody>
+      </p:sp>
       <p:pic>
         <p:nvPicPr>
-          <p:cNvPr id="3" name="Image 0" descr="/home/claude/f4/img/minesec_sheet.png">    </p:cNvPr>
+          <p:cNvPr id="4" name="Image 0" descr="/home/claude/f4/img/v2/f4_worldclocks.jpg">    </p:cNvPr>
           <p:cNvPicPr>
             <a:picLocks noChangeAspect="1"/>
           </p:cNvPicPr>
@@ -10189,8 +10856,8 @@
         </p:blipFill>
         <p:spPr>
           <a:xfrm>
-            <a:off x="0" y="658368"/>
-            <a:ext cx="5120640" cy="5833872"/>
+            <a:off x="2246610" y="1783080"/>
+            <a:ext cx="7698475" cy="4270248"/>
           </a:xfrm>
           <a:prstGeom prst="rect">
             <a:avLst/>
@@ -10199,14 +10866,14 @@
       </p:pic>
       <p:sp>
         <p:nvSpPr>
-          <p:cNvPr id="4" name="Text 1"/>
+          <p:cNvPr id="5" name="Text 2"/>
           <p:cNvSpPr/>
           <p:nvPr/>
         </p:nvSpPr>
         <p:spPr>
           <a:xfrm>
-            <a:off x="5349240" y="1005840"/>
-            <a:ext cx="6522415" cy="731520"/>
+            <a:off x="457200" y="6089904"/>
+            <a:ext cx="11277295" cy="347472"/>
           </a:xfrm>
           <a:prstGeom prst="rect">
             <a:avLst/>
@@ -10215,68 +10882,24 @@
           <a:ln/>
         </p:spPr>
         <p:txBody>
-          <a:bodyPr wrap="square" lIns="0" tIns="0" rIns="0" bIns="0" rtlCol="0" anchor="ctr">
-            <a:normAutofit/>
-          </a:bodyPr>
+          <a:bodyPr wrap="square" lIns="0" tIns="0" rIns="0" bIns="0" rtlCol="0" anchor="ctr"/>
           <a:lstStyle/>
           <a:p>
             <a:pPr algn="ctr" indent="0" marL="0">
               <a:buNone/>
             </a:pPr>
             <a:r>
-              <a:rPr lang="en-US" sz="3600" b="1" dirty="0">
-                <a:solidFill>
-                  <a:srgbClr val="990011"/>
+              <a:rPr lang="en-US" sz="1800" i="1" dirty="0">
+                <a:solidFill>
+                  <a:srgbClr val="555555"/>
                 </a:solidFill>
                 <a:latin typeface="Times New Roman" pitchFamily="34" charset="0"/>
                 <a:ea typeface="Times New Roman" pitchFamily="34" charset="-122"/>
                 <a:cs typeface="Times New Roman" pitchFamily="34" charset="-120"/>
               </a:rPr>
-              <a:t>Activity 3: Answer</a:t>
-            </a:r>
-            <a:endParaRPr lang="en-US" sz="3600" dirty="0"/>
-          </a:p>
-        </p:txBody>
-      </p:sp>
-      <p:sp>
-        <p:nvSpPr>
-          <p:cNvPr id="5" name="Text 2"/>
-          <p:cNvSpPr/>
-          <p:nvPr/>
-        </p:nvSpPr>
-        <p:spPr>
-          <a:xfrm>
-            <a:off x="5349240" y="1783080"/>
-            <a:ext cx="6522415" cy="4663440"/>
-          </a:xfrm>
-          <a:prstGeom prst="rect">
-            <a:avLst/>
-          </a:prstGeom>
-          <a:noFill/>
-          <a:ln/>
-        </p:spPr>
-        <p:txBody>
-          <a:bodyPr wrap="square" lIns="0" tIns="0" rIns="0" bIns="0" rtlCol="0" anchor="t"/>
-          <a:lstStyle/>
-          <a:p>
-            <a:pPr algn="l" indent="0" marL="0">
-              <a:spcAft>
-                <a:spcPts val="800"/>
-              </a:spcAft>
-              <a:buNone/>
-            </a:pPr>
-            <a:r>
-              <a:rPr lang="en-US" sz="4000" dirty="0">
-                <a:solidFill>
-                  <a:srgbClr val="111111"/>
-                </a:solidFill>
-                <a:latin typeface="Times New Roman" pitchFamily="34" charset="0"/>
-                <a:ea typeface="Times New Roman" pitchFamily="34" charset="-122"/>
-                <a:cs typeface="Times New Roman" pitchFamily="34" charset="-120"/>
-              </a:rPr>
-              <a:t>Each city is in a different time zone.</a:t>
-            </a:r>
-            <a:endParaRPr lang="en-US" sz="4000" dirty="0"/>
+              <a:t>Clocks showing the time in different cities.</a:t>
+            </a:r>
+            <a:endParaRPr lang="en-US" sz="1800" dirty="0"/>
           </a:p>
         </p:txBody>
       </p:sp>
@@ -10386,7 +11009,7 @@
                 <a:ea typeface="Calibri" pitchFamily="34" charset="-122"/>
                 <a:cs typeface="Calibri" pitchFamily="34" charset="-120"/>
               </a:rPr>
-              <a:t>BOARD SUMMARY</a:t>
+              <a:t>2. TIME ZONES</a:t>
             </a:r>
             <a:endParaRPr lang="en-US" sz="1400" dirty="0"/>
           </a:p>
@@ -10451,7 +11074,7 @@
                 <a:ea typeface="Times New Roman" pitchFamily="34" charset="-122"/>
                 <a:cs typeface="Times New Roman" pitchFamily="34" charset="-120"/>
               </a:rPr>
-              <a:t>Board Summary</a:t>
+              <a:t>Activity 3: Question</a:t>
             </a:r>
             <a:endParaRPr lang="en-US" sz="3600" dirty="0"/>
           </a:p>
@@ -10485,7 +11108,7 @@
               <a:buNone/>
             </a:pPr>
             <a:r>
-              <a:rPr lang="en-US" sz="4000" b="1" dirty="0">
+              <a:rPr lang="en-US" sz="4000" dirty="0">
                 <a:solidFill>
                   <a:srgbClr val="111111"/>
                 </a:solidFill>
@@ -10493,47 +11116,7 @@
                 <a:ea typeface="Times New Roman" pitchFamily="34" charset="-122"/>
                 <a:cs typeface="Times New Roman" pitchFamily="34" charset="-120"/>
               </a:rPr>
-              <a:t>Topic: The Earth as a Planet in the Solar System</a:t>
-            </a:r>
-            <a:endParaRPr lang="en-US" sz="4000" dirty="0"/>
-          </a:p>
-          <a:p>
-            <a:pPr algn="l" indent="0" marL="0">
-              <a:spcAft>
-                <a:spcPts val="800"/>
-              </a:spcAft>
-              <a:buNone/>
-            </a:pPr>
-            <a:r>
-              <a:rPr lang="en-US" sz="4000" b="1" dirty="0">
-                <a:solidFill>
-                  <a:srgbClr val="111111"/>
-                </a:solidFill>
-                <a:latin typeface="Times New Roman" pitchFamily="34" charset="0"/>
-                <a:ea typeface="Times New Roman" pitchFamily="34" charset="-122"/>
-                <a:cs typeface="Times New Roman" pitchFamily="34" charset="-120"/>
-              </a:rPr>
-              <a:t>Sub-topic: Location and Time</a:t>
-            </a:r>
-            <a:endParaRPr lang="en-US" sz="4000" dirty="0"/>
-          </a:p>
-          <a:p>
-            <a:pPr algn="l" indent="0" marL="0">
-              <a:spcAft>
-                <a:spcPts val="800"/>
-              </a:spcAft>
-              <a:buNone/>
-            </a:pPr>
-            <a:r>
-              <a:rPr lang="en-US" sz="4000" b="1" dirty="0">
-                <a:solidFill>
-                  <a:srgbClr val="990011"/>
-                </a:solidFill>
-                <a:latin typeface="Times New Roman" pitchFamily="34" charset="0"/>
-                <a:ea typeface="Times New Roman" pitchFamily="34" charset="-122"/>
-                <a:cs typeface="Times New Roman" pitchFamily="34" charset="-120"/>
-              </a:rPr>
-              <a:t>Lesson 4: Local Time, Standard Time and Time Zones</a:t>
+              <a:t>Why do these clocks show different times at the same moment?</a:t>
             </a:r>
             <a:endParaRPr lang="en-US" sz="4000" dirty="0"/>
           </a:p>
@@ -10645,7 +11228,7 @@
                 <a:ea typeface="Calibri" pitchFamily="34" charset="-122"/>
                 <a:cs typeface="Calibri" pitchFamily="34" charset="-120"/>
               </a:rPr>
-              <a:t>BOARD SUMMARY</a:t>
+              <a:t>2. TIME ZONES</a:t>
             </a:r>
             <a:endParaRPr lang="en-US" sz="1400" dirty="0"/>
           </a:p>
@@ -10668,7 +11251,7 @@
         <p:spPr>
           <a:xfrm>
             <a:off x="0" y="658368"/>
-            <a:ext cx="2468880" cy="5833872"/>
+            <a:ext cx="5120640" cy="5833872"/>
           </a:xfrm>
           <a:prstGeom prst="rect">
             <a:avLst/>
@@ -10683,8 +11266,8 @@
         </p:nvSpPr>
         <p:spPr>
           <a:xfrm>
-            <a:off x="2697480" y="1005840"/>
-            <a:ext cx="9174175" cy="731520"/>
+            <a:off x="5349240" y="1005840"/>
+            <a:ext cx="6522415" cy="731520"/>
           </a:xfrm>
           <a:prstGeom prst="rect">
             <a:avLst/>
@@ -10710,7 +11293,7 @@
                 <a:ea typeface="Times New Roman" pitchFamily="34" charset="-122"/>
                 <a:cs typeface="Times New Roman" pitchFamily="34" charset="-120"/>
               </a:rPr>
-              <a:t>DEFINITIONS</a:t>
+              <a:t>Activity 3: Answer</a:t>
             </a:r>
             <a:endParaRPr lang="en-US" sz="3600" dirty="0"/>
           </a:p>
@@ -10724,8 +11307,8 @@
         </p:nvSpPr>
         <p:spPr>
           <a:xfrm>
-            <a:off x="2697480" y="1783080"/>
-            <a:ext cx="9174175" cy="4663440"/>
+            <a:off x="5349240" y="1783080"/>
+            <a:ext cx="6522415" cy="4663440"/>
           </a:xfrm>
           <a:prstGeom prst="rect">
             <a:avLst/>
@@ -10744,7 +11327,7 @@
               <a:buNone/>
             </a:pPr>
             <a:r>
-              <a:rPr lang="en-US" sz="4000" i="1" dirty="0">
+              <a:rPr lang="en-US" sz="4000" dirty="0">
                 <a:solidFill>
                   <a:srgbClr val="111111"/>
                 </a:solidFill>
@@ -10752,81 +11335,7 @@
                 <a:ea typeface="Times New Roman" pitchFamily="34" charset="-122"/>
                 <a:cs typeface="Times New Roman" pitchFamily="34" charset="-120"/>
               </a:rPr>
-              <a:t>The key terms of this lesson are defined as follows:</a:t>
-            </a:r>
-            <a:endParaRPr lang="en-US" sz="4000" dirty="0"/>
-          </a:p>
-          <a:p>
-            <a:pPr algn="l" indent="0" marL="0">
-              <a:spcAft>
-                <a:spcPts val="800"/>
-              </a:spcAft>
-              <a:buNone/>
-            </a:pPr>
-            <a:r>
-              <a:rPr lang="en-US" sz="4000" b="1" dirty="0">
-                <a:solidFill>
-                  <a:srgbClr val="111111"/>
-                </a:solidFill>
-                <a:latin typeface="Times New Roman" pitchFamily="34" charset="0"/>
-                <a:ea typeface="Times New Roman" pitchFamily="34" charset="-122"/>
-                <a:cs typeface="Times New Roman" pitchFamily="34" charset="-120"/>
-              </a:rPr>
-              <a:t>Local time: </a:t>
-            </a:r>
-            <a:pPr algn="l" indent="0" marL="0">
-              <a:spcAft>
-                <a:spcPts val="800"/>
-              </a:spcAft>
-              <a:buNone/>
-            </a:pPr>
-            <a:r>
-              <a:rPr lang="en-US" sz="4000" dirty="0">
-                <a:solidFill>
-                  <a:srgbClr val="111111"/>
-                </a:solidFill>
-                <a:latin typeface="Times New Roman" pitchFamily="34" charset="0"/>
-                <a:ea typeface="Times New Roman" pitchFamily="34" charset="-122"/>
-                <a:cs typeface="Times New Roman" pitchFamily="34" charset="-120"/>
-              </a:rPr>
-              <a:t>It is the time given by the position of the Sun in a place.</a:t>
-            </a:r>
-            <a:endParaRPr lang="en-US" sz="4000" dirty="0"/>
-          </a:p>
-          <a:p>
-            <a:pPr algn="l" indent="0" marL="0">
-              <a:spcAft>
-                <a:spcPts val="800"/>
-              </a:spcAft>
-              <a:buNone/>
-            </a:pPr>
-            <a:r>
-              <a:rPr lang="en-US" sz="4000" b="1" dirty="0">
-                <a:solidFill>
-                  <a:srgbClr val="111111"/>
-                </a:solidFill>
-                <a:latin typeface="Times New Roman" pitchFamily="34" charset="0"/>
-                <a:ea typeface="Times New Roman" pitchFamily="34" charset="-122"/>
-                <a:cs typeface="Times New Roman" pitchFamily="34" charset="-120"/>
-              </a:rPr>
-              <a:t>Standard time: </a:t>
-            </a:r>
-            <a:pPr algn="l" indent="0" marL="0">
-              <a:spcAft>
-                <a:spcPts val="800"/>
-              </a:spcAft>
-              <a:buNone/>
-            </a:pPr>
-            <a:r>
-              <a:rPr lang="en-US" sz="4000" dirty="0">
-                <a:solidFill>
-                  <a:srgbClr val="111111"/>
-                </a:solidFill>
-                <a:latin typeface="Times New Roman" pitchFamily="34" charset="0"/>
-                <a:ea typeface="Times New Roman" pitchFamily="34" charset="-122"/>
-                <a:cs typeface="Times New Roman" pitchFamily="34" charset="-120"/>
-              </a:rPr>
-              <a:t>It is the official time used by a whole country or zone.</a:t>
+              <a:t>Each city is in a different time zone.</a:t>
             </a:r>
             <a:endParaRPr lang="en-US" sz="4000" dirty="0"/>
           </a:p>
@@ -11970,7 +12479,7 @@
         <p:spPr>
           <a:xfrm>
             <a:off x="0" y="658368"/>
-            <a:ext cx="1463040" cy="5833872"/>
+            <a:ext cx="5120640" cy="5833872"/>
           </a:xfrm>
           <a:prstGeom prst="rect">
             <a:avLst/>
@@ -11985,8 +12494,8 @@
         </p:nvSpPr>
         <p:spPr>
           <a:xfrm>
-            <a:off x="1691640" y="1005840"/>
-            <a:ext cx="10180015" cy="731520"/>
+            <a:off x="5349240" y="1005840"/>
+            <a:ext cx="6522415" cy="731520"/>
           </a:xfrm>
           <a:prstGeom prst="rect">
             <a:avLst/>
@@ -12012,7 +12521,7 @@
                 <a:ea typeface="Times New Roman" pitchFamily="34" charset="-122"/>
                 <a:cs typeface="Times New Roman" pitchFamily="34" charset="-120"/>
               </a:rPr>
-              <a:t>1. Local and Standard Time</a:t>
+              <a:t>Board Summary</a:t>
             </a:r>
             <a:endParaRPr lang="en-US" sz="3600" dirty="0"/>
           </a:p>
@@ -12026,8 +12535,8 @@
         </p:nvSpPr>
         <p:spPr>
           <a:xfrm>
-            <a:off x="1691640" y="1783080"/>
-            <a:ext cx="10180015" cy="4663440"/>
+            <a:off x="5349240" y="1783080"/>
+            <a:ext cx="6522415" cy="4663440"/>
           </a:xfrm>
           <a:prstGeom prst="rect">
             <a:avLst/>
@@ -12046,7 +12555,7 @@
               <a:buNone/>
             </a:pPr>
             <a:r>
-              <a:rPr lang="en-US" sz="4000" i="1" dirty="0">
+              <a:rPr lang="en-US" sz="4000" b="1" dirty="0">
                 <a:solidFill>
                   <a:srgbClr val="111111"/>
                 </a:solidFill>
@@ -12054,7 +12563,7 @@
                 <a:ea typeface="Times New Roman" pitchFamily="34" charset="-122"/>
                 <a:cs typeface="Times New Roman" pitchFamily="34" charset="-120"/>
               </a:rPr>
-              <a:t>Local and standard time follow these rules:</a:t>
+              <a:t>Topic: The Earth as a Planet in the Solar System</a:t>
             </a:r>
             <a:endParaRPr lang="en-US" sz="4000" dirty="0"/>
           </a:p>
@@ -12074,8 +12583,11 @@
                 <a:ea typeface="Times New Roman" pitchFamily="34" charset="-122"/>
                 <a:cs typeface="Times New Roman" pitchFamily="34" charset="-120"/>
               </a:rPr>
-              <a:t>The rule: </a:t>
-            </a:r>
+              <a:t>Sub-topic: Location and Time</a:t>
+            </a:r>
+            <a:endParaRPr lang="en-US" sz="4000" dirty="0"/>
+          </a:p>
+          <a:p>
             <a:pPr algn="l" indent="0" marL="0">
               <a:spcAft>
                 <a:spcPts val="800"/>
@@ -12083,52 +12595,15 @@
               <a:buNone/>
             </a:pPr>
             <a:r>
-              <a:rPr lang="en-US" sz="4000" dirty="0">
-                <a:solidFill>
-                  <a:srgbClr val="111111"/>
+              <a:rPr lang="en-US" sz="4000" b="1" dirty="0">
+                <a:solidFill>
+                  <a:srgbClr val="990011"/>
                 </a:solidFill>
                 <a:latin typeface="Times New Roman" pitchFamily="34" charset="0"/>
                 <a:ea typeface="Times New Roman" pitchFamily="34" charset="-122"/>
                 <a:cs typeface="Times New Roman" pitchFamily="34" charset="-120"/>
               </a:rPr>
-              <a:t>The Earth turns 15° in one hour, so 1° of longitude equals 4 minutes of time.</a:t>
-            </a:r>
-            <a:endParaRPr lang="en-US" sz="4000" dirty="0"/>
-          </a:p>
-          <a:p>
-            <a:pPr algn="l" indent="0" marL="0">
-              <a:spcAft>
-                <a:spcPts val="800"/>
-              </a:spcAft>
-              <a:buNone/>
-            </a:pPr>
-            <a:r>
-              <a:rPr lang="en-US" sz="4000" b="1" dirty="0">
-                <a:solidFill>
-                  <a:srgbClr val="111111"/>
-                </a:solidFill>
-                <a:latin typeface="Times New Roman" pitchFamily="34" charset="0"/>
-                <a:ea typeface="Times New Roman" pitchFamily="34" charset="-122"/>
-                <a:cs typeface="Times New Roman" pitchFamily="34" charset="-120"/>
-              </a:rPr>
-              <a:t>East and west: </a:t>
-            </a:r>
-            <a:pPr algn="l" indent="0" marL="0">
-              <a:spcAft>
-                <a:spcPts val="800"/>
-              </a:spcAft>
-              <a:buNone/>
-            </a:pPr>
-            <a:r>
-              <a:rPr lang="en-US" sz="4000" dirty="0">
-                <a:solidFill>
-                  <a:srgbClr val="111111"/>
-                </a:solidFill>
-                <a:latin typeface="Times New Roman" pitchFamily="34" charset="0"/>
-                <a:ea typeface="Times New Roman" pitchFamily="34" charset="-122"/>
-                <a:cs typeface="Times New Roman" pitchFamily="34" charset="-120"/>
-              </a:rPr>
-              <a:t>Places to the east are ahead in time and places to the west are behind.</a:t>
+              <a:t>Lesson 4: Local Time, Standard Time and Time Zones</a:t>
             </a:r>
             <a:endParaRPr lang="en-US" sz="4000" dirty="0"/>
           </a:p>
@@ -12263,7 +12738,7 @@
         <p:spPr>
           <a:xfrm>
             <a:off x="0" y="658368"/>
-            <a:ext cx="5120640" cy="5833872"/>
+            <a:ext cx="2468880" cy="5833872"/>
           </a:xfrm>
           <a:prstGeom prst="rect">
             <a:avLst/>
@@ -12278,8 +12753,8 @@
         </p:nvSpPr>
         <p:spPr>
           <a:xfrm>
-            <a:off x="5349240" y="1005840"/>
-            <a:ext cx="6522415" cy="731520"/>
+            <a:off x="2697480" y="1005840"/>
+            <a:ext cx="9174175" cy="731520"/>
           </a:xfrm>
           <a:prstGeom prst="rect">
             <a:avLst/>
@@ -12305,7 +12780,7 @@
                 <a:ea typeface="Times New Roman" pitchFamily="34" charset="-122"/>
                 <a:cs typeface="Times New Roman" pitchFamily="34" charset="-120"/>
               </a:rPr>
-              <a:t>1. Local and Standard Time (continued)</a:t>
+              <a:t>DEFINITIONS</a:t>
             </a:r>
             <a:endParaRPr lang="en-US" sz="3600" dirty="0"/>
           </a:p>
@@ -12319,8 +12794,8 @@
         </p:nvSpPr>
         <p:spPr>
           <a:xfrm>
-            <a:off x="5349240" y="1783080"/>
-            <a:ext cx="6522415" cy="4663440"/>
+            <a:off x="2697480" y="1783080"/>
+            <a:ext cx="9174175" cy="4663440"/>
           </a:xfrm>
           <a:prstGeom prst="rect">
             <a:avLst/>
@@ -12339,7 +12814,7 @@
               <a:buNone/>
             </a:pPr>
             <a:r>
-              <a:rPr lang="en-US" sz="4000" b="1" dirty="0">
+              <a:rPr lang="en-US" sz="4000" i="1" dirty="0">
                 <a:solidFill>
                   <a:srgbClr val="111111"/>
                 </a:solidFill>
@@ -12347,8 +12822,11 @@
                 <a:ea typeface="Times New Roman" pitchFamily="34" charset="-122"/>
                 <a:cs typeface="Times New Roman" pitchFamily="34" charset="-120"/>
               </a:rPr>
-              <a:t>Cameroon: </a:t>
-            </a:r>
+              <a:t>The key terms of this lesson are defined as follows:</a:t>
+            </a:r>
+            <a:endParaRPr lang="en-US" sz="4000" dirty="0"/>
+          </a:p>
+          <a:p>
             <a:pPr algn="l" indent="0" marL="0">
               <a:spcAft>
                 <a:spcPts val="800"/>
@@ -12356,7 +12834,7 @@
               <a:buNone/>
             </a:pPr>
             <a:r>
-              <a:rPr lang="en-US" sz="4000" dirty="0">
+              <a:rPr lang="en-US" sz="4000" b="1" dirty="0">
                 <a:solidFill>
                   <a:srgbClr val="111111"/>
                 </a:solidFill>
@@ -12364,7 +12842,61 @@
                 <a:ea typeface="Times New Roman" pitchFamily="34" charset="-122"/>
                 <a:cs typeface="Times New Roman" pitchFamily="34" charset="-120"/>
               </a:rPr>
-              <a:t>Cameroon uses West Africa Time, which is GMT + 1.</a:t>
+              <a:t>Local time (sun time): </a:t>
+            </a:r>
+            <a:pPr algn="l" indent="0" marL="0">
+              <a:spcAft>
+                <a:spcPts val="800"/>
+              </a:spcAft>
+              <a:buNone/>
+            </a:pPr>
+            <a:r>
+              <a:rPr lang="en-US" sz="4000" dirty="0">
+                <a:solidFill>
+                  <a:srgbClr val="111111"/>
+                </a:solidFill>
+                <a:latin typeface="Times New Roman" pitchFamily="34" charset="0"/>
+                <a:ea typeface="Times New Roman" pitchFamily="34" charset="-122"/>
+                <a:cs typeface="Times New Roman" pitchFamily="34" charset="-120"/>
+              </a:rPr>
+              <a:t>It is the time given by the position of the Sun in a place: 12 noon when the Sun is highest.</a:t>
+            </a:r>
+            <a:endParaRPr lang="en-US" sz="4000" dirty="0"/>
+          </a:p>
+          <a:p>
+            <a:pPr algn="l" indent="0" marL="0">
+              <a:spcAft>
+                <a:spcPts val="800"/>
+              </a:spcAft>
+              <a:buNone/>
+            </a:pPr>
+            <a:r>
+              <a:rPr lang="en-US" sz="4000" b="1" dirty="0">
+                <a:solidFill>
+                  <a:srgbClr val="111111"/>
+                </a:solidFill>
+                <a:latin typeface="Times New Roman" pitchFamily="34" charset="0"/>
+                <a:ea typeface="Times New Roman" pitchFamily="34" charset="-122"/>
+                <a:cs typeface="Times New Roman" pitchFamily="34" charset="-120"/>
+              </a:rPr>
+              <a:t>Standard time: </a:t>
+            </a:r>
+            <a:pPr algn="l" indent="0" marL="0">
+              <a:spcAft>
+                <a:spcPts val="800"/>
+              </a:spcAft>
+              <a:buNone/>
+            </a:pPr>
+            <a:r>
+              <a:rPr lang="en-US" sz="4000" dirty="0">
+                <a:solidFill>
+                  <a:srgbClr val="111111"/>
+                </a:solidFill>
+                <a:latin typeface="Times New Roman" pitchFamily="34" charset="0"/>
+                <a:ea typeface="Times New Roman" pitchFamily="34" charset="-122"/>
+                <a:cs typeface="Times New Roman" pitchFamily="34" charset="-120"/>
+              </a:rPr>
+              <a:t>It is the official time used by a whole country or time zone.</a:t>
             </a:r>
             <a:endParaRPr lang="en-US" sz="4000" dirty="0"/>
           </a:p>
@@ -12482,48 +13014,9 @@
           </a:p>
         </p:txBody>
       </p:sp>
-      <p:sp>
-        <p:nvSpPr>
-          <p:cNvPr id="3" name="Text 1"/>
-          <p:cNvSpPr/>
-          <p:nvPr/>
-        </p:nvSpPr>
-        <p:spPr>
-          <a:xfrm>
-            <a:off x="457200" y="1005840"/>
-            <a:ext cx="11277295" cy="731520"/>
-          </a:xfrm>
-          <a:prstGeom prst="rect">
-            <a:avLst/>
-          </a:prstGeom>
-          <a:noFill/>
-          <a:ln/>
-        </p:spPr>
-        <p:txBody>
-          <a:bodyPr wrap="square" lIns="0" tIns="0" rIns="0" bIns="0" rtlCol="0" anchor="ctr"/>
-          <a:lstStyle/>
-          <a:p>
-            <a:pPr algn="ctr" indent="0" marL="0">
-              <a:buNone/>
-            </a:pPr>
-            <a:r>
-              <a:rPr lang="en-US" sz="3600" b="1" dirty="0">
-                <a:solidFill>
-                  <a:srgbClr val="990011"/>
-                </a:solidFill>
-                <a:latin typeface="Times New Roman" pitchFamily="34" charset="0"/>
-                <a:ea typeface="Times New Roman" pitchFamily="34" charset="-122"/>
-                <a:cs typeface="Times New Roman" pitchFamily="34" charset="-120"/>
-              </a:rPr>
-              <a:t>1. Local and Standard Time</a:t>
-            </a:r>
-            <a:endParaRPr lang="en-US" sz="3600" dirty="0"/>
-          </a:p>
-        </p:txBody>
-      </p:sp>
       <p:pic>
         <p:nvPicPr>
-          <p:cNvPr id="4" name="Image 0" descr="/home/claude/f4/img/v2/time_line_big.png">    </p:cNvPr>
+          <p:cNvPr id="3" name="Image 0" descr="/home/claude/f4/img/minesec_sheet.png">    </p:cNvPr>
           <p:cNvPicPr>
             <a:picLocks noChangeAspect="1"/>
           </p:cNvPicPr>
@@ -12537,8 +13030,8 @@
         </p:blipFill>
         <p:spPr>
           <a:xfrm>
-            <a:off x="629930" y="1783080"/>
-            <a:ext cx="10931835" cy="4270248"/>
+            <a:off x="0" y="658368"/>
+            <a:ext cx="5120640" cy="5833872"/>
           </a:xfrm>
           <a:prstGeom prst="rect">
             <a:avLst/>
@@ -12547,14 +13040,14 @@
       </p:pic>
       <p:sp>
         <p:nvSpPr>
-          <p:cNvPr id="5" name="Text 2"/>
+          <p:cNvPr id="4" name="Text 1"/>
           <p:cNvSpPr/>
           <p:nvPr/>
         </p:nvSpPr>
         <p:spPr>
           <a:xfrm>
-            <a:off x="457200" y="6089904"/>
-            <a:ext cx="11277295" cy="347472"/>
+            <a:off x="5349240" y="1005840"/>
+            <a:ext cx="6522415" cy="731520"/>
           </a:xfrm>
           <a:prstGeom prst="rect">
             <a:avLst/>
@@ -12563,24 +13056,85 @@
           <a:ln/>
         </p:spPr>
         <p:txBody>
-          <a:bodyPr wrap="square" lIns="0" tIns="0" rIns="0" bIns="0" rtlCol="0" anchor="ctr"/>
+          <a:bodyPr wrap="square" lIns="0" tIns="0" rIns="0" bIns="0" rtlCol="0" anchor="ctr">
+            <a:normAutofit/>
+          </a:bodyPr>
           <a:lstStyle/>
           <a:p>
             <a:pPr algn="ctr" indent="0" marL="0">
               <a:buNone/>
             </a:pPr>
             <a:r>
-              <a:rPr lang="en-US" sz="1800" i="1" dirty="0">
-                <a:solidFill>
-                  <a:srgbClr val="555555"/>
+              <a:rPr lang="en-US" sz="3600" b="1" dirty="0">
+                <a:solidFill>
+                  <a:srgbClr val="990011"/>
                 </a:solidFill>
                 <a:latin typeface="Times New Roman" pitchFamily="34" charset="0"/>
                 <a:ea typeface="Times New Roman" pitchFamily="34" charset="-122"/>
                 <a:cs typeface="Times New Roman" pitchFamily="34" charset="-120"/>
               </a:rPr>
-              <a:t>Illustration: time and longitude</a:t>
-            </a:r>
-            <a:endParaRPr lang="en-US" sz="1800" dirty="0"/>
+              <a:t>DEFINITIONS (continued)</a:t>
+            </a:r>
+            <a:endParaRPr lang="en-US" sz="3600" dirty="0"/>
+          </a:p>
+        </p:txBody>
+      </p:sp>
+      <p:sp>
+        <p:nvSpPr>
+          <p:cNvPr id="5" name="Text 2"/>
+          <p:cNvSpPr/>
+          <p:nvPr/>
+        </p:nvSpPr>
+        <p:spPr>
+          <a:xfrm>
+            <a:off x="5349240" y="1783080"/>
+            <a:ext cx="6522415" cy="4663440"/>
+          </a:xfrm>
+          <a:prstGeom prst="rect">
+            <a:avLst/>
+          </a:prstGeom>
+          <a:noFill/>
+          <a:ln/>
+        </p:spPr>
+        <p:txBody>
+          <a:bodyPr wrap="square" lIns="0" tIns="0" rIns="0" bIns="0" rtlCol="0" anchor="t"/>
+          <a:lstStyle/>
+          <a:p>
+            <a:pPr algn="l" indent="0" marL="0">
+              <a:spcAft>
+                <a:spcPts val="800"/>
+              </a:spcAft>
+              <a:buNone/>
+            </a:pPr>
+            <a:r>
+              <a:rPr lang="en-US" sz="4000" b="1" dirty="0">
+                <a:solidFill>
+                  <a:srgbClr val="111111"/>
+                </a:solidFill>
+                <a:latin typeface="Times New Roman" pitchFamily="34" charset="0"/>
+                <a:ea typeface="Times New Roman" pitchFamily="34" charset="-122"/>
+                <a:cs typeface="Times New Roman" pitchFamily="34" charset="-120"/>
+              </a:rPr>
+              <a:t>Time zone: </a:t>
+            </a:r>
+            <a:pPr algn="l" indent="0" marL="0">
+              <a:spcAft>
+                <a:spcPts val="800"/>
+              </a:spcAft>
+              <a:buNone/>
+            </a:pPr>
+            <a:r>
+              <a:rPr lang="en-US" sz="4000" dirty="0">
+                <a:solidFill>
+                  <a:srgbClr val="111111"/>
+                </a:solidFill>
+                <a:latin typeface="Times New Roman" pitchFamily="34" charset="0"/>
+                <a:ea typeface="Times New Roman" pitchFamily="34" charset="-122"/>
+                <a:cs typeface="Times New Roman" pitchFamily="34" charset="-120"/>
+              </a:rPr>
+              <a:t>It is a belt of the Earth, about 15° of longitude wide, where people use the same standard time.</a:t>
+            </a:r>
+            <a:endParaRPr lang="en-US" sz="4000" dirty="0"/>
           </a:p>
         </p:txBody>
       </p:sp>
@@ -12696,9 +13250,129 @@
           </a:p>
         </p:txBody>
       </p:sp>
+      <p:sp>
+        <p:nvSpPr>
+          <p:cNvPr id="3" name="Text 1"/>
+          <p:cNvSpPr/>
+          <p:nvPr/>
+        </p:nvSpPr>
+        <p:spPr>
+          <a:xfrm>
+            <a:off x="365760" y="1005840"/>
+            <a:ext cx="11460175" cy="731520"/>
+          </a:xfrm>
+          <a:prstGeom prst="rect">
+            <a:avLst/>
+          </a:prstGeom>
+          <a:noFill/>
+          <a:ln/>
+        </p:spPr>
+        <p:txBody>
+          <a:bodyPr wrap="square" lIns="0" tIns="0" rIns="0" bIns="0" rtlCol="0" anchor="ctr">
+            <a:normAutofit/>
+          </a:bodyPr>
+          <a:lstStyle/>
+          <a:p>
+            <a:pPr algn="ctr" indent="0" marL="0">
+              <a:buNone/>
+            </a:pPr>
+            <a:r>
+              <a:rPr lang="en-US" sz="3600" b="1" dirty="0">
+                <a:solidFill>
+                  <a:srgbClr val="990011"/>
+                </a:solidFill>
+                <a:latin typeface="Times New Roman" pitchFamily="34" charset="0"/>
+                <a:ea typeface="Times New Roman" pitchFamily="34" charset="-122"/>
+                <a:cs typeface="Times New Roman" pitchFamily="34" charset="-120"/>
+              </a:rPr>
+              <a:t>1. Local Time</a:t>
+            </a:r>
+            <a:endParaRPr lang="en-US" sz="3600" dirty="0"/>
+          </a:p>
+        </p:txBody>
+      </p:sp>
+      <p:sp>
+        <p:nvSpPr>
+          <p:cNvPr id="4" name="Text 2"/>
+          <p:cNvSpPr/>
+          <p:nvPr/>
+        </p:nvSpPr>
+        <p:spPr>
+          <a:xfrm>
+            <a:off x="365760" y="1783080"/>
+            <a:ext cx="4846320" cy="4617720"/>
+          </a:xfrm>
+          <a:prstGeom prst="rect">
+            <a:avLst/>
+          </a:prstGeom>
+          <a:noFill/>
+          <a:ln/>
+        </p:spPr>
+        <p:txBody>
+          <a:bodyPr wrap="square" lIns="0" tIns="0" rIns="0" bIns="0" rtlCol="0" anchor="t"/>
+          <a:lstStyle/>
+          <a:p>
+            <a:pPr algn="l" indent="0" marL="0">
+              <a:spcAft>
+                <a:spcPts val="800"/>
+              </a:spcAft>
+              <a:buNone/>
+            </a:pPr>
+            <a:r>
+              <a:rPr lang="en-US" sz="3600" i="1" dirty="0">
+                <a:solidFill>
+                  <a:srgbClr val="111111"/>
+                </a:solidFill>
+                <a:latin typeface="Times New Roman" pitchFamily="34" charset="0"/>
+                <a:ea typeface="Times New Roman" pitchFamily="34" charset="-122"/>
+                <a:cs typeface="Times New Roman" pitchFamily="34" charset="-120"/>
+              </a:rPr>
+              <a:t>Local time is illustrated as follows:</a:t>
+            </a:r>
+            <a:endParaRPr lang="en-US" sz="3600" dirty="0"/>
+          </a:p>
+          <a:p>
+            <a:pPr algn="l" indent="0" marL="0">
+              <a:spcAft>
+                <a:spcPts val="800"/>
+              </a:spcAft>
+              <a:buNone/>
+            </a:pPr>
+            <a:r>
+              <a:rPr lang="en-US" sz="3600" b="1" dirty="0">
+                <a:solidFill>
+                  <a:srgbClr val="111111"/>
+                </a:solidFill>
+                <a:latin typeface="Times New Roman" pitchFamily="34" charset="0"/>
+                <a:ea typeface="Times New Roman" pitchFamily="34" charset="-122"/>
+                <a:cs typeface="Times New Roman" pitchFamily="34" charset="-120"/>
+              </a:rPr>
+              <a:t>The rule: </a:t>
+            </a:r>
+            <a:pPr algn="l" indent="0" marL="0">
+              <a:spcAft>
+                <a:spcPts val="800"/>
+              </a:spcAft>
+              <a:buNone/>
+            </a:pPr>
+            <a:r>
+              <a:rPr lang="en-US" sz="3600" dirty="0">
+                <a:solidFill>
+                  <a:srgbClr val="111111"/>
+                </a:solidFill>
+                <a:latin typeface="Times New Roman" pitchFamily="34" charset="0"/>
+                <a:ea typeface="Times New Roman" pitchFamily="34" charset="-122"/>
+                <a:cs typeface="Times New Roman" pitchFamily="34" charset="-120"/>
+              </a:rPr>
+              <a:t>The Earth turns 360° in 24 hours, so 15° = 1 hour and 1° = 4 minutes.</a:t>
+            </a:r>
+            <a:endParaRPr lang="en-US" sz="3600" dirty="0"/>
+          </a:p>
+        </p:txBody>
+      </p:sp>
       <p:pic>
         <p:nvPicPr>
-          <p:cNvPr id="3" name="Image 0" descr="/home/claude/f4/img/minesec_sheet.png">    </p:cNvPr>
+          <p:cNvPr id="5" name="Image 0" descr="/home/claude/f4/img/v2/time_line_big.png">    </p:cNvPr>
           <p:cNvPicPr>
             <a:picLocks noChangeAspect="1"/>
           </p:cNvPicPr>
@@ -12712,8 +13386,8 @@
         </p:blipFill>
         <p:spPr>
           <a:xfrm>
-            <a:off x="0" y="658368"/>
-            <a:ext cx="3840480" cy="5833872"/>
+            <a:off x="5349240" y="2617506"/>
+            <a:ext cx="6659575" cy="2601397"/>
           </a:xfrm>
           <a:prstGeom prst="rect">
             <a:avLst/>
@@ -12722,14 +13396,14 @@
       </p:pic>
       <p:sp>
         <p:nvSpPr>
-          <p:cNvPr id="4" name="Text 1"/>
+          <p:cNvPr id="6" name="Text 3"/>
           <p:cNvSpPr/>
           <p:nvPr/>
         </p:nvSpPr>
         <p:spPr>
           <a:xfrm>
-            <a:off x="4069080" y="1005840"/>
-            <a:ext cx="7802575" cy="731520"/>
+            <a:off x="5349240" y="6089904"/>
+            <a:ext cx="6659575" cy="347472"/>
           </a:xfrm>
           <a:prstGeom prst="rect">
             <a:avLst/>
@@ -12738,142 +13412,24 @@
           <a:ln/>
         </p:spPr>
         <p:txBody>
-          <a:bodyPr wrap="square" lIns="0" tIns="0" rIns="0" bIns="0" rtlCol="0" anchor="ctr">
-            <a:normAutofit/>
-          </a:bodyPr>
+          <a:bodyPr wrap="square" lIns="0" tIns="0" rIns="0" bIns="0" rtlCol="0" anchor="ctr"/>
           <a:lstStyle/>
           <a:p>
             <a:pPr algn="ctr" indent="0" marL="0">
               <a:buNone/>
             </a:pPr>
             <a:r>
-              <a:rPr lang="en-US" sz="3600" b="1" dirty="0">
-                <a:solidFill>
-                  <a:srgbClr val="990011"/>
+              <a:rPr lang="en-US" sz="1600" i="1" dirty="0">
+                <a:solidFill>
+                  <a:srgbClr val="555555"/>
                 </a:solidFill>
                 <a:latin typeface="Times New Roman" pitchFamily="34" charset="0"/>
                 <a:ea typeface="Times New Roman" pitchFamily="34" charset="-122"/>
                 <a:cs typeface="Times New Roman" pitchFamily="34" charset="-120"/>
               </a:rPr>
-              <a:t>2. Time Zones</a:t>
-            </a:r>
-            <a:endParaRPr lang="en-US" sz="3600" dirty="0"/>
-          </a:p>
-        </p:txBody>
-      </p:sp>
-      <p:sp>
-        <p:nvSpPr>
-          <p:cNvPr id="5" name="Text 2"/>
-          <p:cNvSpPr/>
-          <p:nvPr/>
-        </p:nvSpPr>
-        <p:spPr>
-          <a:xfrm>
-            <a:off x="4069080" y="1783080"/>
-            <a:ext cx="7802575" cy="4663440"/>
-          </a:xfrm>
-          <a:prstGeom prst="rect">
-            <a:avLst/>
-          </a:prstGeom>
-          <a:noFill/>
-          <a:ln/>
-        </p:spPr>
-        <p:txBody>
-          <a:bodyPr wrap="square" lIns="0" tIns="0" rIns="0" bIns="0" rtlCol="0" anchor="t"/>
-          <a:lstStyle/>
-          <a:p>
-            <a:pPr algn="l" indent="0" marL="0">
-              <a:spcAft>
-                <a:spcPts val="800"/>
-              </a:spcAft>
-              <a:buNone/>
-            </a:pPr>
-            <a:r>
-              <a:rPr lang="en-US" sz="4000" i="1" dirty="0">
-                <a:solidFill>
-                  <a:srgbClr val="111111"/>
-                </a:solidFill>
-                <a:latin typeface="Times New Roman" pitchFamily="34" charset="0"/>
-                <a:ea typeface="Times New Roman" pitchFamily="34" charset="-122"/>
-                <a:cs typeface="Times New Roman" pitchFamily="34" charset="-120"/>
-              </a:rPr>
-              <a:t>Time zones are explained as follows:</a:t>
-            </a:r>
-            <a:endParaRPr lang="en-US" sz="4000" dirty="0"/>
-          </a:p>
-          <a:p>
-            <a:pPr algn="l" indent="0" marL="0">
-              <a:spcAft>
-                <a:spcPts val="800"/>
-              </a:spcAft>
-              <a:buNone/>
-            </a:pPr>
-            <a:r>
-              <a:rPr lang="en-US" sz="4000" b="1" dirty="0">
-                <a:solidFill>
-                  <a:srgbClr val="111111"/>
-                </a:solidFill>
-                <a:latin typeface="Times New Roman" pitchFamily="34" charset="0"/>
-                <a:ea typeface="Times New Roman" pitchFamily="34" charset="-122"/>
-                <a:cs typeface="Times New Roman" pitchFamily="34" charset="-120"/>
-              </a:rPr>
-              <a:t>Time zone: </a:t>
-            </a:r>
-            <a:pPr algn="l" indent="0" marL="0">
-              <a:spcAft>
-                <a:spcPts val="800"/>
-              </a:spcAft>
-              <a:buNone/>
-            </a:pPr>
-            <a:r>
-              <a:rPr lang="en-US" sz="4000" dirty="0">
-                <a:solidFill>
-                  <a:srgbClr val="111111"/>
-                </a:solidFill>
-                <a:latin typeface="Times New Roman" pitchFamily="34" charset="0"/>
-                <a:ea typeface="Times New Roman" pitchFamily="34" charset="-122"/>
-                <a:cs typeface="Times New Roman" pitchFamily="34" charset="-120"/>
-              </a:rPr>
-              <a:t>It is an area where people use the same standard time.</a:t>
-            </a:r>
-            <a:endParaRPr lang="en-US" sz="4000" dirty="0"/>
-          </a:p>
-          <a:p>
-            <a:pPr algn="l" indent="0" marL="0">
-              <a:spcAft>
-                <a:spcPts val="800"/>
-              </a:spcAft>
-              <a:buNone/>
-            </a:pPr>
-            <a:r>
-              <a:rPr lang="en-US" sz="4000" b="1" dirty="0">
-                <a:solidFill>
-                  <a:srgbClr val="111111"/>
-                </a:solidFill>
-                <a:latin typeface="Times New Roman" pitchFamily="34" charset="0"/>
-                <a:ea typeface="Times New Roman" pitchFamily="34" charset="-122"/>
-                <a:cs typeface="Times New Roman" pitchFamily="34" charset="-120"/>
-              </a:rPr>
-              <a:t>Number and width: </a:t>
-            </a:r>
-            <a:pPr algn="l" indent="0" marL="0">
-              <a:spcAft>
-                <a:spcPts val="800"/>
-              </a:spcAft>
-              <a:buNone/>
-            </a:pPr>
-            <a:r>
-              <a:rPr lang="en-US" sz="4000" dirty="0">
-                <a:solidFill>
-                  <a:srgbClr val="111111"/>
-                </a:solidFill>
-                <a:latin typeface="Times New Roman" pitchFamily="34" charset="0"/>
-                <a:ea typeface="Times New Roman" pitchFamily="34" charset="-122"/>
-                <a:cs typeface="Times New Roman" pitchFamily="34" charset="-120"/>
-              </a:rPr>
-              <a:t>There are 24 main time zones, each about 15° of longitude wide.</a:t>
-            </a:r>
-            <a:endParaRPr lang="en-US" sz="4000" dirty="0"/>
+              <a:t>Illustration: time and longitude</a:t>
+            </a:r>
+            <a:endParaRPr lang="en-US" sz="1600" dirty="0"/>
           </a:p>
         </p:txBody>
       </p:sp>
@@ -13048,7 +13604,7 @@
                 <a:ea typeface="Times New Roman" pitchFamily="34" charset="-122"/>
                 <a:cs typeface="Times New Roman" pitchFamily="34" charset="-120"/>
               </a:rPr>
-              <a:t>2. Time Zones (continued)</a:t>
+              <a:t>1. Local Time</a:t>
             </a:r>
             <a:endParaRPr lang="en-US" sz="3600" dirty="0"/>
           </a:p>
@@ -13090,7 +13646,7 @@
                 <a:ea typeface="Times New Roman" pitchFamily="34" charset="-122"/>
                 <a:cs typeface="Times New Roman" pitchFamily="34" charset="-120"/>
               </a:rPr>
-              <a:t>Reason: </a:t>
+              <a:t>East is ahead: </a:t>
             </a:r>
             <a:pPr algn="l" indent="0" marL="0">
               <a:spcAft>
@@ -13107,7 +13663,7 @@
                 <a:ea typeface="Times New Roman" pitchFamily="34" charset="-122"/>
                 <a:cs typeface="Times New Roman" pitchFamily="34" charset="-120"/>
               </a:rPr>
-              <a:t>Time zones avoid having a different time in every town.</a:t>
+              <a:t>Places to the east see the Sun first, so their local time is ahead.</a:t>
             </a:r>
             <a:endParaRPr lang="en-US" sz="4000" dirty="0"/>
           </a:p>
@@ -13127,7 +13683,7 @@
                 <a:ea typeface="Times New Roman" pitchFamily="34" charset="-122"/>
                 <a:cs typeface="Times New Roman" pitchFamily="34" charset="-120"/>
               </a:rPr>
-              <a:t>Countries with many zones: </a:t>
+              <a:t>West is behind: </a:t>
             </a:r>
             <a:pPr algn="l" indent="0" marL="0">
               <a:spcAft>
@@ -13144,7 +13700,7 @@
                 <a:ea typeface="Times New Roman" pitchFamily="34" charset="-122"/>
                 <a:cs typeface="Times New Roman" pitchFamily="34" charset="-120"/>
               </a:rPr>
-              <a:t>Wide countries from east to west, like Russia with 11 zones, have many time zones.</a:t>
+              <a:t>Places to the west see the Sun later, so their local time is behind.</a:t>
             </a:r>
             <a:endParaRPr lang="en-US" sz="4000" dirty="0"/>
           </a:p>
@@ -13256,15 +13812,176 @@
                 <a:ea typeface="Calibri" pitchFamily="34" charset="-122"/>
                 <a:cs typeface="Calibri" pitchFamily="34" charset="-120"/>
               </a:rPr>
-              <a:t>FORMATIVE EVALUATION</a:t>
+              <a:t>BOARD SUMMARY</a:t>
             </a:r>
             <a:endParaRPr lang="en-US" sz="1400" dirty="0"/>
+          </a:p>
+        </p:txBody>
+      </p:sp>
+      <p:sp>
+        <p:nvSpPr>
+          <p:cNvPr id="3" name="Text 1"/>
+          <p:cNvSpPr/>
+          <p:nvPr/>
+        </p:nvSpPr>
+        <p:spPr>
+          <a:xfrm>
+            <a:off x="365760" y="1005840"/>
+            <a:ext cx="11460175" cy="731520"/>
+          </a:xfrm>
+          <a:prstGeom prst="rect">
+            <a:avLst/>
+          </a:prstGeom>
+          <a:noFill/>
+          <a:ln/>
+        </p:spPr>
+        <p:txBody>
+          <a:bodyPr wrap="square" lIns="0" tIns="0" rIns="0" bIns="0" rtlCol="0" anchor="ctr">
+            <a:normAutofit/>
+          </a:bodyPr>
+          <a:lstStyle/>
+          <a:p>
+            <a:pPr algn="ctr" indent="0" marL="0">
+              <a:buNone/>
+            </a:pPr>
+            <a:r>
+              <a:rPr lang="en-US" sz="3600" b="1" dirty="0">
+                <a:solidFill>
+                  <a:srgbClr val="990011"/>
+                </a:solidFill>
+                <a:latin typeface="Times New Roman" pitchFamily="34" charset="0"/>
+                <a:ea typeface="Times New Roman" pitchFamily="34" charset="-122"/>
+                <a:cs typeface="Times New Roman" pitchFamily="34" charset="-120"/>
+              </a:rPr>
+              <a:t>2. Standard Time and Time Zones</a:t>
+            </a:r>
+            <a:endParaRPr lang="en-US" sz="3600" dirty="0"/>
+          </a:p>
+        </p:txBody>
+      </p:sp>
+      <p:sp>
+        <p:nvSpPr>
+          <p:cNvPr id="4" name="Text 2"/>
+          <p:cNvSpPr/>
+          <p:nvPr/>
+        </p:nvSpPr>
+        <p:spPr>
+          <a:xfrm>
+            <a:off x="365760" y="1737360"/>
+            <a:ext cx="5120640" cy="457200"/>
+          </a:xfrm>
+          <a:prstGeom prst="rect">
+            <a:avLst/>
+          </a:prstGeom>
+          <a:noFill/>
+          <a:ln/>
+        </p:spPr>
+        <p:txBody>
+          <a:bodyPr wrap="square" lIns="0" tIns="0" rIns="0" bIns="0" rtlCol="0" anchor="ctr">
+            <a:normAutofit/>
+          </a:bodyPr>
+          <a:lstStyle/>
+          <a:p>
+            <a:pPr algn="l" indent="0" marL="0">
+              <a:buNone/>
+            </a:pPr>
+            <a:r>
+              <a:rPr lang="en-US" sz="3000" b="1" dirty="0">
+                <a:solidFill>
+                  <a:srgbClr val="990011"/>
+                </a:solidFill>
+                <a:latin typeface="Times New Roman" pitchFamily="34" charset="0"/>
+                <a:ea typeface="Times New Roman" pitchFamily="34" charset="-122"/>
+                <a:cs typeface="Times New Roman" pitchFamily="34" charset="-120"/>
+              </a:rPr>
+              <a:t>A) Illustration</a:t>
+            </a:r>
+            <a:endParaRPr lang="en-US" sz="3000" dirty="0"/>
+          </a:p>
+        </p:txBody>
+      </p:sp>
+      <p:sp>
+        <p:nvSpPr>
+          <p:cNvPr id="5" name="Text 3"/>
+          <p:cNvSpPr/>
+          <p:nvPr/>
+        </p:nvSpPr>
+        <p:spPr>
+          <a:xfrm>
+            <a:off x="365760" y="2240280"/>
+            <a:ext cx="4846320" cy="4160520"/>
+          </a:xfrm>
+          <a:prstGeom prst="rect">
+            <a:avLst/>
+          </a:prstGeom>
+          <a:noFill/>
+          <a:ln/>
+        </p:spPr>
+        <p:txBody>
+          <a:bodyPr wrap="square" lIns="0" tIns="0" rIns="0" bIns="0" rtlCol="0" anchor="t"/>
+          <a:lstStyle/>
+          <a:p>
+            <a:pPr algn="l" indent="0" marL="0">
+              <a:spcAft>
+                <a:spcPts val="800"/>
+              </a:spcAft>
+              <a:buNone/>
+            </a:pPr>
+            <a:r>
+              <a:rPr lang="en-US" sz="3600" i="1" dirty="0">
+                <a:solidFill>
+                  <a:srgbClr val="111111"/>
+                </a:solidFill>
+                <a:latin typeface="Times New Roman" pitchFamily="34" charset="0"/>
+                <a:ea typeface="Times New Roman" pitchFamily="34" charset="-122"/>
+                <a:cs typeface="Times New Roman" pitchFamily="34" charset="-120"/>
+              </a:rPr>
+              <a:t>Standard time and time zones are organised as follows:</a:t>
+            </a:r>
+            <a:endParaRPr lang="en-US" sz="3600" dirty="0"/>
+          </a:p>
+          <a:p>
+            <a:pPr algn="l" indent="0" marL="0">
+              <a:spcAft>
+                <a:spcPts val="800"/>
+              </a:spcAft>
+              <a:buNone/>
+            </a:pPr>
+            <a:r>
+              <a:rPr lang="en-US" sz="3600" b="1" dirty="0">
+                <a:solidFill>
+                  <a:srgbClr val="111111"/>
+                </a:solidFill>
+                <a:latin typeface="Times New Roman" pitchFamily="34" charset="0"/>
+                <a:ea typeface="Times New Roman" pitchFamily="34" charset="-122"/>
+                <a:cs typeface="Times New Roman" pitchFamily="34" charset="-120"/>
+              </a:rPr>
+              <a:t>Number of zones: </a:t>
+            </a:r>
+            <a:pPr algn="l" indent="0" marL="0">
+              <a:spcAft>
+                <a:spcPts val="800"/>
+              </a:spcAft>
+              <a:buNone/>
+            </a:pPr>
+            <a:r>
+              <a:rPr lang="en-US" sz="3600" dirty="0">
+                <a:solidFill>
+                  <a:srgbClr val="111111"/>
+                </a:solidFill>
+                <a:latin typeface="Times New Roman" pitchFamily="34" charset="0"/>
+                <a:ea typeface="Times New Roman" pitchFamily="34" charset="-122"/>
+                <a:cs typeface="Times New Roman" pitchFamily="34" charset="-120"/>
+              </a:rPr>
+              <a:t>The world is divided into 24 main time zones.</a:t>
+            </a:r>
+            <a:endParaRPr lang="en-US" sz="3600" dirty="0"/>
           </a:p>
         </p:txBody>
       </p:sp>
       <p:pic>
         <p:nvPicPr>
-          <p:cNvPr id="3" name="Image 0" descr="/home/claude/f4/img/minesec_sheet.png">    </p:cNvPr>
+          <p:cNvPr id="6" name="Image 0" descr="/home/claude/f4/img/v2/time_zones_big.png">    </p:cNvPr>
           <p:cNvPicPr>
             <a:picLocks noChangeAspect="1"/>
           </p:cNvPicPr>
@@ -13278,8 +13995,8 @@
         </p:blipFill>
         <p:spPr>
           <a:xfrm>
-            <a:off x="0" y="658368"/>
-            <a:ext cx="5120640" cy="5833872"/>
+            <a:off x="5349240" y="2513450"/>
+            <a:ext cx="6659575" cy="2809508"/>
           </a:xfrm>
           <a:prstGeom prst="rect">
             <a:avLst/>
@@ -13288,14 +14005,14 @@
       </p:pic>
       <p:sp>
         <p:nvSpPr>
-          <p:cNvPr id="4" name="Text 1"/>
+          <p:cNvPr id="7" name="Text 4"/>
           <p:cNvSpPr/>
           <p:nvPr/>
         </p:nvSpPr>
         <p:spPr>
           <a:xfrm>
-            <a:off x="5349240" y="1005840"/>
-            <a:ext cx="6522415" cy="731520"/>
+            <a:off x="5349240" y="6089904"/>
+            <a:ext cx="6659575" cy="347472"/>
           </a:xfrm>
           <a:prstGeom prst="rect">
             <a:avLst/>
@@ -13304,68 +14021,24 @@
           <a:ln/>
         </p:spPr>
         <p:txBody>
-          <a:bodyPr wrap="square" lIns="0" tIns="0" rIns="0" bIns="0" rtlCol="0" anchor="ctr">
-            <a:normAutofit/>
-          </a:bodyPr>
+          <a:bodyPr wrap="square" lIns="0" tIns="0" rIns="0" bIns="0" rtlCol="0" anchor="ctr"/>
           <a:lstStyle/>
           <a:p>
             <a:pPr algn="ctr" indent="0" marL="0">
               <a:buNone/>
             </a:pPr>
             <a:r>
-              <a:rPr lang="en-US" sz="3600" b="1" dirty="0">
-                <a:solidFill>
-                  <a:srgbClr val="990011"/>
+              <a:rPr lang="en-US" sz="1600" i="1" dirty="0">
+                <a:solidFill>
+                  <a:srgbClr val="555555"/>
                 </a:solidFill>
                 <a:latin typeface="Times New Roman" pitchFamily="34" charset="0"/>
                 <a:ea typeface="Times New Roman" pitchFamily="34" charset="-122"/>
                 <a:cs typeface="Times New Roman" pitchFamily="34" charset="-120"/>
               </a:rPr>
-              <a:t>Evaluation 1</a:t>
-            </a:r>
-            <a:endParaRPr lang="en-US" sz="3600" dirty="0"/>
-          </a:p>
-        </p:txBody>
-      </p:sp>
-      <p:sp>
-        <p:nvSpPr>
-          <p:cNvPr id="5" name="Text 2"/>
-          <p:cNvSpPr/>
-          <p:nvPr/>
-        </p:nvSpPr>
-        <p:spPr>
-          <a:xfrm>
-            <a:off x="5349240" y="1783080"/>
-            <a:ext cx="6522415" cy="4663440"/>
-          </a:xfrm>
-          <a:prstGeom prst="rect">
-            <a:avLst/>
-          </a:prstGeom>
-          <a:noFill/>
-          <a:ln/>
-        </p:spPr>
-        <p:txBody>
-          <a:bodyPr wrap="square" lIns="0" tIns="0" rIns="0" bIns="0" rtlCol="0" anchor="t"/>
-          <a:lstStyle/>
-          <a:p>
-            <a:pPr algn="l" indent="0" marL="0">
-              <a:spcAft>
-                <a:spcPts val="800"/>
-              </a:spcAft>
-              <a:buNone/>
-            </a:pPr>
-            <a:r>
-              <a:rPr lang="en-US" sz="4000" dirty="0">
-                <a:solidFill>
-                  <a:srgbClr val="111111"/>
-                </a:solidFill>
-                <a:latin typeface="Times New Roman" pitchFamily="34" charset="0"/>
-                <a:ea typeface="Times New Roman" pitchFamily="34" charset="-122"/>
-                <a:cs typeface="Times New Roman" pitchFamily="34" charset="-120"/>
-              </a:rPr>
-              <a:t>How many degrees does the Earth turn in one hour?</a:t>
-            </a:r>
-            <a:endParaRPr lang="en-US" sz="4000" dirty="0"/>
+              <a:t>Illustration: the time zones of the world</a:t>
+            </a:r>
+            <a:endParaRPr lang="en-US" sz="1600" dirty="0"/>
           </a:p>
         </p:txBody>
       </p:sp>
@@ -13475,7 +14148,7 @@
                 <a:ea typeface="Calibri" pitchFamily="34" charset="-122"/>
                 <a:cs typeface="Calibri" pitchFamily="34" charset="-120"/>
               </a:rPr>
-              <a:t>FORMATIVE EVALUATION</a:t>
+              <a:t>BOARD SUMMARY</a:t>
             </a:r>
             <a:endParaRPr lang="en-US" sz="1400" dirty="0"/>
           </a:p>
@@ -13498,7 +14171,7 @@
         <p:spPr>
           <a:xfrm>
             <a:off x="0" y="658368"/>
-            <a:ext cx="5120640" cy="5833872"/>
+            <a:ext cx="3840480" cy="5833872"/>
           </a:xfrm>
           <a:prstGeom prst="rect">
             <a:avLst/>
@@ -13513,8 +14186,8 @@
         </p:nvSpPr>
         <p:spPr>
           <a:xfrm>
-            <a:off x="5349240" y="1005840"/>
-            <a:ext cx="6522415" cy="731520"/>
+            <a:off x="4069080" y="1005840"/>
+            <a:ext cx="7802575" cy="731520"/>
           </a:xfrm>
           <a:prstGeom prst="rect">
             <a:avLst/>
@@ -13540,7 +14213,7 @@
                 <a:ea typeface="Times New Roman" pitchFamily="34" charset="-122"/>
                 <a:cs typeface="Times New Roman" pitchFamily="34" charset="-120"/>
               </a:rPr>
-              <a:t>Expected Answer</a:t>
+              <a:t>2. Standard Time and Time Zones</a:t>
             </a:r>
             <a:endParaRPr lang="en-US" sz="3600" dirty="0"/>
           </a:p>
@@ -13554,8 +14227,47 @@
         </p:nvSpPr>
         <p:spPr>
           <a:xfrm>
-            <a:off x="5349240" y="1783080"/>
-            <a:ext cx="6522415" cy="4663440"/>
+            <a:off x="4069080" y="1737360"/>
+            <a:ext cx="7802575" cy="457200"/>
+          </a:xfrm>
+          <a:prstGeom prst="rect">
+            <a:avLst/>
+          </a:prstGeom>
+          <a:noFill/>
+          <a:ln/>
+        </p:spPr>
+        <p:txBody>
+          <a:bodyPr wrap="square" lIns="0" tIns="0" rIns="0" bIns="0" rtlCol="0" anchor="ctr"/>
+          <a:lstStyle/>
+          <a:p>
+            <a:pPr algn="l" indent="0" marL="0">
+              <a:buNone/>
+            </a:pPr>
+            <a:r>
+              <a:rPr lang="en-US" sz="3200" b="1" dirty="0">
+                <a:solidFill>
+                  <a:srgbClr val="990011"/>
+                </a:solidFill>
+                <a:latin typeface="Times New Roman" pitchFamily="34" charset="0"/>
+                <a:ea typeface="Times New Roman" pitchFamily="34" charset="-122"/>
+                <a:cs typeface="Times New Roman" pitchFamily="34" charset="-120"/>
+              </a:rPr>
+              <a:t>A) Illustration</a:t>
+            </a:r>
+            <a:endParaRPr lang="en-US" sz="3200" dirty="0"/>
+          </a:p>
+        </p:txBody>
+      </p:sp>
+      <p:sp>
+        <p:nvSpPr>
+          <p:cNvPr id="6" name="Text 3"/>
+          <p:cNvSpPr/>
+          <p:nvPr/>
+        </p:nvSpPr>
+        <p:spPr>
+          <a:xfrm>
+            <a:off x="4069080" y="2240280"/>
+            <a:ext cx="7802575" cy="4206240"/>
           </a:xfrm>
           <a:prstGeom prst="rect">
             <a:avLst/>
@@ -13574,7 +14286,7 @@
               <a:buNone/>
             </a:pPr>
             <a:r>
-              <a:rPr lang="en-US" sz="4000" dirty="0">
+              <a:rPr lang="en-US" sz="4000" b="1" dirty="0">
                 <a:solidFill>
                   <a:srgbClr val="111111"/>
                 </a:solidFill>
@@ -13582,7 +14294,61 @@
                 <a:ea typeface="Times New Roman" pitchFamily="34" charset="-122"/>
                 <a:cs typeface="Times New Roman" pitchFamily="34" charset="-120"/>
               </a:rPr>
-              <a:t>15°.</a:t>
+              <a:t>Reference: </a:t>
+            </a:r>
+            <a:pPr algn="l" indent="0" marL="0">
+              <a:spcAft>
+                <a:spcPts val="800"/>
+              </a:spcAft>
+              <a:buNone/>
+            </a:pPr>
+            <a:r>
+              <a:rPr lang="en-US" sz="4000" dirty="0">
+                <a:solidFill>
+                  <a:srgbClr val="111111"/>
+                </a:solidFill>
+                <a:latin typeface="Times New Roman" pitchFamily="34" charset="0"/>
+                <a:ea typeface="Times New Roman" pitchFamily="34" charset="-122"/>
+                <a:cs typeface="Times New Roman" pitchFamily="34" charset="-120"/>
+              </a:rPr>
+              <a:t>All zones are counted from Greenwich Mean Time (GMT), in hours ahead (+) or behind (−).</a:t>
+            </a:r>
+            <a:endParaRPr lang="en-US" sz="4000" dirty="0"/>
+          </a:p>
+          <a:p>
+            <a:pPr algn="l" indent="0" marL="0">
+              <a:spcAft>
+                <a:spcPts val="800"/>
+              </a:spcAft>
+              <a:buNone/>
+            </a:pPr>
+            <a:r>
+              <a:rPr lang="en-US" sz="4000" b="1" dirty="0">
+                <a:solidFill>
+                  <a:srgbClr val="111111"/>
+                </a:solidFill>
+                <a:latin typeface="Times New Roman" pitchFamily="34" charset="0"/>
+                <a:ea typeface="Times New Roman" pitchFamily="34" charset="-122"/>
+                <a:cs typeface="Times New Roman" pitchFamily="34" charset="-120"/>
+              </a:rPr>
+              <a:t>Cameroon: </a:t>
+            </a:r>
+            <a:pPr algn="l" indent="0" marL="0">
+              <a:spcAft>
+                <a:spcPts val="800"/>
+              </a:spcAft>
+              <a:buNone/>
+            </a:pPr>
+            <a:r>
+              <a:rPr lang="en-US" sz="4000" dirty="0">
+                <a:solidFill>
+                  <a:srgbClr val="111111"/>
+                </a:solidFill>
+                <a:latin typeface="Times New Roman" pitchFamily="34" charset="0"/>
+                <a:ea typeface="Times New Roman" pitchFamily="34" charset="-122"/>
+                <a:cs typeface="Times New Roman" pitchFamily="34" charset="-120"/>
+              </a:rPr>
+              <a:t>Cameroon uses West Africa Time, which is GMT + 1.</a:t>
             </a:r>
             <a:endParaRPr lang="en-US" sz="4000" dirty="0"/>
           </a:p>
@@ -13694,7 +14460,7 @@
                 <a:ea typeface="Calibri" pitchFamily="34" charset="-122"/>
                 <a:cs typeface="Calibri" pitchFamily="34" charset="-120"/>
               </a:rPr>
-              <a:t>FORMATIVE EVALUATION</a:t>
+              <a:t>BOARD SUMMARY</a:t>
             </a:r>
             <a:endParaRPr lang="en-US" sz="1400" dirty="0"/>
           </a:p>
@@ -13759,7 +14525,7 @@
                 <a:ea typeface="Times New Roman" pitchFamily="34" charset="-122"/>
                 <a:cs typeface="Times New Roman" pitchFamily="34" charset="-120"/>
               </a:rPr>
-              <a:t>Evaluation 2</a:t>
+              <a:t>2. Standard Time and Time Zones</a:t>
             </a:r>
             <a:endParaRPr lang="en-US" sz="3600" dirty="0"/>
           </a:p>
@@ -13773,8 +14539,47 @@
         </p:nvSpPr>
         <p:spPr>
           <a:xfrm>
-            <a:off x="5349240" y="1783080"/>
-            <a:ext cx="6522415" cy="4663440"/>
+            <a:off x="5349240" y="1737360"/>
+            <a:ext cx="6522415" cy="457200"/>
+          </a:xfrm>
+          <a:prstGeom prst="rect">
+            <a:avLst/>
+          </a:prstGeom>
+          <a:noFill/>
+          <a:ln/>
+        </p:spPr>
+        <p:txBody>
+          <a:bodyPr wrap="square" lIns="0" tIns="0" rIns="0" bIns="0" rtlCol="0" anchor="ctr"/>
+          <a:lstStyle/>
+          <a:p>
+            <a:pPr algn="l" indent="0" marL="0">
+              <a:buNone/>
+            </a:pPr>
+            <a:r>
+              <a:rPr lang="en-US" sz="3200" b="1" dirty="0">
+                <a:solidFill>
+                  <a:srgbClr val="990011"/>
+                </a:solidFill>
+                <a:latin typeface="Times New Roman" pitchFamily="34" charset="0"/>
+                <a:ea typeface="Times New Roman" pitchFamily="34" charset="-122"/>
+                <a:cs typeface="Times New Roman" pitchFamily="34" charset="-120"/>
+              </a:rPr>
+              <a:t>A) Illustration (continued)</a:t>
+            </a:r>
+            <a:endParaRPr lang="en-US" sz="3200" dirty="0"/>
+          </a:p>
+        </p:txBody>
+      </p:sp>
+      <p:sp>
+        <p:nvSpPr>
+          <p:cNvPr id="6" name="Text 3"/>
+          <p:cNvSpPr/>
+          <p:nvPr/>
+        </p:nvSpPr>
+        <p:spPr>
+          <a:xfrm>
+            <a:off x="5349240" y="2240280"/>
+            <a:ext cx="6522415" cy="4206240"/>
           </a:xfrm>
           <a:prstGeom prst="rect">
             <a:avLst/>
@@ -13793,7 +14598,7 @@
               <a:buNone/>
             </a:pPr>
             <a:r>
-              <a:rPr lang="en-US" sz="4000" dirty="0">
+              <a:rPr lang="en-US" sz="4000" b="1" dirty="0">
                 <a:solidFill>
                   <a:srgbClr val="111111"/>
                 </a:solidFill>
@@ -13801,7 +14606,24 @@
                 <a:ea typeface="Times New Roman" pitchFamily="34" charset="-122"/>
                 <a:cs typeface="Times New Roman" pitchFamily="34" charset="-120"/>
               </a:rPr>
-              <a:t>What is the standard time of Cameroon?</a:t>
+              <a:t>Boundaries: </a:t>
+            </a:r>
+            <a:pPr algn="l" indent="0" marL="0">
+              <a:spcAft>
+                <a:spcPts val="800"/>
+              </a:spcAft>
+              <a:buNone/>
+            </a:pPr>
+            <a:r>
+              <a:rPr lang="en-US" sz="4000" dirty="0">
+                <a:solidFill>
+                  <a:srgbClr val="111111"/>
+                </a:solidFill>
+                <a:latin typeface="Times New Roman" pitchFamily="34" charset="0"/>
+                <a:ea typeface="Times New Roman" pitchFamily="34" charset="-122"/>
+                <a:cs typeface="Times New Roman" pitchFamily="34" charset="-120"/>
+              </a:rPr>
+              <a:t>Zone boundaries bend to follow the borders of countries.</a:t>
             </a:r>
             <a:endParaRPr lang="en-US" sz="4000" dirty="0"/>
           </a:p>
@@ -13913,7 +14735,7 @@
                 <a:ea typeface="Calibri" pitchFamily="34" charset="-122"/>
                 <a:cs typeface="Calibri" pitchFamily="34" charset="-120"/>
               </a:rPr>
-              <a:t>FORMATIVE EVALUATION</a:t>
+              <a:t>BOARD SUMMARY</a:t>
             </a:r>
             <a:endParaRPr lang="en-US" sz="1400" dirty="0"/>
           </a:p>
@@ -13936,7 +14758,7 @@
         <p:spPr>
           <a:xfrm>
             <a:off x="0" y="658368"/>
-            <a:ext cx="5120640" cy="5833872"/>
+            <a:ext cx="2468880" cy="5833872"/>
           </a:xfrm>
           <a:prstGeom prst="rect">
             <a:avLst/>
@@ -13951,8 +14773,8 @@
         </p:nvSpPr>
         <p:spPr>
           <a:xfrm>
-            <a:off x="5349240" y="1005840"/>
-            <a:ext cx="6522415" cy="731520"/>
+            <a:off x="2697480" y="1005840"/>
+            <a:ext cx="9174175" cy="731520"/>
           </a:xfrm>
           <a:prstGeom prst="rect">
             <a:avLst/>
@@ -13978,7 +14800,7 @@
                 <a:ea typeface="Times New Roman" pitchFamily="34" charset="-122"/>
                 <a:cs typeface="Times New Roman" pitchFamily="34" charset="-120"/>
               </a:rPr>
-              <a:t>Expected Answer</a:t>
+              <a:t>2. Standard Time and Time Zones</a:t>
             </a:r>
             <a:endParaRPr lang="en-US" sz="3600" dirty="0"/>
           </a:p>
@@ -13992,8 +14814,47 @@
         </p:nvSpPr>
         <p:spPr>
           <a:xfrm>
-            <a:off x="5349240" y="1783080"/>
-            <a:ext cx="6522415" cy="4663440"/>
+            <a:off x="2697480" y="1737360"/>
+            <a:ext cx="9174175" cy="457200"/>
+          </a:xfrm>
+          <a:prstGeom prst="rect">
+            <a:avLst/>
+          </a:prstGeom>
+          <a:noFill/>
+          <a:ln/>
+        </p:spPr>
+        <p:txBody>
+          <a:bodyPr wrap="square" lIns="0" tIns="0" rIns="0" bIns="0" rtlCol="0" anchor="ctr"/>
+          <a:lstStyle/>
+          <a:p>
+            <a:pPr algn="l" indent="0" marL="0">
+              <a:buNone/>
+            </a:pPr>
+            <a:r>
+              <a:rPr lang="en-US" sz="3200" b="1" dirty="0">
+                <a:solidFill>
+                  <a:srgbClr val="990011"/>
+                </a:solidFill>
+                <a:latin typeface="Times New Roman" pitchFamily="34" charset="0"/>
+                <a:ea typeface="Times New Roman" pitchFamily="34" charset="-122"/>
+                <a:cs typeface="Times New Roman" pitchFamily="34" charset="-120"/>
+              </a:rPr>
+              <a:t>B) Reasons for Time Zones</a:t>
+            </a:r>
+            <a:endParaRPr lang="en-US" sz="3200" dirty="0"/>
+          </a:p>
+        </p:txBody>
+      </p:sp>
+      <p:sp>
+        <p:nvSpPr>
+          <p:cNvPr id="6" name="Text 3"/>
+          <p:cNvSpPr/>
+          <p:nvPr/>
+        </p:nvSpPr>
+        <p:spPr>
+          <a:xfrm>
+            <a:off x="2697480" y="2240280"/>
+            <a:ext cx="9174175" cy="4206240"/>
           </a:xfrm>
           <a:prstGeom prst="rect">
             <a:avLst/>
@@ -14012,7 +14873,7 @@
               <a:buNone/>
             </a:pPr>
             <a:r>
-              <a:rPr lang="en-US" sz="4000" dirty="0">
+              <a:rPr lang="en-US" sz="4000" i="1" dirty="0">
                 <a:solidFill>
                   <a:srgbClr val="111111"/>
                 </a:solidFill>
@@ -14020,7 +14881,81 @@
                 <a:ea typeface="Times New Roman" pitchFamily="34" charset="-122"/>
                 <a:cs typeface="Times New Roman" pitchFamily="34" charset="-120"/>
               </a:rPr>
-              <a:t>West Africa Time, GMT + 1.</a:t>
+              <a:t>Time zones were created for the following reasons:</a:t>
+            </a:r>
+            <a:endParaRPr lang="en-US" sz="4000" dirty="0"/>
+          </a:p>
+          <a:p>
+            <a:pPr algn="l" indent="0" marL="0">
+              <a:spcAft>
+                <a:spcPts val="800"/>
+              </a:spcAft>
+              <a:buNone/>
+            </a:pPr>
+            <a:r>
+              <a:rPr lang="en-US" sz="4000" b="1" dirty="0">
+                <a:solidFill>
+                  <a:srgbClr val="111111"/>
+                </a:solidFill>
+                <a:latin typeface="Times New Roman" pitchFamily="34" charset="0"/>
+                <a:ea typeface="Times New Roman" pitchFamily="34" charset="-122"/>
+                <a:cs typeface="Times New Roman" pitchFamily="34" charset="-120"/>
+              </a:rPr>
+              <a:t>Avoid confusion: </a:t>
+            </a:r>
+            <a:pPr algn="l" indent="0" marL="0">
+              <a:spcAft>
+                <a:spcPts val="800"/>
+              </a:spcAft>
+              <a:buNone/>
+            </a:pPr>
+            <a:r>
+              <a:rPr lang="en-US" sz="4000" dirty="0">
+                <a:solidFill>
+                  <a:srgbClr val="111111"/>
+                </a:solidFill>
+                <a:latin typeface="Times New Roman" pitchFamily="34" charset="0"/>
+                <a:ea typeface="Times New Roman" pitchFamily="34" charset="-122"/>
+                <a:cs typeface="Times New Roman" pitchFamily="34" charset="-120"/>
+              </a:rPr>
+              <a:t>Without zones, every town would have a different local time.</a:t>
+            </a:r>
+            <a:endParaRPr lang="en-US" sz="4000" dirty="0"/>
+          </a:p>
+          <a:p>
+            <a:pPr algn="l" indent="0" marL="0">
+              <a:spcAft>
+                <a:spcPts val="800"/>
+              </a:spcAft>
+              <a:buNone/>
+            </a:pPr>
+            <a:r>
+              <a:rPr lang="en-US" sz="4000" b="1" dirty="0">
+                <a:solidFill>
+                  <a:srgbClr val="111111"/>
+                </a:solidFill>
+                <a:latin typeface="Times New Roman" pitchFamily="34" charset="0"/>
+                <a:ea typeface="Times New Roman" pitchFamily="34" charset="-122"/>
+                <a:cs typeface="Times New Roman" pitchFamily="34" charset="-120"/>
+              </a:rPr>
+              <a:t>Transport: </a:t>
+            </a:r>
+            <a:pPr algn="l" indent="0" marL="0">
+              <a:spcAft>
+                <a:spcPts val="800"/>
+              </a:spcAft>
+              <a:buNone/>
+            </a:pPr>
+            <a:r>
+              <a:rPr lang="en-US" sz="4000" dirty="0">
+                <a:solidFill>
+                  <a:srgbClr val="111111"/>
+                </a:solidFill>
+                <a:latin typeface="Times New Roman" pitchFamily="34" charset="0"/>
+                <a:ea typeface="Times New Roman" pitchFamily="34" charset="-122"/>
+                <a:cs typeface="Times New Roman" pitchFamily="34" charset="-120"/>
+              </a:rPr>
+              <a:t>Trains, aeroplanes and ships need common timetables.</a:t>
             </a:r>
             <a:endParaRPr lang="en-US" sz="4000" dirty="0"/>
           </a:p>
@@ -14132,7 +15067,7 @@
                 <a:ea typeface="Calibri" pitchFamily="34" charset="-122"/>
                 <a:cs typeface="Calibri" pitchFamily="34" charset="-120"/>
               </a:rPr>
-              <a:t>REMEDIATION</a:t>
+              <a:t>BOARD SUMMARY</a:t>
             </a:r>
             <a:endParaRPr lang="en-US" sz="1400" dirty="0"/>
           </a:p>
@@ -14155,7 +15090,7 @@
         <p:spPr>
           <a:xfrm>
             <a:off x="0" y="658368"/>
-            <a:ext cx="2468880" cy="5833872"/>
+            <a:ext cx="5120640" cy="5833872"/>
           </a:xfrm>
           <a:prstGeom prst="rect">
             <a:avLst/>
@@ -14170,8 +15105,8 @@
         </p:nvSpPr>
         <p:spPr>
           <a:xfrm>
-            <a:off x="2697480" y="1005840"/>
-            <a:ext cx="9174175" cy="731520"/>
+            <a:off x="5349240" y="1005840"/>
+            <a:ext cx="6522415" cy="731520"/>
           </a:xfrm>
           <a:prstGeom prst="rect">
             <a:avLst/>
@@ -14197,7 +15132,7 @@
                 <a:ea typeface="Times New Roman" pitchFamily="34" charset="-122"/>
                 <a:cs typeface="Times New Roman" pitchFamily="34" charset="-120"/>
               </a:rPr>
-              <a:t>Remediation</a:t>
+              <a:t>2. Standard Time and Time Zones</a:t>
             </a:r>
             <a:endParaRPr lang="en-US" sz="3600" dirty="0"/>
           </a:p>
@@ -14211,8 +15146,47 @@
         </p:nvSpPr>
         <p:spPr>
           <a:xfrm>
-            <a:off x="2697480" y="1783080"/>
-            <a:ext cx="9174175" cy="4663440"/>
+            <a:off x="5349240" y="1737360"/>
+            <a:ext cx="6522415" cy="457200"/>
+          </a:xfrm>
+          <a:prstGeom prst="rect">
+            <a:avLst/>
+          </a:prstGeom>
+          <a:noFill/>
+          <a:ln/>
+        </p:spPr>
+        <p:txBody>
+          <a:bodyPr wrap="square" lIns="0" tIns="0" rIns="0" bIns="0" rtlCol="0" anchor="ctr"/>
+          <a:lstStyle/>
+          <a:p>
+            <a:pPr algn="l" indent="0" marL="0">
+              <a:buNone/>
+            </a:pPr>
+            <a:r>
+              <a:rPr lang="en-US" sz="2700" b="1" dirty="0">
+                <a:solidFill>
+                  <a:srgbClr val="990011"/>
+                </a:solidFill>
+                <a:latin typeface="Times New Roman" pitchFamily="34" charset="0"/>
+                <a:ea typeface="Times New Roman" pitchFamily="34" charset="-122"/>
+                <a:cs typeface="Times New Roman" pitchFamily="34" charset="-120"/>
+              </a:rPr>
+              <a:t>B) Reasons for Time Zones (continued)</a:t>
+            </a:r>
+            <a:endParaRPr lang="en-US" sz="2700" dirty="0"/>
+          </a:p>
+        </p:txBody>
+      </p:sp>
+      <p:sp>
+        <p:nvSpPr>
+          <p:cNvPr id="6" name="Text 3"/>
+          <p:cNvSpPr/>
+          <p:nvPr/>
+        </p:nvSpPr>
+        <p:spPr>
+          <a:xfrm>
+            <a:off x="5349240" y="2240280"/>
+            <a:ext cx="6522415" cy="4206240"/>
           </a:xfrm>
           <a:prstGeom prst="rect">
             <a:avLst/>
@@ -14239,18 +15213,13 @@
                 <a:ea typeface="Times New Roman" pitchFamily="34" charset="-122"/>
                 <a:cs typeface="Times New Roman" pitchFamily="34" charset="-120"/>
               </a:rPr>
-              <a:t>Fill in the blanks:</a:t>
-            </a:r>
-            <a:endParaRPr lang="en-US" sz="4000" dirty="0"/>
-          </a:p>
-          <a:p>
-            <a:pPr algn="l" marL="342900" indent="-342900">
+              <a:t>Communication and trade: </a:t>
+            </a:r>
+            <a:pPr algn="l" indent="0" marL="0">
               <a:spcAft>
                 <a:spcPts val="800"/>
               </a:spcAft>
-              <a:buSzPct val="100000"/>
-              <a:buFont typeface="+mj-lt"/>
-              <a:buAutoNum type="arabicPeriod" startAt="1"/>
+              <a:buNone/>
             </a:pPr>
             <a:r>
               <a:rPr lang="en-US" sz="4000" dirty="0">
@@ -14261,51 +15230,7 @@
                 <a:ea typeface="Times New Roman" pitchFamily="34" charset="-122"/>
                 <a:cs typeface="Times New Roman" pitchFamily="34" charset="-120"/>
               </a:rPr>
-              <a:t>The Earth turns ______ ° in one hour.</a:t>
-            </a:r>
-            <a:endParaRPr lang="en-US" sz="4000" dirty="0"/>
-          </a:p>
-          <a:p>
-            <a:pPr algn="l" marL="342900" indent="-342900">
-              <a:spcAft>
-                <a:spcPts val="800"/>
-              </a:spcAft>
-              <a:buSzPct val="100000"/>
-              <a:buFont typeface="+mj-lt"/>
-              <a:buAutoNum type="arabicPeriod" startAt="1"/>
-            </a:pPr>
-            <a:r>
-              <a:rPr lang="en-US" sz="4000" dirty="0">
-                <a:solidFill>
-                  <a:srgbClr val="111111"/>
-                </a:solidFill>
-                <a:latin typeface="Times New Roman" pitchFamily="34" charset="0"/>
-                <a:ea typeface="Times New Roman" pitchFamily="34" charset="-122"/>
-                <a:cs typeface="Times New Roman" pitchFamily="34" charset="-120"/>
-              </a:rPr>
-              <a:t>There are ______ main time zones.</a:t>
-            </a:r>
-            <a:endParaRPr lang="en-US" sz="4000" dirty="0"/>
-          </a:p>
-          <a:p>
-            <a:pPr algn="l" marL="342900" indent="-342900">
-              <a:spcAft>
-                <a:spcPts val="800"/>
-              </a:spcAft>
-              <a:buSzPct val="100000"/>
-              <a:buFont typeface="+mj-lt"/>
-              <a:buAutoNum type="arabicPeriod" startAt="1"/>
-            </a:pPr>
-            <a:r>
-              <a:rPr lang="en-US" sz="4000" dirty="0">
-                <a:solidFill>
-                  <a:srgbClr val="111111"/>
-                </a:solidFill>
-                <a:latin typeface="Times New Roman" pitchFamily="34" charset="0"/>
-                <a:ea typeface="Times New Roman" pitchFamily="34" charset="-122"/>
-                <a:cs typeface="Times New Roman" pitchFamily="34" charset="-120"/>
-              </a:rPr>
-              <a:t>Places to the east have a time that is ______.</a:t>
+              <a:t>Offices, banks, radio and television need the same time over a large area.</a:t>
             </a:r>
             <a:endParaRPr lang="en-US" sz="4000" dirty="0"/>
           </a:p>
@@ -14656,7 +15581,7 @@
                 <a:ea typeface="Calibri" pitchFamily="34" charset="-122"/>
                 <a:cs typeface="Calibri" pitchFamily="34" charset="-120"/>
               </a:rPr>
-              <a:t>HOMEWORK</a:t>
+              <a:t>BOARD SUMMARY</a:t>
             </a:r>
             <a:endParaRPr lang="en-US" sz="1400" dirty="0"/>
           </a:p>
@@ -14679,7 +15604,7 @@
         <p:spPr>
           <a:xfrm>
             <a:off x="0" y="658368"/>
-            <a:ext cx="5120640" cy="5833872"/>
+            <a:ext cx="3840480" cy="5833872"/>
           </a:xfrm>
           <a:prstGeom prst="rect">
             <a:avLst/>
@@ -14694,8 +15619,8 @@
         </p:nvSpPr>
         <p:spPr>
           <a:xfrm>
-            <a:off x="5349240" y="1005840"/>
-            <a:ext cx="6522415" cy="731520"/>
+            <a:off x="4069080" y="1005840"/>
+            <a:ext cx="7802575" cy="731520"/>
           </a:xfrm>
           <a:prstGeom prst="rect">
             <a:avLst/>
@@ -14721,7 +15646,7 @@
                 <a:ea typeface="Times New Roman" pitchFamily="34" charset="-122"/>
                 <a:cs typeface="Times New Roman" pitchFamily="34" charset="-120"/>
               </a:rPr>
-              <a:t>Homework</a:t>
+              <a:t>2. Standard Time and Time Zones</a:t>
             </a:r>
             <a:endParaRPr lang="en-US" sz="3600" dirty="0"/>
           </a:p>
@@ -14735,8 +15660,47 @@
         </p:nvSpPr>
         <p:spPr>
           <a:xfrm>
-            <a:off x="5349240" y="1783080"/>
-            <a:ext cx="6522415" cy="4663440"/>
+            <a:off x="4069080" y="1737360"/>
+            <a:ext cx="7802575" cy="457200"/>
+          </a:xfrm>
+          <a:prstGeom prst="rect">
+            <a:avLst/>
+          </a:prstGeom>
+          <a:noFill/>
+          <a:ln/>
+        </p:spPr>
+        <p:txBody>
+          <a:bodyPr wrap="square" lIns="0" tIns="0" rIns="0" bIns="0" rtlCol="0" anchor="ctr"/>
+          <a:lstStyle/>
+          <a:p>
+            <a:pPr algn="l" indent="0" marL="0">
+              <a:buNone/>
+            </a:pPr>
+            <a:r>
+              <a:rPr lang="en-US" sz="2900" b="1" dirty="0">
+                <a:solidFill>
+                  <a:srgbClr val="990011"/>
+                </a:solidFill>
+                <a:latin typeface="Times New Roman" pitchFamily="34" charset="0"/>
+                <a:ea typeface="Times New Roman" pitchFamily="34" charset="-122"/>
+                <a:cs typeface="Times New Roman" pitchFamily="34" charset="-120"/>
+              </a:rPr>
+              <a:t>C) Why Some Countries Have Many Time Zones</a:t>
+            </a:r>
+            <a:endParaRPr lang="en-US" sz="2900" dirty="0"/>
+          </a:p>
+        </p:txBody>
+      </p:sp>
+      <p:sp>
+        <p:nvSpPr>
+          <p:cNvPr id="6" name="Text 3"/>
+          <p:cNvSpPr/>
+          <p:nvPr/>
+        </p:nvSpPr>
+        <p:spPr>
+          <a:xfrm>
+            <a:off x="4069080" y="2240280"/>
+            <a:ext cx="7802575" cy="4206240"/>
           </a:xfrm>
           <a:prstGeom prst="rect">
             <a:avLst/>
@@ -14755,7 +15719,7 @@
               <a:buNone/>
             </a:pPr>
             <a:r>
-              <a:rPr lang="en-US" sz="4000" dirty="0">
+              <a:rPr lang="en-US" sz="4000" i="1" dirty="0">
                 <a:solidFill>
                   <a:srgbClr val="111111"/>
                 </a:solidFill>
@@ -14763,7 +15727,44 @@
                 <a:ea typeface="Times New Roman" pitchFamily="34" charset="-122"/>
                 <a:cs typeface="Times New Roman" pitchFamily="34" charset="-120"/>
               </a:rPr>
-              <a:t>Find the time in Garoua when it is 12 noon in London in winter (GMT). Then try: what time is it in a town at 45° E when it is 12 noon at 0°?</a:t>
+              <a:t>Some countries have many time zones for the following reasons:</a:t>
+            </a:r>
+            <a:endParaRPr lang="en-US" sz="4000" dirty="0"/>
+          </a:p>
+          <a:p>
+            <a:pPr algn="l" indent="0" marL="0">
+              <a:spcAft>
+                <a:spcPts val="800"/>
+              </a:spcAft>
+              <a:buNone/>
+            </a:pPr>
+            <a:r>
+              <a:rPr lang="en-US" sz="4000" b="1" dirty="0">
+                <a:solidFill>
+                  <a:srgbClr val="111111"/>
+                </a:solidFill>
+                <a:latin typeface="Times New Roman" pitchFamily="34" charset="0"/>
+                <a:ea typeface="Times New Roman" pitchFamily="34" charset="-122"/>
+                <a:cs typeface="Times New Roman" pitchFamily="34" charset="-120"/>
+              </a:rPr>
+              <a:t>Great width from east to west: </a:t>
+            </a:r>
+            <a:pPr algn="l" indent="0" marL="0">
+              <a:spcAft>
+                <a:spcPts val="800"/>
+              </a:spcAft>
+              <a:buNone/>
+            </a:pPr>
+            <a:r>
+              <a:rPr lang="en-US" sz="4000" dirty="0">
+                <a:solidFill>
+                  <a:srgbClr val="111111"/>
+                </a:solidFill>
+                <a:latin typeface="Times New Roman" pitchFamily="34" charset="0"/>
+                <a:ea typeface="Times New Roman" pitchFamily="34" charset="-122"/>
+                <a:cs typeface="Times New Roman" pitchFamily="34" charset="-120"/>
+              </a:rPr>
+              <a:t>Russia, the USA, Canada and Australia cover many degrees of longitude.</a:t>
             </a:r>
             <a:endParaRPr lang="en-US" sz="4000" dirty="0"/>
           </a:p>
@@ -14875,7 +15876,7 @@
                 <a:ea typeface="Calibri" pitchFamily="34" charset="-122"/>
                 <a:cs typeface="Calibri" pitchFamily="34" charset="-120"/>
               </a:rPr>
-              <a:t>NEXT LESSON</a:t>
+              <a:t>BOARD SUMMARY</a:t>
             </a:r>
             <a:endParaRPr lang="en-US" sz="1400" dirty="0"/>
           </a:p>
@@ -14940,7 +15941,7 @@
                 <a:ea typeface="Times New Roman" pitchFamily="34" charset="-122"/>
                 <a:cs typeface="Times New Roman" pitchFamily="34" charset="-120"/>
               </a:rPr>
-              <a:t>Next Lesson</a:t>
+              <a:t>2. Standard Time and Time Zones</a:t>
             </a:r>
             <a:endParaRPr lang="en-US" sz="3600" dirty="0"/>
           </a:p>
@@ -14954,8 +15955,8 @@
         </p:nvSpPr>
         <p:spPr>
           <a:xfrm>
-            <a:off x="5349240" y="1783080"/>
-            <a:ext cx="6522415" cy="4663440"/>
+            <a:off x="5349240" y="1737360"/>
+            <a:ext cx="6522415" cy="457200"/>
           </a:xfrm>
           <a:prstGeom prst="rect">
             <a:avLst/>
@@ -14967,7 +15968,46 @@
           <a:bodyPr wrap="square" lIns="0" tIns="0" rIns="0" bIns="0" rtlCol="0" anchor="ctr"/>
           <a:lstStyle/>
           <a:p>
-            <a:pPr algn="ctr" indent="0" marL="0">
+            <a:pPr algn="l" indent="0" marL="0">
+              <a:buNone/>
+            </a:pPr>
+            <a:r>
+              <a:rPr lang="en-US" sz="1900" b="1" dirty="0">
+                <a:solidFill>
+                  <a:srgbClr val="990011"/>
+                </a:solidFill>
+                <a:latin typeface="Times New Roman" pitchFamily="34" charset="0"/>
+                <a:ea typeface="Times New Roman" pitchFamily="34" charset="-122"/>
+                <a:cs typeface="Times New Roman" pitchFamily="34" charset="-120"/>
+              </a:rPr>
+              <a:t>C) Why Some Countries Have Many Time Zones (continued)</a:t>
+            </a:r>
+            <a:endParaRPr lang="en-US" sz="1900" dirty="0"/>
+          </a:p>
+        </p:txBody>
+      </p:sp>
+      <p:sp>
+        <p:nvSpPr>
+          <p:cNvPr id="6" name="Text 3"/>
+          <p:cNvSpPr/>
+          <p:nvPr/>
+        </p:nvSpPr>
+        <p:spPr>
+          <a:xfrm>
+            <a:off x="5349240" y="2240280"/>
+            <a:ext cx="6522415" cy="4206240"/>
+          </a:xfrm>
+          <a:prstGeom prst="rect">
+            <a:avLst/>
+          </a:prstGeom>
+          <a:noFill/>
+          <a:ln/>
+        </p:spPr>
+        <p:txBody>
+          <a:bodyPr wrap="square" lIns="0" tIns="0" rIns="0" bIns="0" rtlCol="0" anchor="t"/>
+          <a:lstStyle/>
+          <a:p>
+            <a:pPr algn="l" indent="0" marL="0">
               <a:spcAft>
                 <a:spcPts val="800"/>
               </a:spcAft>
@@ -14982,27 +16022,61 @@
                 <a:ea typeface="Times New Roman" pitchFamily="34" charset="-122"/>
                 <a:cs typeface="Times New Roman" pitchFamily="34" charset="-120"/>
               </a:rPr>
-              <a:t>Our next lesson will be on:</a:t>
-            </a:r>
-            <a:endParaRPr lang="en-US" sz="4000" dirty="0"/>
-          </a:p>
-          <a:p>
-            <a:pPr algn="ctr" indent="0" marL="0">
+              <a:t>Difference in sunrise: </a:t>
+            </a:r>
+            <a:pPr algn="l" indent="0" marL="0">
               <a:spcAft>
                 <a:spcPts val="800"/>
               </a:spcAft>
               <a:buNone/>
             </a:pPr>
             <a:r>
-              <a:rPr lang="en-US" sz="4000" b="1" dirty="0">
-                <a:solidFill>
-                  <a:srgbClr val="990011"/>
+              <a:rPr lang="en-US" sz="4000" dirty="0">
+                <a:solidFill>
+                  <a:srgbClr val="111111"/>
                 </a:solidFill>
                 <a:latin typeface="Times New Roman" pitchFamily="34" charset="0"/>
                 <a:ea typeface="Times New Roman" pitchFamily="34" charset="-122"/>
                 <a:cs typeface="Times New Roman" pitchFamily="34" charset="-120"/>
               </a:rPr>
-              <a:t>Practical Work 2: Calculation of Time and Date</a:t>
+              <a:t>The Sun rises hours earlier in the east of these countries than in the west.</a:t>
+            </a:r>
+            <a:endParaRPr lang="en-US" sz="4000" dirty="0"/>
+          </a:p>
+          <a:p>
+            <a:pPr algn="l" indent="0" marL="0">
+              <a:spcAft>
+                <a:spcPts val="800"/>
+              </a:spcAft>
+              <a:buNone/>
+            </a:pPr>
+            <a:r>
+              <a:rPr lang="en-US" sz="4000" b="1" dirty="0">
+                <a:solidFill>
+                  <a:srgbClr val="111111"/>
+                </a:solidFill>
+                <a:latin typeface="Times New Roman" pitchFamily="34" charset="0"/>
+                <a:ea typeface="Times New Roman" pitchFamily="34" charset="-122"/>
+                <a:cs typeface="Times New Roman" pitchFamily="34" charset="-120"/>
+              </a:rPr>
+              <a:t>Examples: </a:t>
+            </a:r>
+            <a:pPr algn="l" indent="0" marL="0">
+              <a:spcAft>
+                <a:spcPts val="800"/>
+              </a:spcAft>
+              <a:buNone/>
+            </a:pPr>
+            <a:r>
+              <a:rPr lang="en-US" sz="4000" dirty="0">
+                <a:solidFill>
+                  <a:srgbClr val="111111"/>
+                </a:solidFill>
+                <a:latin typeface="Times New Roman" pitchFamily="34" charset="0"/>
+                <a:ea typeface="Times New Roman" pitchFamily="34" charset="-122"/>
+                <a:cs typeface="Times New Roman" pitchFamily="34" charset="-120"/>
+              </a:rPr>
+              <a:t>Russia has 11 time zones, and the USA has 6.</a:t>
             </a:r>
             <a:endParaRPr lang="en-US" sz="4000" dirty="0"/>
           </a:p>
@@ -15114,6 +16188,1625 @@
                 <a:ea typeface="Calibri" pitchFamily="34" charset="-122"/>
                 <a:cs typeface="Calibri" pitchFamily="34" charset="-120"/>
               </a:rPr>
+              <a:t>FORMATIVE EVALUATION</a:t>
+            </a:r>
+            <a:endParaRPr lang="en-US" sz="1400" dirty="0"/>
+          </a:p>
+        </p:txBody>
+      </p:sp>
+      <p:pic>
+        <p:nvPicPr>
+          <p:cNvPr id="3" name="Image 0" descr="/home/claude/f4/img/minesec_sheet.png">    </p:cNvPr>
+          <p:cNvPicPr>
+            <a:picLocks noChangeAspect="1"/>
+          </p:cNvPicPr>
+          <p:nvPr/>
+        </p:nvPicPr>
+        <p:blipFill>
+          <a:blip r:embed="rId1"/>
+          <a:stretch>
+            <a:fillRect/>
+          </a:stretch>
+        </p:blipFill>
+        <p:spPr>
+          <a:xfrm>
+            <a:off x="0" y="658368"/>
+            <a:ext cx="5120640" cy="5833872"/>
+          </a:xfrm>
+          <a:prstGeom prst="rect">
+            <a:avLst/>
+          </a:prstGeom>
+        </p:spPr>
+      </p:pic>
+      <p:sp>
+        <p:nvSpPr>
+          <p:cNvPr id="4" name="Text 1"/>
+          <p:cNvSpPr/>
+          <p:nvPr/>
+        </p:nvSpPr>
+        <p:spPr>
+          <a:xfrm>
+            <a:off x="5349240" y="1005840"/>
+            <a:ext cx="6522415" cy="731520"/>
+          </a:xfrm>
+          <a:prstGeom prst="rect">
+            <a:avLst/>
+          </a:prstGeom>
+          <a:noFill/>
+          <a:ln/>
+        </p:spPr>
+        <p:txBody>
+          <a:bodyPr wrap="square" lIns="0" tIns="0" rIns="0" bIns="0" rtlCol="0" anchor="ctr">
+            <a:normAutofit/>
+          </a:bodyPr>
+          <a:lstStyle/>
+          <a:p>
+            <a:pPr algn="ctr" indent="0" marL="0">
+              <a:buNone/>
+            </a:pPr>
+            <a:r>
+              <a:rPr lang="en-US" sz="3600" b="1" dirty="0">
+                <a:solidFill>
+                  <a:srgbClr val="990011"/>
+                </a:solidFill>
+                <a:latin typeface="Times New Roman" pitchFamily="34" charset="0"/>
+                <a:ea typeface="Times New Roman" pitchFamily="34" charset="-122"/>
+                <a:cs typeface="Times New Roman" pitchFamily="34" charset="-120"/>
+              </a:rPr>
+              <a:t>Evaluation 1</a:t>
+            </a:r>
+            <a:endParaRPr lang="en-US" sz="3600" dirty="0"/>
+          </a:p>
+        </p:txBody>
+      </p:sp>
+      <p:sp>
+        <p:nvSpPr>
+          <p:cNvPr id="5" name="Text 2"/>
+          <p:cNvSpPr/>
+          <p:nvPr/>
+        </p:nvSpPr>
+        <p:spPr>
+          <a:xfrm>
+            <a:off x="5349240" y="1783080"/>
+            <a:ext cx="6522415" cy="4663440"/>
+          </a:xfrm>
+          <a:prstGeom prst="rect">
+            <a:avLst/>
+          </a:prstGeom>
+          <a:noFill/>
+          <a:ln/>
+        </p:spPr>
+        <p:txBody>
+          <a:bodyPr wrap="square" lIns="0" tIns="0" rIns="0" bIns="0" rtlCol="0" anchor="t"/>
+          <a:lstStyle/>
+          <a:p>
+            <a:pPr algn="l" indent="0" marL="0">
+              <a:spcAft>
+                <a:spcPts val="800"/>
+              </a:spcAft>
+              <a:buNone/>
+            </a:pPr>
+            <a:r>
+              <a:rPr lang="en-US" sz="4000" dirty="0">
+                <a:solidFill>
+                  <a:srgbClr val="111111"/>
+                </a:solidFill>
+                <a:latin typeface="Times New Roman" pitchFamily="34" charset="0"/>
+                <a:ea typeface="Times New Roman" pitchFamily="34" charset="-122"/>
+                <a:cs typeface="Times New Roman" pitchFamily="34" charset="-120"/>
+              </a:rPr>
+              <a:t>How many degrees does the Earth turn in one hour?</a:t>
+            </a:r>
+            <a:endParaRPr lang="en-US" sz="4000" dirty="0"/>
+          </a:p>
+        </p:txBody>
+      </p:sp>
+      <p:sp>
+        <p:nvSpPr>
+          <p:cNvPr id="25" name="Slide Number Placeholder 0"/>
+          <p:cNvSpPr>
+            <a:spLocks noGrp="1"/>
+          </p:cNvSpPr>
+          <p:nvPr>
+            <p:ph type="sldNum" sz="quarter" idx="4294967295"/>
+          </p:nvPr>
+        </p:nvSpPr>
+        <p:spPr>
+          <a:xfrm>
+            <a:off x="27432" y="91440"/>
+            <a:ext cx="585216" cy="475488"/>
+          </a:xfrm>
+          <a:prstGeom prst="rect">
+            <a:avLst/>
+          </a:prstGeom>
+          <a:extLst>
+            <a:ext uri="{C572A759-6A51-4108-AA02-DFA0A04FC94B}">
+              <ma14:wrappingTextBoxFlag xmlns:ma14="http://schemas.microsoft.com/office/mac/drawingml/2011/main" val="0"/>
+            </a:ext>
+          </a:extLst>
+        </p:spPr>
+        <p:txBody>
+          <a:bodyPr/>
+          <a:lstStyle>
+            <a:lvl1pPr>
+              <a:defRPr sz="2000">
+                <a:solidFill>
+                  <a:srgbClr val="FFFFFF"/>
+                </a:solidFill>
+                <a:latin typeface="Calibri"/>
+                <a:ea typeface="Calibri"/>
+                <a:cs typeface="Calibri"/>
+              </a:defRPr>
+            </a:lvl1pPr>
+          </a:lstStyle>
+          <a:p>
+            <a:pPr algn="ctr"/>
+            <a:fld id="{F7021451-1387-4CA6-816F-3879F97B5CBC}" type="slidenum">
+              <a:rPr b="1" lang="en-US"/>
+              <a:t>42</a:t>
+            </a:fld>
+            <a:endParaRPr lang="en-US"/>
+          </a:p>
+        </p:txBody>
+      </p:sp>
+    </p:spTree>
+  </p:cSld>
+  <p:clrMapOvr>
+    <a:masterClrMapping/>
+  </p:clrMapOvr>
+</p:sld>
+</file>
+
+<file path=ppt/slides/slide43.xml><?xml version="1.0" encoding="utf-8"?>
+<p:sld xmlns:a="http://schemas.openxmlformats.org/drawingml/2006/main" xmlns:r="http://schemas.openxmlformats.org/officeDocument/2006/relationships" xmlns:p="http://schemas.openxmlformats.org/presentationml/2006/main">
+  <p:cSld name="Slide 43">
+    <p:spTree>
+      <p:nvGrpSpPr>
+        <p:cNvPr id="1" name=""/>
+        <p:cNvGrpSpPr/>
+        <p:nvPr/>
+      </p:nvGrpSpPr>
+      <p:grpSpPr>
+        <a:xfrm>
+          <a:off x="0" y="0"/>
+          <a:ext cx="0" cy="0"/>
+          <a:chOff x="0" y="0"/>
+          <a:chExt cx="0" cy="0"/>
+        </a:xfrm>
+      </p:grpSpPr>
+      <p:sp>
+        <p:nvSpPr>
+          <p:cNvPr id="2" name="Text 0"/>
+          <p:cNvSpPr/>
+          <p:nvPr/>
+        </p:nvSpPr>
+        <p:spPr>
+          <a:xfrm>
+            <a:off x="457200" y="713232"/>
+            <a:ext cx="11368735" cy="274320"/>
+          </a:xfrm>
+          <a:prstGeom prst="rect">
+            <a:avLst/>
+          </a:prstGeom>
+          <a:noFill/>
+          <a:ln/>
+        </p:spPr>
+        <p:txBody>
+          <a:bodyPr wrap="square" lIns="0" tIns="0" rIns="0" bIns="0" rtlCol="0" anchor="ctr"/>
+          <a:lstStyle/>
+          <a:p>
+            <a:pPr algn="r" indent="0" marL="0">
+              <a:buNone/>
+            </a:pPr>
+            <a:r>
+              <a:rPr lang="en-US" sz="1400" b="1" dirty="0">
+                <a:solidFill>
+                  <a:srgbClr val="1C3F6E"/>
+                </a:solidFill>
+                <a:latin typeface="Calibri" pitchFamily="34" charset="0"/>
+                <a:ea typeface="Calibri" pitchFamily="34" charset="-122"/>
+                <a:cs typeface="Calibri" pitchFamily="34" charset="-120"/>
+              </a:rPr>
+              <a:t>FORMATIVE EVALUATION</a:t>
+            </a:r>
+            <a:endParaRPr lang="en-US" sz="1400" dirty="0"/>
+          </a:p>
+        </p:txBody>
+      </p:sp>
+      <p:pic>
+        <p:nvPicPr>
+          <p:cNvPr id="3" name="Image 0" descr="/home/claude/f4/img/minesec_sheet.png">    </p:cNvPr>
+          <p:cNvPicPr>
+            <a:picLocks noChangeAspect="1"/>
+          </p:cNvPicPr>
+          <p:nvPr/>
+        </p:nvPicPr>
+        <p:blipFill>
+          <a:blip r:embed="rId1"/>
+          <a:stretch>
+            <a:fillRect/>
+          </a:stretch>
+        </p:blipFill>
+        <p:spPr>
+          <a:xfrm>
+            <a:off x="0" y="658368"/>
+            <a:ext cx="5120640" cy="5833872"/>
+          </a:xfrm>
+          <a:prstGeom prst="rect">
+            <a:avLst/>
+          </a:prstGeom>
+        </p:spPr>
+      </p:pic>
+      <p:sp>
+        <p:nvSpPr>
+          <p:cNvPr id="4" name="Text 1"/>
+          <p:cNvSpPr/>
+          <p:nvPr/>
+        </p:nvSpPr>
+        <p:spPr>
+          <a:xfrm>
+            <a:off x="5349240" y="1005840"/>
+            <a:ext cx="6522415" cy="731520"/>
+          </a:xfrm>
+          <a:prstGeom prst="rect">
+            <a:avLst/>
+          </a:prstGeom>
+          <a:noFill/>
+          <a:ln/>
+        </p:spPr>
+        <p:txBody>
+          <a:bodyPr wrap="square" lIns="0" tIns="0" rIns="0" bIns="0" rtlCol="0" anchor="ctr">
+            <a:normAutofit/>
+          </a:bodyPr>
+          <a:lstStyle/>
+          <a:p>
+            <a:pPr algn="ctr" indent="0" marL="0">
+              <a:buNone/>
+            </a:pPr>
+            <a:r>
+              <a:rPr lang="en-US" sz="3600" b="1" dirty="0">
+                <a:solidFill>
+                  <a:srgbClr val="990011"/>
+                </a:solidFill>
+                <a:latin typeface="Times New Roman" pitchFamily="34" charset="0"/>
+                <a:ea typeface="Times New Roman" pitchFamily="34" charset="-122"/>
+                <a:cs typeface="Times New Roman" pitchFamily="34" charset="-120"/>
+              </a:rPr>
+              <a:t>Expected Answer</a:t>
+            </a:r>
+            <a:endParaRPr lang="en-US" sz="3600" dirty="0"/>
+          </a:p>
+        </p:txBody>
+      </p:sp>
+      <p:sp>
+        <p:nvSpPr>
+          <p:cNvPr id="5" name="Text 2"/>
+          <p:cNvSpPr/>
+          <p:nvPr/>
+        </p:nvSpPr>
+        <p:spPr>
+          <a:xfrm>
+            <a:off x="5349240" y="1783080"/>
+            <a:ext cx="6522415" cy="4663440"/>
+          </a:xfrm>
+          <a:prstGeom prst="rect">
+            <a:avLst/>
+          </a:prstGeom>
+          <a:noFill/>
+          <a:ln/>
+        </p:spPr>
+        <p:txBody>
+          <a:bodyPr wrap="square" lIns="0" tIns="0" rIns="0" bIns="0" rtlCol="0" anchor="t"/>
+          <a:lstStyle/>
+          <a:p>
+            <a:pPr algn="l" indent="0" marL="0">
+              <a:spcAft>
+                <a:spcPts val="800"/>
+              </a:spcAft>
+              <a:buNone/>
+            </a:pPr>
+            <a:r>
+              <a:rPr lang="en-US" sz="4000" dirty="0">
+                <a:solidFill>
+                  <a:srgbClr val="111111"/>
+                </a:solidFill>
+                <a:latin typeface="Times New Roman" pitchFamily="34" charset="0"/>
+                <a:ea typeface="Times New Roman" pitchFamily="34" charset="-122"/>
+                <a:cs typeface="Times New Roman" pitchFamily="34" charset="-120"/>
+              </a:rPr>
+              <a:t>15°.</a:t>
+            </a:r>
+            <a:endParaRPr lang="en-US" sz="4000" dirty="0"/>
+          </a:p>
+        </p:txBody>
+      </p:sp>
+      <p:sp>
+        <p:nvSpPr>
+          <p:cNvPr id="25" name="Slide Number Placeholder 0"/>
+          <p:cNvSpPr>
+            <a:spLocks noGrp="1"/>
+          </p:cNvSpPr>
+          <p:nvPr>
+            <p:ph type="sldNum" sz="quarter" idx="4294967295"/>
+          </p:nvPr>
+        </p:nvSpPr>
+        <p:spPr>
+          <a:xfrm>
+            <a:off x="27432" y="91440"/>
+            <a:ext cx="585216" cy="475488"/>
+          </a:xfrm>
+          <a:prstGeom prst="rect">
+            <a:avLst/>
+          </a:prstGeom>
+          <a:extLst>
+            <a:ext uri="{C572A759-6A51-4108-AA02-DFA0A04FC94B}">
+              <ma14:wrappingTextBoxFlag xmlns:ma14="http://schemas.microsoft.com/office/mac/drawingml/2011/main" val="0"/>
+            </a:ext>
+          </a:extLst>
+        </p:spPr>
+        <p:txBody>
+          <a:bodyPr/>
+          <a:lstStyle>
+            <a:lvl1pPr>
+              <a:defRPr sz="2000">
+                <a:solidFill>
+                  <a:srgbClr val="FFFFFF"/>
+                </a:solidFill>
+                <a:latin typeface="Calibri"/>
+                <a:ea typeface="Calibri"/>
+                <a:cs typeface="Calibri"/>
+              </a:defRPr>
+            </a:lvl1pPr>
+          </a:lstStyle>
+          <a:p>
+            <a:pPr algn="ctr"/>
+            <a:fld id="{F7021451-1387-4CA6-816F-3879F97B5CBC}" type="slidenum">
+              <a:rPr b="1" lang="en-US"/>
+              <a:t>43</a:t>
+            </a:fld>
+            <a:endParaRPr lang="en-US"/>
+          </a:p>
+        </p:txBody>
+      </p:sp>
+    </p:spTree>
+  </p:cSld>
+  <p:clrMapOvr>
+    <a:masterClrMapping/>
+  </p:clrMapOvr>
+</p:sld>
+</file>
+
+<file path=ppt/slides/slide44.xml><?xml version="1.0" encoding="utf-8"?>
+<p:sld xmlns:a="http://schemas.openxmlformats.org/drawingml/2006/main" xmlns:r="http://schemas.openxmlformats.org/officeDocument/2006/relationships" xmlns:p="http://schemas.openxmlformats.org/presentationml/2006/main">
+  <p:cSld name="Slide 44">
+    <p:spTree>
+      <p:nvGrpSpPr>
+        <p:cNvPr id="1" name=""/>
+        <p:cNvGrpSpPr/>
+        <p:nvPr/>
+      </p:nvGrpSpPr>
+      <p:grpSpPr>
+        <a:xfrm>
+          <a:off x="0" y="0"/>
+          <a:ext cx="0" cy="0"/>
+          <a:chOff x="0" y="0"/>
+          <a:chExt cx="0" cy="0"/>
+        </a:xfrm>
+      </p:grpSpPr>
+      <p:sp>
+        <p:nvSpPr>
+          <p:cNvPr id="2" name="Text 0"/>
+          <p:cNvSpPr/>
+          <p:nvPr/>
+        </p:nvSpPr>
+        <p:spPr>
+          <a:xfrm>
+            <a:off x="457200" y="713232"/>
+            <a:ext cx="11368735" cy="274320"/>
+          </a:xfrm>
+          <a:prstGeom prst="rect">
+            <a:avLst/>
+          </a:prstGeom>
+          <a:noFill/>
+          <a:ln/>
+        </p:spPr>
+        <p:txBody>
+          <a:bodyPr wrap="square" lIns="0" tIns="0" rIns="0" bIns="0" rtlCol="0" anchor="ctr"/>
+          <a:lstStyle/>
+          <a:p>
+            <a:pPr algn="r" indent="0" marL="0">
+              <a:buNone/>
+            </a:pPr>
+            <a:r>
+              <a:rPr lang="en-US" sz="1400" b="1" dirty="0">
+                <a:solidFill>
+                  <a:srgbClr val="1C3F6E"/>
+                </a:solidFill>
+                <a:latin typeface="Calibri" pitchFamily="34" charset="0"/>
+                <a:ea typeface="Calibri" pitchFamily="34" charset="-122"/>
+                <a:cs typeface="Calibri" pitchFamily="34" charset="-120"/>
+              </a:rPr>
+              <a:t>FORMATIVE EVALUATION</a:t>
+            </a:r>
+            <a:endParaRPr lang="en-US" sz="1400" dirty="0"/>
+          </a:p>
+        </p:txBody>
+      </p:sp>
+      <p:pic>
+        <p:nvPicPr>
+          <p:cNvPr id="3" name="Image 0" descr="/home/claude/f4/img/minesec_sheet.png">    </p:cNvPr>
+          <p:cNvPicPr>
+            <a:picLocks noChangeAspect="1"/>
+          </p:cNvPicPr>
+          <p:nvPr/>
+        </p:nvPicPr>
+        <p:blipFill>
+          <a:blip r:embed="rId1"/>
+          <a:stretch>
+            <a:fillRect/>
+          </a:stretch>
+        </p:blipFill>
+        <p:spPr>
+          <a:xfrm>
+            <a:off x="0" y="658368"/>
+            <a:ext cx="5120640" cy="5833872"/>
+          </a:xfrm>
+          <a:prstGeom prst="rect">
+            <a:avLst/>
+          </a:prstGeom>
+        </p:spPr>
+      </p:pic>
+      <p:sp>
+        <p:nvSpPr>
+          <p:cNvPr id="4" name="Text 1"/>
+          <p:cNvSpPr/>
+          <p:nvPr/>
+        </p:nvSpPr>
+        <p:spPr>
+          <a:xfrm>
+            <a:off x="5349240" y="1005840"/>
+            <a:ext cx="6522415" cy="731520"/>
+          </a:xfrm>
+          <a:prstGeom prst="rect">
+            <a:avLst/>
+          </a:prstGeom>
+          <a:noFill/>
+          <a:ln/>
+        </p:spPr>
+        <p:txBody>
+          <a:bodyPr wrap="square" lIns="0" tIns="0" rIns="0" bIns="0" rtlCol="0" anchor="ctr">
+            <a:normAutofit/>
+          </a:bodyPr>
+          <a:lstStyle/>
+          <a:p>
+            <a:pPr algn="ctr" indent="0" marL="0">
+              <a:buNone/>
+            </a:pPr>
+            <a:r>
+              <a:rPr lang="en-US" sz="3600" b="1" dirty="0">
+                <a:solidFill>
+                  <a:srgbClr val="990011"/>
+                </a:solidFill>
+                <a:latin typeface="Times New Roman" pitchFamily="34" charset="0"/>
+                <a:ea typeface="Times New Roman" pitchFamily="34" charset="-122"/>
+                <a:cs typeface="Times New Roman" pitchFamily="34" charset="-120"/>
+              </a:rPr>
+              <a:t>Evaluation 2</a:t>
+            </a:r>
+            <a:endParaRPr lang="en-US" sz="3600" dirty="0"/>
+          </a:p>
+        </p:txBody>
+      </p:sp>
+      <p:sp>
+        <p:nvSpPr>
+          <p:cNvPr id="5" name="Text 2"/>
+          <p:cNvSpPr/>
+          <p:nvPr/>
+        </p:nvSpPr>
+        <p:spPr>
+          <a:xfrm>
+            <a:off x="5349240" y="1783080"/>
+            <a:ext cx="6522415" cy="4663440"/>
+          </a:xfrm>
+          <a:prstGeom prst="rect">
+            <a:avLst/>
+          </a:prstGeom>
+          <a:noFill/>
+          <a:ln/>
+        </p:spPr>
+        <p:txBody>
+          <a:bodyPr wrap="square" lIns="0" tIns="0" rIns="0" bIns="0" rtlCol="0" anchor="t"/>
+          <a:lstStyle/>
+          <a:p>
+            <a:pPr algn="l" indent="0" marL="0">
+              <a:spcAft>
+                <a:spcPts val="800"/>
+              </a:spcAft>
+              <a:buNone/>
+            </a:pPr>
+            <a:r>
+              <a:rPr lang="en-US" sz="4000" dirty="0">
+                <a:solidFill>
+                  <a:srgbClr val="111111"/>
+                </a:solidFill>
+                <a:latin typeface="Times New Roman" pitchFamily="34" charset="0"/>
+                <a:ea typeface="Times New Roman" pitchFamily="34" charset="-122"/>
+                <a:cs typeface="Times New Roman" pitchFamily="34" charset="-120"/>
+              </a:rPr>
+              <a:t>What is the standard time of Cameroon?</a:t>
+            </a:r>
+            <a:endParaRPr lang="en-US" sz="4000" dirty="0"/>
+          </a:p>
+        </p:txBody>
+      </p:sp>
+      <p:sp>
+        <p:nvSpPr>
+          <p:cNvPr id="25" name="Slide Number Placeholder 0"/>
+          <p:cNvSpPr>
+            <a:spLocks noGrp="1"/>
+          </p:cNvSpPr>
+          <p:nvPr>
+            <p:ph type="sldNum" sz="quarter" idx="4294967295"/>
+          </p:nvPr>
+        </p:nvSpPr>
+        <p:spPr>
+          <a:xfrm>
+            <a:off x="27432" y="91440"/>
+            <a:ext cx="585216" cy="475488"/>
+          </a:xfrm>
+          <a:prstGeom prst="rect">
+            <a:avLst/>
+          </a:prstGeom>
+          <a:extLst>
+            <a:ext uri="{C572A759-6A51-4108-AA02-DFA0A04FC94B}">
+              <ma14:wrappingTextBoxFlag xmlns:ma14="http://schemas.microsoft.com/office/mac/drawingml/2011/main" val="0"/>
+            </a:ext>
+          </a:extLst>
+        </p:spPr>
+        <p:txBody>
+          <a:bodyPr/>
+          <a:lstStyle>
+            <a:lvl1pPr>
+              <a:defRPr sz="2000">
+                <a:solidFill>
+                  <a:srgbClr val="FFFFFF"/>
+                </a:solidFill>
+                <a:latin typeface="Calibri"/>
+                <a:ea typeface="Calibri"/>
+                <a:cs typeface="Calibri"/>
+              </a:defRPr>
+            </a:lvl1pPr>
+          </a:lstStyle>
+          <a:p>
+            <a:pPr algn="ctr"/>
+            <a:fld id="{F7021451-1387-4CA6-816F-3879F97B5CBC}" type="slidenum">
+              <a:rPr b="1" lang="en-US"/>
+              <a:t>44</a:t>
+            </a:fld>
+            <a:endParaRPr lang="en-US"/>
+          </a:p>
+        </p:txBody>
+      </p:sp>
+    </p:spTree>
+  </p:cSld>
+  <p:clrMapOvr>
+    <a:masterClrMapping/>
+  </p:clrMapOvr>
+</p:sld>
+</file>
+
+<file path=ppt/slides/slide45.xml><?xml version="1.0" encoding="utf-8"?>
+<p:sld xmlns:a="http://schemas.openxmlformats.org/drawingml/2006/main" xmlns:r="http://schemas.openxmlformats.org/officeDocument/2006/relationships" xmlns:p="http://schemas.openxmlformats.org/presentationml/2006/main">
+  <p:cSld name="Slide 45">
+    <p:spTree>
+      <p:nvGrpSpPr>
+        <p:cNvPr id="1" name=""/>
+        <p:cNvGrpSpPr/>
+        <p:nvPr/>
+      </p:nvGrpSpPr>
+      <p:grpSpPr>
+        <a:xfrm>
+          <a:off x="0" y="0"/>
+          <a:ext cx="0" cy="0"/>
+          <a:chOff x="0" y="0"/>
+          <a:chExt cx="0" cy="0"/>
+        </a:xfrm>
+      </p:grpSpPr>
+      <p:sp>
+        <p:nvSpPr>
+          <p:cNvPr id="2" name="Text 0"/>
+          <p:cNvSpPr/>
+          <p:nvPr/>
+        </p:nvSpPr>
+        <p:spPr>
+          <a:xfrm>
+            <a:off x="457200" y="713232"/>
+            <a:ext cx="11368735" cy="274320"/>
+          </a:xfrm>
+          <a:prstGeom prst="rect">
+            <a:avLst/>
+          </a:prstGeom>
+          <a:noFill/>
+          <a:ln/>
+        </p:spPr>
+        <p:txBody>
+          <a:bodyPr wrap="square" lIns="0" tIns="0" rIns="0" bIns="0" rtlCol="0" anchor="ctr"/>
+          <a:lstStyle/>
+          <a:p>
+            <a:pPr algn="r" indent="0" marL="0">
+              <a:buNone/>
+            </a:pPr>
+            <a:r>
+              <a:rPr lang="en-US" sz="1400" b="1" dirty="0">
+                <a:solidFill>
+                  <a:srgbClr val="1C3F6E"/>
+                </a:solidFill>
+                <a:latin typeface="Calibri" pitchFamily="34" charset="0"/>
+                <a:ea typeface="Calibri" pitchFamily="34" charset="-122"/>
+                <a:cs typeface="Calibri" pitchFamily="34" charset="-120"/>
+              </a:rPr>
+              <a:t>FORMATIVE EVALUATION</a:t>
+            </a:r>
+            <a:endParaRPr lang="en-US" sz="1400" dirty="0"/>
+          </a:p>
+        </p:txBody>
+      </p:sp>
+      <p:pic>
+        <p:nvPicPr>
+          <p:cNvPr id="3" name="Image 0" descr="/home/claude/f4/img/minesec_sheet.png">    </p:cNvPr>
+          <p:cNvPicPr>
+            <a:picLocks noChangeAspect="1"/>
+          </p:cNvPicPr>
+          <p:nvPr/>
+        </p:nvPicPr>
+        <p:blipFill>
+          <a:blip r:embed="rId1"/>
+          <a:stretch>
+            <a:fillRect/>
+          </a:stretch>
+        </p:blipFill>
+        <p:spPr>
+          <a:xfrm>
+            <a:off x="0" y="658368"/>
+            <a:ext cx="5120640" cy="5833872"/>
+          </a:xfrm>
+          <a:prstGeom prst="rect">
+            <a:avLst/>
+          </a:prstGeom>
+        </p:spPr>
+      </p:pic>
+      <p:sp>
+        <p:nvSpPr>
+          <p:cNvPr id="4" name="Text 1"/>
+          <p:cNvSpPr/>
+          <p:nvPr/>
+        </p:nvSpPr>
+        <p:spPr>
+          <a:xfrm>
+            <a:off x="5349240" y="1005840"/>
+            <a:ext cx="6522415" cy="731520"/>
+          </a:xfrm>
+          <a:prstGeom prst="rect">
+            <a:avLst/>
+          </a:prstGeom>
+          <a:noFill/>
+          <a:ln/>
+        </p:spPr>
+        <p:txBody>
+          <a:bodyPr wrap="square" lIns="0" tIns="0" rIns="0" bIns="0" rtlCol="0" anchor="ctr">
+            <a:normAutofit/>
+          </a:bodyPr>
+          <a:lstStyle/>
+          <a:p>
+            <a:pPr algn="ctr" indent="0" marL="0">
+              <a:buNone/>
+            </a:pPr>
+            <a:r>
+              <a:rPr lang="en-US" sz="3600" b="1" dirty="0">
+                <a:solidFill>
+                  <a:srgbClr val="990011"/>
+                </a:solidFill>
+                <a:latin typeface="Times New Roman" pitchFamily="34" charset="0"/>
+                <a:ea typeface="Times New Roman" pitchFamily="34" charset="-122"/>
+                <a:cs typeface="Times New Roman" pitchFamily="34" charset="-120"/>
+              </a:rPr>
+              <a:t>Expected Answer</a:t>
+            </a:r>
+            <a:endParaRPr lang="en-US" sz="3600" dirty="0"/>
+          </a:p>
+        </p:txBody>
+      </p:sp>
+      <p:sp>
+        <p:nvSpPr>
+          <p:cNvPr id="5" name="Text 2"/>
+          <p:cNvSpPr/>
+          <p:nvPr/>
+        </p:nvSpPr>
+        <p:spPr>
+          <a:xfrm>
+            <a:off x="5349240" y="1783080"/>
+            <a:ext cx="6522415" cy="4663440"/>
+          </a:xfrm>
+          <a:prstGeom prst="rect">
+            <a:avLst/>
+          </a:prstGeom>
+          <a:noFill/>
+          <a:ln/>
+        </p:spPr>
+        <p:txBody>
+          <a:bodyPr wrap="square" lIns="0" tIns="0" rIns="0" bIns="0" rtlCol="0" anchor="t"/>
+          <a:lstStyle/>
+          <a:p>
+            <a:pPr algn="l" indent="0" marL="0">
+              <a:spcAft>
+                <a:spcPts val="800"/>
+              </a:spcAft>
+              <a:buNone/>
+            </a:pPr>
+            <a:r>
+              <a:rPr lang="en-US" sz="4000" dirty="0">
+                <a:solidFill>
+                  <a:srgbClr val="111111"/>
+                </a:solidFill>
+                <a:latin typeface="Times New Roman" pitchFamily="34" charset="0"/>
+                <a:ea typeface="Times New Roman" pitchFamily="34" charset="-122"/>
+                <a:cs typeface="Times New Roman" pitchFamily="34" charset="-120"/>
+              </a:rPr>
+              <a:t>West Africa Time, GMT + 1.</a:t>
+            </a:r>
+            <a:endParaRPr lang="en-US" sz="4000" dirty="0"/>
+          </a:p>
+        </p:txBody>
+      </p:sp>
+      <p:sp>
+        <p:nvSpPr>
+          <p:cNvPr id="25" name="Slide Number Placeholder 0"/>
+          <p:cNvSpPr>
+            <a:spLocks noGrp="1"/>
+          </p:cNvSpPr>
+          <p:nvPr>
+            <p:ph type="sldNum" sz="quarter" idx="4294967295"/>
+          </p:nvPr>
+        </p:nvSpPr>
+        <p:spPr>
+          <a:xfrm>
+            <a:off x="27432" y="91440"/>
+            <a:ext cx="585216" cy="475488"/>
+          </a:xfrm>
+          <a:prstGeom prst="rect">
+            <a:avLst/>
+          </a:prstGeom>
+          <a:extLst>
+            <a:ext uri="{C572A759-6A51-4108-AA02-DFA0A04FC94B}">
+              <ma14:wrappingTextBoxFlag xmlns:ma14="http://schemas.microsoft.com/office/mac/drawingml/2011/main" val="0"/>
+            </a:ext>
+          </a:extLst>
+        </p:spPr>
+        <p:txBody>
+          <a:bodyPr/>
+          <a:lstStyle>
+            <a:lvl1pPr>
+              <a:defRPr sz="2000">
+                <a:solidFill>
+                  <a:srgbClr val="FFFFFF"/>
+                </a:solidFill>
+                <a:latin typeface="Calibri"/>
+                <a:ea typeface="Calibri"/>
+                <a:cs typeface="Calibri"/>
+              </a:defRPr>
+            </a:lvl1pPr>
+          </a:lstStyle>
+          <a:p>
+            <a:pPr algn="ctr"/>
+            <a:fld id="{F7021451-1387-4CA6-816F-3879F97B5CBC}" type="slidenum">
+              <a:rPr b="1" lang="en-US"/>
+              <a:t>45</a:t>
+            </a:fld>
+            <a:endParaRPr lang="en-US"/>
+          </a:p>
+        </p:txBody>
+      </p:sp>
+    </p:spTree>
+  </p:cSld>
+  <p:clrMapOvr>
+    <a:masterClrMapping/>
+  </p:clrMapOvr>
+</p:sld>
+</file>
+
+<file path=ppt/slides/slide46.xml><?xml version="1.0" encoding="utf-8"?>
+<p:sld xmlns:a="http://schemas.openxmlformats.org/drawingml/2006/main" xmlns:r="http://schemas.openxmlformats.org/officeDocument/2006/relationships" xmlns:p="http://schemas.openxmlformats.org/presentationml/2006/main">
+  <p:cSld name="Slide 46">
+    <p:spTree>
+      <p:nvGrpSpPr>
+        <p:cNvPr id="1" name=""/>
+        <p:cNvGrpSpPr/>
+        <p:nvPr/>
+      </p:nvGrpSpPr>
+      <p:grpSpPr>
+        <a:xfrm>
+          <a:off x="0" y="0"/>
+          <a:ext cx="0" cy="0"/>
+          <a:chOff x="0" y="0"/>
+          <a:chExt cx="0" cy="0"/>
+        </a:xfrm>
+      </p:grpSpPr>
+      <p:sp>
+        <p:nvSpPr>
+          <p:cNvPr id="2" name="Text 0"/>
+          <p:cNvSpPr/>
+          <p:nvPr/>
+        </p:nvSpPr>
+        <p:spPr>
+          <a:xfrm>
+            <a:off x="457200" y="713232"/>
+            <a:ext cx="11368735" cy="274320"/>
+          </a:xfrm>
+          <a:prstGeom prst="rect">
+            <a:avLst/>
+          </a:prstGeom>
+          <a:noFill/>
+          <a:ln/>
+        </p:spPr>
+        <p:txBody>
+          <a:bodyPr wrap="square" lIns="0" tIns="0" rIns="0" bIns="0" rtlCol="0" anchor="ctr"/>
+          <a:lstStyle/>
+          <a:p>
+            <a:pPr algn="r" indent="0" marL="0">
+              <a:buNone/>
+            </a:pPr>
+            <a:r>
+              <a:rPr lang="en-US" sz="1400" b="1" dirty="0">
+                <a:solidFill>
+                  <a:srgbClr val="1C3F6E"/>
+                </a:solidFill>
+                <a:latin typeface="Calibri" pitchFamily="34" charset="0"/>
+                <a:ea typeface="Calibri" pitchFamily="34" charset="-122"/>
+                <a:cs typeface="Calibri" pitchFamily="34" charset="-120"/>
+              </a:rPr>
+              <a:t>REMEDIATION</a:t>
+            </a:r>
+            <a:endParaRPr lang="en-US" sz="1400" dirty="0"/>
+          </a:p>
+        </p:txBody>
+      </p:sp>
+      <p:pic>
+        <p:nvPicPr>
+          <p:cNvPr id="3" name="Image 0" descr="/home/claude/f4/img/minesec_sheet.png">    </p:cNvPr>
+          <p:cNvPicPr>
+            <a:picLocks noChangeAspect="1"/>
+          </p:cNvPicPr>
+          <p:nvPr/>
+        </p:nvPicPr>
+        <p:blipFill>
+          <a:blip r:embed="rId1"/>
+          <a:stretch>
+            <a:fillRect/>
+          </a:stretch>
+        </p:blipFill>
+        <p:spPr>
+          <a:xfrm>
+            <a:off x="0" y="658368"/>
+            <a:ext cx="2468880" cy="5833872"/>
+          </a:xfrm>
+          <a:prstGeom prst="rect">
+            <a:avLst/>
+          </a:prstGeom>
+        </p:spPr>
+      </p:pic>
+      <p:sp>
+        <p:nvSpPr>
+          <p:cNvPr id="4" name="Text 1"/>
+          <p:cNvSpPr/>
+          <p:nvPr/>
+        </p:nvSpPr>
+        <p:spPr>
+          <a:xfrm>
+            <a:off x="2697480" y="1005840"/>
+            <a:ext cx="9174175" cy="731520"/>
+          </a:xfrm>
+          <a:prstGeom prst="rect">
+            <a:avLst/>
+          </a:prstGeom>
+          <a:noFill/>
+          <a:ln/>
+        </p:spPr>
+        <p:txBody>
+          <a:bodyPr wrap="square" lIns="0" tIns="0" rIns="0" bIns="0" rtlCol="0" anchor="ctr">
+            <a:normAutofit/>
+          </a:bodyPr>
+          <a:lstStyle/>
+          <a:p>
+            <a:pPr algn="ctr" indent="0" marL="0">
+              <a:buNone/>
+            </a:pPr>
+            <a:r>
+              <a:rPr lang="en-US" sz="3600" b="1" dirty="0">
+                <a:solidFill>
+                  <a:srgbClr val="990011"/>
+                </a:solidFill>
+                <a:latin typeface="Times New Roman" pitchFamily="34" charset="0"/>
+                <a:ea typeface="Times New Roman" pitchFamily="34" charset="-122"/>
+                <a:cs typeface="Times New Roman" pitchFamily="34" charset="-120"/>
+              </a:rPr>
+              <a:t>Remediation</a:t>
+            </a:r>
+            <a:endParaRPr lang="en-US" sz="3600" dirty="0"/>
+          </a:p>
+        </p:txBody>
+      </p:sp>
+      <p:sp>
+        <p:nvSpPr>
+          <p:cNvPr id="5" name="Text 2"/>
+          <p:cNvSpPr/>
+          <p:nvPr/>
+        </p:nvSpPr>
+        <p:spPr>
+          <a:xfrm>
+            <a:off x="2697480" y="1783080"/>
+            <a:ext cx="9174175" cy="4663440"/>
+          </a:xfrm>
+          <a:prstGeom prst="rect">
+            <a:avLst/>
+          </a:prstGeom>
+          <a:noFill/>
+          <a:ln/>
+        </p:spPr>
+        <p:txBody>
+          <a:bodyPr wrap="square" lIns="0" tIns="0" rIns="0" bIns="0" rtlCol="0" anchor="t"/>
+          <a:lstStyle/>
+          <a:p>
+            <a:pPr algn="l" indent="0" marL="0">
+              <a:spcAft>
+                <a:spcPts val="800"/>
+              </a:spcAft>
+              <a:buNone/>
+            </a:pPr>
+            <a:r>
+              <a:rPr lang="en-US" sz="4000" b="1" dirty="0">
+                <a:solidFill>
+                  <a:srgbClr val="111111"/>
+                </a:solidFill>
+                <a:latin typeface="Times New Roman" pitchFamily="34" charset="0"/>
+                <a:ea typeface="Times New Roman" pitchFamily="34" charset="-122"/>
+                <a:cs typeface="Times New Roman" pitchFamily="34" charset="-120"/>
+              </a:rPr>
+              <a:t>Fill in the blanks:</a:t>
+            </a:r>
+            <a:endParaRPr lang="en-US" sz="4000" dirty="0"/>
+          </a:p>
+          <a:p>
+            <a:pPr algn="l" marL="342900" indent="-342900">
+              <a:spcAft>
+                <a:spcPts val="800"/>
+              </a:spcAft>
+              <a:buSzPct val="100000"/>
+              <a:buFont typeface="+mj-lt"/>
+              <a:buAutoNum type="arabicPeriod" startAt="1"/>
+            </a:pPr>
+            <a:r>
+              <a:rPr lang="en-US" sz="4000" dirty="0">
+                <a:solidFill>
+                  <a:srgbClr val="111111"/>
+                </a:solidFill>
+                <a:latin typeface="Times New Roman" pitchFamily="34" charset="0"/>
+                <a:ea typeface="Times New Roman" pitchFamily="34" charset="-122"/>
+                <a:cs typeface="Times New Roman" pitchFamily="34" charset="-120"/>
+              </a:rPr>
+              <a:t>The Earth turns ______ ° in one hour.</a:t>
+            </a:r>
+            <a:endParaRPr lang="en-US" sz="4000" dirty="0"/>
+          </a:p>
+          <a:p>
+            <a:pPr algn="l" marL="342900" indent="-342900">
+              <a:spcAft>
+                <a:spcPts val="800"/>
+              </a:spcAft>
+              <a:buSzPct val="100000"/>
+              <a:buFont typeface="+mj-lt"/>
+              <a:buAutoNum type="arabicPeriod" startAt="1"/>
+            </a:pPr>
+            <a:r>
+              <a:rPr lang="en-US" sz="4000" dirty="0">
+                <a:solidFill>
+                  <a:srgbClr val="111111"/>
+                </a:solidFill>
+                <a:latin typeface="Times New Roman" pitchFamily="34" charset="0"/>
+                <a:ea typeface="Times New Roman" pitchFamily="34" charset="-122"/>
+                <a:cs typeface="Times New Roman" pitchFamily="34" charset="-120"/>
+              </a:rPr>
+              <a:t>There are ______ main time zones.</a:t>
+            </a:r>
+            <a:endParaRPr lang="en-US" sz="4000" dirty="0"/>
+          </a:p>
+          <a:p>
+            <a:pPr algn="l" marL="342900" indent="-342900">
+              <a:spcAft>
+                <a:spcPts val="800"/>
+              </a:spcAft>
+              <a:buSzPct val="100000"/>
+              <a:buFont typeface="+mj-lt"/>
+              <a:buAutoNum type="arabicPeriod" startAt="1"/>
+            </a:pPr>
+            <a:r>
+              <a:rPr lang="en-US" sz="4000" dirty="0">
+                <a:solidFill>
+                  <a:srgbClr val="111111"/>
+                </a:solidFill>
+                <a:latin typeface="Times New Roman" pitchFamily="34" charset="0"/>
+                <a:ea typeface="Times New Roman" pitchFamily="34" charset="-122"/>
+                <a:cs typeface="Times New Roman" pitchFamily="34" charset="-120"/>
+              </a:rPr>
+              <a:t>Places to the east have a time that is ______.</a:t>
+            </a:r>
+            <a:endParaRPr lang="en-US" sz="4000" dirty="0"/>
+          </a:p>
+        </p:txBody>
+      </p:sp>
+      <p:sp>
+        <p:nvSpPr>
+          <p:cNvPr id="25" name="Slide Number Placeholder 0"/>
+          <p:cNvSpPr>
+            <a:spLocks noGrp="1"/>
+          </p:cNvSpPr>
+          <p:nvPr>
+            <p:ph type="sldNum" sz="quarter" idx="4294967295"/>
+          </p:nvPr>
+        </p:nvSpPr>
+        <p:spPr>
+          <a:xfrm>
+            <a:off x="27432" y="91440"/>
+            <a:ext cx="585216" cy="475488"/>
+          </a:xfrm>
+          <a:prstGeom prst="rect">
+            <a:avLst/>
+          </a:prstGeom>
+          <a:extLst>
+            <a:ext uri="{C572A759-6A51-4108-AA02-DFA0A04FC94B}">
+              <ma14:wrappingTextBoxFlag xmlns:ma14="http://schemas.microsoft.com/office/mac/drawingml/2011/main" val="0"/>
+            </a:ext>
+          </a:extLst>
+        </p:spPr>
+        <p:txBody>
+          <a:bodyPr/>
+          <a:lstStyle>
+            <a:lvl1pPr>
+              <a:defRPr sz="2000">
+                <a:solidFill>
+                  <a:srgbClr val="FFFFFF"/>
+                </a:solidFill>
+                <a:latin typeface="Calibri"/>
+                <a:ea typeface="Calibri"/>
+                <a:cs typeface="Calibri"/>
+              </a:defRPr>
+            </a:lvl1pPr>
+          </a:lstStyle>
+          <a:p>
+            <a:pPr algn="ctr"/>
+            <a:fld id="{F7021451-1387-4CA6-816F-3879F97B5CBC}" type="slidenum">
+              <a:rPr b="1" lang="en-US"/>
+              <a:t>46</a:t>
+            </a:fld>
+            <a:endParaRPr lang="en-US"/>
+          </a:p>
+        </p:txBody>
+      </p:sp>
+    </p:spTree>
+  </p:cSld>
+  <p:clrMapOvr>
+    <a:masterClrMapping/>
+  </p:clrMapOvr>
+</p:sld>
+</file>
+
+<file path=ppt/slides/slide47.xml><?xml version="1.0" encoding="utf-8"?>
+<p:sld xmlns:a="http://schemas.openxmlformats.org/drawingml/2006/main" xmlns:r="http://schemas.openxmlformats.org/officeDocument/2006/relationships" xmlns:p="http://schemas.openxmlformats.org/presentationml/2006/main">
+  <p:cSld name="Slide 47">
+    <p:spTree>
+      <p:nvGrpSpPr>
+        <p:cNvPr id="1" name=""/>
+        <p:cNvGrpSpPr/>
+        <p:nvPr/>
+      </p:nvGrpSpPr>
+      <p:grpSpPr>
+        <a:xfrm>
+          <a:off x="0" y="0"/>
+          <a:ext cx="0" cy="0"/>
+          <a:chOff x="0" y="0"/>
+          <a:chExt cx="0" cy="0"/>
+        </a:xfrm>
+      </p:grpSpPr>
+      <p:sp>
+        <p:nvSpPr>
+          <p:cNvPr id="2" name="Text 0"/>
+          <p:cNvSpPr/>
+          <p:nvPr/>
+        </p:nvSpPr>
+        <p:spPr>
+          <a:xfrm>
+            <a:off x="457200" y="713232"/>
+            <a:ext cx="11368735" cy="274320"/>
+          </a:xfrm>
+          <a:prstGeom prst="rect">
+            <a:avLst/>
+          </a:prstGeom>
+          <a:noFill/>
+          <a:ln/>
+        </p:spPr>
+        <p:txBody>
+          <a:bodyPr wrap="square" lIns="0" tIns="0" rIns="0" bIns="0" rtlCol="0" anchor="ctr"/>
+          <a:lstStyle/>
+          <a:p>
+            <a:pPr algn="r" indent="0" marL="0">
+              <a:buNone/>
+            </a:pPr>
+            <a:r>
+              <a:rPr lang="en-US" sz="1400" b="1" dirty="0">
+                <a:solidFill>
+                  <a:srgbClr val="1C3F6E"/>
+                </a:solidFill>
+                <a:latin typeface="Calibri" pitchFamily="34" charset="0"/>
+                <a:ea typeface="Calibri" pitchFamily="34" charset="-122"/>
+                <a:cs typeface="Calibri" pitchFamily="34" charset="-120"/>
+              </a:rPr>
+              <a:t>HOMEWORK</a:t>
+            </a:r>
+            <a:endParaRPr lang="en-US" sz="1400" dirty="0"/>
+          </a:p>
+        </p:txBody>
+      </p:sp>
+      <p:pic>
+        <p:nvPicPr>
+          <p:cNvPr id="3" name="Image 0" descr="/home/claude/f4/img/minesec_sheet.png">    </p:cNvPr>
+          <p:cNvPicPr>
+            <a:picLocks noChangeAspect="1"/>
+          </p:cNvPicPr>
+          <p:nvPr/>
+        </p:nvPicPr>
+        <p:blipFill>
+          <a:blip r:embed="rId1"/>
+          <a:stretch>
+            <a:fillRect/>
+          </a:stretch>
+        </p:blipFill>
+        <p:spPr>
+          <a:xfrm>
+            <a:off x="0" y="658368"/>
+            <a:ext cx="5120640" cy="5833872"/>
+          </a:xfrm>
+          <a:prstGeom prst="rect">
+            <a:avLst/>
+          </a:prstGeom>
+        </p:spPr>
+      </p:pic>
+      <p:sp>
+        <p:nvSpPr>
+          <p:cNvPr id="4" name="Text 1"/>
+          <p:cNvSpPr/>
+          <p:nvPr/>
+        </p:nvSpPr>
+        <p:spPr>
+          <a:xfrm>
+            <a:off x="5349240" y="1005840"/>
+            <a:ext cx="6522415" cy="731520"/>
+          </a:xfrm>
+          <a:prstGeom prst="rect">
+            <a:avLst/>
+          </a:prstGeom>
+          <a:noFill/>
+          <a:ln/>
+        </p:spPr>
+        <p:txBody>
+          <a:bodyPr wrap="square" lIns="0" tIns="0" rIns="0" bIns="0" rtlCol="0" anchor="ctr">
+            <a:normAutofit/>
+          </a:bodyPr>
+          <a:lstStyle/>
+          <a:p>
+            <a:pPr algn="ctr" indent="0" marL="0">
+              <a:buNone/>
+            </a:pPr>
+            <a:r>
+              <a:rPr lang="en-US" sz="3600" b="1" dirty="0">
+                <a:solidFill>
+                  <a:srgbClr val="990011"/>
+                </a:solidFill>
+                <a:latin typeface="Times New Roman" pitchFamily="34" charset="0"/>
+                <a:ea typeface="Times New Roman" pitchFamily="34" charset="-122"/>
+                <a:cs typeface="Times New Roman" pitchFamily="34" charset="-120"/>
+              </a:rPr>
+              <a:t>Homework</a:t>
+            </a:r>
+            <a:endParaRPr lang="en-US" sz="3600" dirty="0"/>
+          </a:p>
+        </p:txBody>
+      </p:sp>
+      <p:sp>
+        <p:nvSpPr>
+          <p:cNvPr id="5" name="Text 2"/>
+          <p:cNvSpPr/>
+          <p:nvPr/>
+        </p:nvSpPr>
+        <p:spPr>
+          <a:xfrm>
+            <a:off x="5349240" y="1783080"/>
+            <a:ext cx="6522415" cy="4663440"/>
+          </a:xfrm>
+          <a:prstGeom prst="rect">
+            <a:avLst/>
+          </a:prstGeom>
+          <a:noFill/>
+          <a:ln/>
+        </p:spPr>
+        <p:txBody>
+          <a:bodyPr wrap="square" lIns="0" tIns="0" rIns="0" bIns="0" rtlCol="0" anchor="t"/>
+          <a:lstStyle/>
+          <a:p>
+            <a:pPr algn="l" indent="0" marL="0">
+              <a:spcAft>
+                <a:spcPts val="800"/>
+              </a:spcAft>
+              <a:buNone/>
+            </a:pPr>
+            <a:r>
+              <a:rPr lang="en-US" sz="4000" dirty="0">
+                <a:solidFill>
+                  <a:srgbClr val="111111"/>
+                </a:solidFill>
+                <a:latin typeface="Times New Roman" pitchFamily="34" charset="0"/>
+                <a:ea typeface="Times New Roman" pitchFamily="34" charset="-122"/>
+                <a:cs typeface="Times New Roman" pitchFamily="34" charset="-120"/>
+              </a:rPr>
+              <a:t>Find the time in Garoua when it is 12 noon in London in winter (GMT). Then try: what time is it in a town at 45° E when it is 12 noon at 0°?</a:t>
+            </a:r>
+            <a:endParaRPr lang="en-US" sz="4000" dirty="0"/>
+          </a:p>
+        </p:txBody>
+      </p:sp>
+      <p:sp>
+        <p:nvSpPr>
+          <p:cNvPr id="25" name="Slide Number Placeholder 0"/>
+          <p:cNvSpPr>
+            <a:spLocks noGrp="1"/>
+          </p:cNvSpPr>
+          <p:nvPr>
+            <p:ph type="sldNum" sz="quarter" idx="4294967295"/>
+          </p:nvPr>
+        </p:nvSpPr>
+        <p:spPr>
+          <a:xfrm>
+            <a:off x="27432" y="91440"/>
+            <a:ext cx="585216" cy="475488"/>
+          </a:xfrm>
+          <a:prstGeom prst="rect">
+            <a:avLst/>
+          </a:prstGeom>
+          <a:extLst>
+            <a:ext uri="{C572A759-6A51-4108-AA02-DFA0A04FC94B}">
+              <ma14:wrappingTextBoxFlag xmlns:ma14="http://schemas.microsoft.com/office/mac/drawingml/2011/main" val="0"/>
+            </a:ext>
+          </a:extLst>
+        </p:spPr>
+        <p:txBody>
+          <a:bodyPr/>
+          <a:lstStyle>
+            <a:lvl1pPr>
+              <a:defRPr sz="2000">
+                <a:solidFill>
+                  <a:srgbClr val="FFFFFF"/>
+                </a:solidFill>
+                <a:latin typeface="Calibri"/>
+                <a:ea typeface="Calibri"/>
+                <a:cs typeface="Calibri"/>
+              </a:defRPr>
+            </a:lvl1pPr>
+          </a:lstStyle>
+          <a:p>
+            <a:pPr algn="ctr"/>
+            <a:fld id="{F7021451-1387-4CA6-816F-3879F97B5CBC}" type="slidenum">
+              <a:rPr b="1" lang="en-US"/>
+              <a:t>47</a:t>
+            </a:fld>
+            <a:endParaRPr lang="en-US"/>
+          </a:p>
+        </p:txBody>
+      </p:sp>
+    </p:spTree>
+  </p:cSld>
+  <p:clrMapOvr>
+    <a:masterClrMapping/>
+  </p:clrMapOvr>
+</p:sld>
+</file>
+
+<file path=ppt/slides/slide48.xml><?xml version="1.0" encoding="utf-8"?>
+<p:sld xmlns:a="http://schemas.openxmlformats.org/drawingml/2006/main" xmlns:r="http://schemas.openxmlformats.org/officeDocument/2006/relationships" xmlns:p="http://schemas.openxmlformats.org/presentationml/2006/main">
+  <p:cSld name="Slide 48">
+    <p:spTree>
+      <p:nvGrpSpPr>
+        <p:cNvPr id="1" name=""/>
+        <p:cNvGrpSpPr/>
+        <p:nvPr/>
+      </p:nvGrpSpPr>
+      <p:grpSpPr>
+        <a:xfrm>
+          <a:off x="0" y="0"/>
+          <a:ext cx="0" cy="0"/>
+          <a:chOff x="0" y="0"/>
+          <a:chExt cx="0" cy="0"/>
+        </a:xfrm>
+      </p:grpSpPr>
+      <p:sp>
+        <p:nvSpPr>
+          <p:cNvPr id="2" name="Text 0"/>
+          <p:cNvSpPr/>
+          <p:nvPr/>
+        </p:nvSpPr>
+        <p:spPr>
+          <a:xfrm>
+            <a:off x="457200" y="713232"/>
+            <a:ext cx="11368735" cy="274320"/>
+          </a:xfrm>
+          <a:prstGeom prst="rect">
+            <a:avLst/>
+          </a:prstGeom>
+          <a:noFill/>
+          <a:ln/>
+        </p:spPr>
+        <p:txBody>
+          <a:bodyPr wrap="square" lIns="0" tIns="0" rIns="0" bIns="0" rtlCol="0" anchor="ctr"/>
+          <a:lstStyle/>
+          <a:p>
+            <a:pPr algn="r" indent="0" marL="0">
+              <a:buNone/>
+            </a:pPr>
+            <a:r>
+              <a:rPr lang="en-US" sz="1400" b="1" dirty="0">
+                <a:solidFill>
+                  <a:srgbClr val="1C3F6E"/>
+                </a:solidFill>
+                <a:latin typeface="Calibri" pitchFamily="34" charset="0"/>
+                <a:ea typeface="Calibri" pitchFamily="34" charset="-122"/>
+                <a:cs typeface="Calibri" pitchFamily="34" charset="-120"/>
+              </a:rPr>
+              <a:t>NEXT LESSON</a:t>
+            </a:r>
+            <a:endParaRPr lang="en-US" sz="1400" dirty="0"/>
+          </a:p>
+        </p:txBody>
+      </p:sp>
+      <p:pic>
+        <p:nvPicPr>
+          <p:cNvPr id="3" name="Image 0" descr="/home/claude/f4/img/minesec_sheet.png">    </p:cNvPr>
+          <p:cNvPicPr>
+            <a:picLocks noChangeAspect="1"/>
+          </p:cNvPicPr>
+          <p:nvPr/>
+        </p:nvPicPr>
+        <p:blipFill>
+          <a:blip r:embed="rId1"/>
+          <a:stretch>
+            <a:fillRect/>
+          </a:stretch>
+        </p:blipFill>
+        <p:spPr>
+          <a:xfrm>
+            <a:off x="0" y="658368"/>
+            <a:ext cx="5120640" cy="5833872"/>
+          </a:xfrm>
+          <a:prstGeom prst="rect">
+            <a:avLst/>
+          </a:prstGeom>
+        </p:spPr>
+      </p:pic>
+      <p:sp>
+        <p:nvSpPr>
+          <p:cNvPr id="4" name="Text 1"/>
+          <p:cNvSpPr/>
+          <p:nvPr/>
+        </p:nvSpPr>
+        <p:spPr>
+          <a:xfrm>
+            <a:off x="5349240" y="1005840"/>
+            <a:ext cx="6522415" cy="731520"/>
+          </a:xfrm>
+          <a:prstGeom prst="rect">
+            <a:avLst/>
+          </a:prstGeom>
+          <a:noFill/>
+          <a:ln/>
+        </p:spPr>
+        <p:txBody>
+          <a:bodyPr wrap="square" lIns="0" tIns="0" rIns="0" bIns="0" rtlCol="0" anchor="ctr">
+            <a:normAutofit/>
+          </a:bodyPr>
+          <a:lstStyle/>
+          <a:p>
+            <a:pPr algn="ctr" indent="0" marL="0">
+              <a:buNone/>
+            </a:pPr>
+            <a:r>
+              <a:rPr lang="en-US" sz="3600" b="1" dirty="0">
+                <a:solidFill>
+                  <a:srgbClr val="990011"/>
+                </a:solidFill>
+                <a:latin typeface="Times New Roman" pitchFamily="34" charset="0"/>
+                <a:ea typeface="Times New Roman" pitchFamily="34" charset="-122"/>
+                <a:cs typeface="Times New Roman" pitchFamily="34" charset="-120"/>
+              </a:rPr>
+              <a:t>Next Lesson</a:t>
+            </a:r>
+            <a:endParaRPr lang="en-US" sz="3600" dirty="0"/>
+          </a:p>
+        </p:txBody>
+      </p:sp>
+      <p:sp>
+        <p:nvSpPr>
+          <p:cNvPr id="5" name="Text 2"/>
+          <p:cNvSpPr/>
+          <p:nvPr/>
+        </p:nvSpPr>
+        <p:spPr>
+          <a:xfrm>
+            <a:off x="5349240" y="1783080"/>
+            <a:ext cx="6522415" cy="4663440"/>
+          </a:xfrm>
+          <a:prstGeom prst="rect">
+            <a:avLst/>
+          </a:prstGeom>
+          <a:noFill/>
+          <a:ln/>
+        </p:spPr>
+        <p:txBody>
+          <a:bodyPr wrap="square" lIns="0" tIns="0" rIns="0" bIns="0" rtlCol="0" anchor="ctr"/>
+          <a:lstStyle/>
+          <a:p>
+            <a:pPr algn="ctr" indent="0" marL="0">
+              <a:spcAft>
+                <a:spcPts val="800"/>
+              </a:spcAft>
+              <a:buNone/>
+            </a:pPr>
+            <a:r>
+              <a:rPr lang="en-US" sz="4000" b="1" dirty="0">
+                <a:solidFill>
+                  <a:srgbClr val="111111"/>
+                </a:solidFill>
+                <a:latin typeface="Times New Roman" pitchFamily="34" charset="0"/>
+                <a:ea typeface="Times New Roman" pitchFamily="34" charset="-122"/>
+                <a:cs typeface="Times New Roman" pitchFamily="34" charset="-120"/>
+              </a:rPr>
+              <a:t>Our next lesson will be on:</a:t>
+            </a:r>
+            <a:endParaRPr lang="en-US" sz="4000" dirty="0"/>
+          </a:p>
+          <a:p>
+            <a:pPr algn="ctr" indent="0" marL="0">
+              <a:spcAft>
+                <a:spcPts val="800"/>
+              </a:spcAft>
+              <a:buNone/>
+            </a:pPr>
+            <a:r>
+              <a:rPr lang="en-US" sz="4000" b="1" dirty="0">
+                <a:solidFill>
+                  <a:srgbClr val="990011"/>
+                </a:solidFill>
+                <a:latin typeface="Times New Roman" pitchFamily="34" charset="0"/>
+                <a:ea typeface="Times New Roman" pitchFamily="34" charset="-122"/>
+                <a:cs typeface="Times New Roman" pitchFamily="34" charset="-120"/>
+              </a:rPr>
+              <a:t>Practical Work 2: Calculation of Time and Date</a:t>
+            </a:r>
+            <a:endParaRPr lang="en-US" sz="4000" dirty="0"/>
+          </a:p>
+        </p:txBody>
+      </p:sp>
+      <p:sp>
+        <p:nvSpPr>
+          <p:cNvPr id="25" name="Slide Number Placeholder 0"/>
+          <p:cNvSpPr>
+            <a:spLocks noGrp="1"/>
+          </p:cNvSpPr>
+          <p:nvPr>
+            <p:ph type="sldNum" sz="quarter" idx="4294967295"/>
+          </p:nvPr>
+        </p:nvSpPr>
+        <p:spPr>
+          <a:xfrm>
+            <a:off x="27432" y="91440"/>
+            <a:ext cx="585216" cy="475488"/>
+          </a:xfrm>
+          <a:prstGeom prst="rect">
+            <a:avLst/>
+          </a:prstGeom>
+          <a:extLst>
+            <a:ext uri="{C572A759-6A51-4108-AA02-DFA0A04FC94B}">
+              <ma14:wrappingTextBoxFlag xmlns:ma14="http://schemas.microsoft.com/office/mac/drawingml/2011/main" val="0"/>
+            </a:ext>
+          </a:extLst>
+        </p:spPr>
+        <p:txBody>
+          <a:bodyPr/>
+          <a:lstStyle>
+            <a:lvl1pPr>
+              <a:defRPr sz="2000">
+                <a:solidFill>
+                  <a:srgbClr val="FFFFFF"/>
+                </a:solidFill>
+                <a:latin typeface="Calibri"/>
+                <a:ea typeface="Calibri"/>
+                <a:cs typeface="Calibri"/>
+              </a:defRPr>
+            </a:lvl1pPr>
+          </a:lstStyle>
+          <a:p>
+            <a:pPr algn="ctr"/>
+            <a:fld id="{F7021451-1387-4CA6-816F-3879F97B5CBC}" type="slidenum">
+              <a:rPr b="1" lang="en-US"/>
+              <a:t>48</a:t>
+            </a:fld>
+            <a:endParaRPr lang="en-US"/>
+          </a:p>
+        </p:txBody>
+      </p:sp>
+    </p:spTree>
+  </p:cSld>
+  <p:clrMapOvr>
+    <a:masterClrMapping/>
+  </p:clrMapOvr>
+</p:sld>
+</file>
+
+<file path=ppt/slides/slide49.xml><?xml version="1.0" encoding="utf-8"?>
+<p:sld xmlns:a="http://schemas.openxmlformats.org/drawingml/2006/main" xmlns:r="http://schemas.openxmlformats.org/officeDocument/2006/relationships" xmlns:p="http://schemas.openxmlformats.org/presentationml/2006/main">
+  <p:cSld name="Slide 49">
+    <p:spTree>
+      <p:nvGrpSpPr>
+        <p:cNvPr id="1" name=""/>
+        <p:cNvGrpSpPr/>
+        <p:nvPr/>
+      </p:nvGrpSpPr>
+      <p:grpSpPr>
+        <a:xfrm>
+          <a:off x="0" y="0"/>
+          <a:ext cx="0" cy="0"/>
+          <a:chOff x="0" y="0"/>
+          <a:chExt cx="0" cy="0"/>
+        </a:xfrm>
+      </p:grpSpPr>
+      <p:sp>
+        <p:nvSpPr>
+          <p:cNvPr id="2" name="Text 0"/>
+          <p:cNvSpPr/>
+          <p:nvPr/>
+        </p:nvSpPr>
+        <p:spPr>
+          <a:xfrm>
+            <a:off x="457200" y="713232"/>
+            <a:ext cx="11368735" cy="274320"/>
+          </a:xfrm>
+          <a:prstGeom prst="rect">
+            <a:avLst/>
+          </a:prstGeom>
+          <a:noFill/>
+          <a:ln/>
+        </p:spPr>
+        <p:txBody>
+          <a:bodyPr wrap="square" lIns="0" tIns="0" rIns="0" bIns="0" rtlCol="0" anchor="ctr"/>
+          <a:lstStyle/>
+          <a:p>
+            <a:pPr algn="r" indent="0" marL="0">
+              <a:buNone/>
+            </a:pPr>
+            <a:r>
+              <a:rPr lang="en-US" sz="1400" b="1" dirty="0">
+                <a:solidFill>
+                  <a:srgbClr val="1C3F6E"/>
+                </a:solidFill>
+                <a:latin typeface="Calibri" pitchFamily="34" charset="0"/>
+                <a:ea typeface="Calibri" pitchFamily="34" charset="-122"/>
+                <a:cs typeface="Calibri" pitchFamily="34" charset="-120"/>
+              </a:rPr>
               <a:t>BILINGUAL GAME</a:t>
             </a:r>
             <a:endParaRPr lang="en-US" sz="1400" dirty="0"/>
@@ -15161,7 +17854,7 @@
       </p:sp>
       <p:graphicFrame>
         <p:nvGraphicFramePr>
-          <p:cNvPr id="43" name="Table 0"/>
+          <p:cNvPr id="50" name="Table 0"/>
           <p:cNvGraphicFramePr>
             <a:graphicFrameLocks noGrp="1"/>
           </p:cNvGraphicFramePr>
@@ -16473,7 +19166,7 @@
             <a:pPr algn="ctr"/>
             <a:fld id="{F7021451-1387-4CA6-816F-3879F97B5CBC}" type="slidenum">
               <a:rPr b="1" lang="en-US"/>
-              <a:t>42</a:t>
+              <a:t>49</a:t>
             </a:fld>
             <a:endParaRPr lang="en-US"/>
           </a:p>
@@ -16487,9 +19180,9 @@
 </p:sld>
 </file>
 
-<file path=ppt/slides/slide43.xml><?xml version="1.0" encoding="utf-8"?>
+<file path=ppt/slides/slide5.xml><?xml version="1.0" encoding="utf-8"?>
 <p:sld xmlns:a="http://schemas.openxmlformats.org/drawingml/2006/main" xmlns:r="http://schemas.openxmlformats.org/officeDocument/2006/relationships" xmlns:p="http://schemas.openxmlformats.org/presentationml/2006/main">
-  <p:cSld name="Slide 43">
+  <p:cSld name="Slide 5">
     <p:spTree>
       <p:nvGrpSpPr>
         <p:cNvPr id="1" name=""/>
@@ -16537,6 +19230,225 @@
                 <a:ea typeface="Calibri" pitchFamily="34" charset="-122"/>
                 <a:cs typeface="Calibri" pitchFamily="34" charset="-120"/>
               </a:rPr>
+              <a:t>HOMEWORK CORRECTION</a:t>
+            </a:r>
+            <a:endParaRPr lang="en-US" sz="1400" dirty="0"/>
+          </a:p>
+        </p:txBody>
+      </p:sp>
+      <p:pic>
+        <p:nvPicPr>
+          <p:cNvPr id="3" name="Image 0" descr="/home/claude/f4/img/minesec_sheet.png">    </p:cNvPr>
+          <p:cNvPicPr>
+            <a:picLocks noChangeAspect="1"/>
+          </p:cNvPicPr>
+          <p:nvPr/>
+        </p:nvPicPr>
+        <p:blipFill>
+          <a:blip r:embed="rId1"/>
+          <a:stretch>
+            <a:fillRect/>
+          </a:stretch>
+        </p:blipFill>
+        <p:spPr>
+          <a:xfrm>
+            <a:off x="0" y="658368"/>
+            <a:ext cx="5120640" cy="5833872"/>
+          </a:xfrm>
+          <a:prstGeom prst="rect">
+            <a:avLst/>
+          </a:prstGeom>
+        </p:spPr>
+      </p:pic>
+      <p:sp>
+        <p:nvSpPr>
+          <p:cNvPr id="4" name="Text 1"/>
+          <p:cNvSpPr/>
+          <p:nvPr/>
+        </p:nvSpPr>
+        <p:spPr>
+          <a:xfrm>
+            <a:off x="5349240" y="1005840"/>
+            <a:ext cx="6522415" cy="731520"/>
+          </a:xfrm>
+          <a:prstGeom prst="rect">
+            <a:avLst/>
+          </a:prstGeom>
+          <a:noFill/>
+          <a:ln/>
+        </p:spPr>
+        <p:txBody>
+          <a:bodyPr wrap="square" lIns="0" tIns="0" rIns="0" bIns="0" rtlCol="0" anchor="ctr">
+            <a:normAutofit/>
+          </a:bodyPr>
+          <a:lstStyle/>
+          <a:p>
+            <a:pPr algn="ctr" indent="0" marL="0">
+              <a:buNone/>
+            </a:pPr>
+            <a:r>
+              <a:rPr lang="en-US" sz="3600" b="1" dirty="0">
+                <a:solidFill>
+                  <a:srgbClr val="990011"/>
+                </a:solidFill>
+                <a:latin typeface="Times New Roman" pitchFamily="34" charset="0"/>
+                <a:ea typeface="Times New Roman" pitchFamily="34" charset="-122"/>
+                <a:cs typeface="Times New Roman" pitchFamily="34" charset="-120"/>
+              </a:rPr>
+              <a:t>Correction: Possible Answer</a:t>
+            </a:r>
+            <a:endParaRPr lang="en-US" sz="3600" dirty="0"/>
+          </a:p>
+        </p:txBody>
+      </p:sp>
+      <p:sp>
+        <p:nvSpPr>
+          <p:cNvPr id="5" name="Text 2"/>
+          <p:cNvSpPr/>
+          <p:nvPr/>
+        </p:nvSpPr>
+        <p:spPr>
+          <a:xfrm>
+            <a:off x="5349240" y="1783080"/>
+            <a:ext cx="6522415" cy="4663440"/>
+          </a:xfrm>
+          <a:prstGeom prst="rect">
+            <a:avLst/>
+          </a:prstGeom>
+          <a:noFill/>
+          <a:ln/>
+        </p:spPr>
+        <p:txBody>
+          <a:bodyPr wrap="square" lIns="0" tIns="0" rIns="0" bIns="0" rtlCol="0" anchor="t"/>
+          <a:lstStyle/>
+          <a:p>
+            <a:pPr algn="l" indent="0" marL="0">
+              <a:spcAft>
+                <a:spcPts val="800"/>
+              </a:spcAft>
+              <a:buNone/>
+            </a:pPr>
+            <a:r>
+              <a:rPr lang="en-US" sz="4000" dirty="0">
+                <a:solidFill>
+                  <a:srgbClr val="111111"/>
+                </a:solidFill>
+                <a:latin typeface="Times New Roman" pitchFamily="34" charset="0"/>
+                <a:ea typeface="Times New Roman" pitchFamily="34" charset="-122"/>
+                <a:cs typeface="Times New Roman" pitchFamily="34" charset="-120"/>
+              </a:rPr>
+              <a:t>Example: Cameroon 12:00, Dubai 15:00 (difference 3 hours ahead); Brazil (Brasília) 08:00 (4 hours behind). Places to the east are ahead in time.</a:t>
+            </a:r>
+            <a:endParaRPr lang="en-US" sz="4000" dirty="0"/>
+          </a:p>
+        </p:txBody>
+      </p:sp>
+      <p:sp>
+        <p:nvSpPr>
+          <p:cNvPr id="25" name="Slide Number Placeholder 0"/>
+          <p:cNvSpPr>
+            <a:spLocks noGrp="1"/>
+          </p:cNvSpPr>
+          <p:nvPr>
+            <p:ph type="sldNum" sz="quarter" idx="4294967295"/>
+          </p:nvPr>
+        </p:nvSpPr>
+        <p:spPr>
+          <a:xfrm>
+            <a:off x="27432" y="91440"/>
+            <a:ext cx="585216" cy="475488"/>
+          </a:xfrm>
+          <a:prstGeom prst="rect">
+            <a:avLst/>
+          </a:prstGeom>
+          <a:extLst>
+            <a:ext uri="{C572A759-6A51-4108-AA02-DFA0A04FC94B}">
+              <ma14:wrappingTextBoxFlag xmlns:ma14="http://schemas.microsoft.com/office/mac/drawingml/2011/main" val="0"/>
+            </a:ext>
+          </a:extLst>
+        </p:spPr>
+        <p:txBody>
+          <a:bodyPr/>
+          <a:lstStyle>
+            <a:lvl1pPr>
+              <a:defRPr sz="2000">
+                <a:solidFill>
+                  <a:srgbClr val="FFFFFF"/>
+                </a:solidFill>
+                <a:latin typeface="Calibri"/>
+                <a:ea typeface="Calibri"/>
+                <a:cs typeface="Calibri"/>
+              </a:defRPr>
+            </a:lvl1pPr>
+          </a:lstStyle>
+          <a:p>
+            <a:pPr algn="ctr"/>
+            <a:fld id="{F7021451-1387-4CA6-816F-3879F97B5CBC}" type="slidenum">
+              <a:rPr b="1" lang="en-US"/>
+              <a:t>5</a:t>
+            </a:fld>
+            <a:endParaRPr lang="en-US"/>
+          </a:p>
+        </p:txBody>
+      </p:sp>
+    </p:spTree>
+  </p:cSld>
+  <p:clrMapOvr>
+    <a:masterClrMapping/>
+  </p:clrMapOvr>
+</p:sld>
+</file>
+
+<file path=ppt/slides/slide50.xml><?xml version="1.0" encoding="utf-8"?>
+<p:sld xmlns:a="http://schemas.openxmlformats.org/drawingml/2006/main" xmlns:r="http://schemas.openxmlformats.org/officeDocument/2006/relationships" xmlns:p="http://schemas.openxmlformats.org/presentationml/2006/main">
+  <p:cSld name="Slide 50">
+    <p:spTree>
+      <p:nvGrpSpPr>
+        <p:cNvPr id="1" name=""/>
+        <p:cNvGrpSpPr/>
+        <p:nvPr/>
+      </p:nvGrpSpPr>
+      <p:grpSpPr>
+        <a:xfrm>
+          <a:off x="0" y="0"/>
+          <a:ext cx="0" cy="0"/>
+          <a:chOff x="0" y="0"/>
+          <a:chExt cx="0" cy="0"/>
+        </a:xfrm>
+      </p:grpSpPr>
+      <p:sp>
+        <p:nvSpPr>
+          <p:cNvPr id="2" name="Text 0"/>
+          <p:cNvSpPr/>
+          <p:nvPr/>
+        </p:nvSpPr>
+        <p:spPr>
+          <a:xfrm>
+            <a:off x="457200" y="713232"/>
+            <a:ext cx="11368735" cy="274320"/>
+          </a:xfrm>
+          <a:prstGeom prst="rect">
+            <a:avLst/>
+          </a:prstGeom>
+          <a:noFill/>
+          <a:ln/>
+        </p:spPr>
+        <p:txBody>
+          <a:bodyPr wrap="square" lIns="0" tIns="0" rIns="0" bIns="0" rtlCol="0" anchor="ctr"/>
+          <a:lstStyle/>
+          <a:p>
+            <a:pPr algn="r" indent="0" marL="0">
+              <a:buNone/>
+            </a:pPr>
+            <a:r>
+              <a:rPr lang="en-US" sz="1400" b="1" dirty="0">
+                <a:solidFill>
+                  <a:srgbClr val="1C3F6E"/>
+                </a:solidFill>
+                <a:latin typeface="Calibri" pitchFamily="34" charset="0"/>
+                <a:ea typeface="Calibri" pitchFamily="34" charset="-122"/>
+                <a:cs typeface="Calibri" pitchFamily="34" charset="-120"/>
+              </a:rPr>
               <a:t>LOGBOOK</a:t>
             </a:r>
             <a:endParaRPr lang="en-US" sz="1400" dirty="0"/>
@@ -16584,7 +19496,7 @@
       </p:sp>
       <p:graphicFrame>
         <p:nvGraphicFramePr>
-          <p:cNvPr id="44" name="Table 0"/>
+          <p:cNvPr id="51" name="Table 0"/>
           <p:cNvGraphicFramePr>
             <a:graphicFrameLocks noGrp="1"/>
           </p:cNvGraphicFramePr>
@@ -17206,7 +20118,7 @@
             <a:pPr algn="ctr"/>
             <a:fld id="{F7021451-1387-4CA6-816F-3879F97B5CBC}" type="slidenum">
               <a:rPr b="1" lang="en-US"/>
-              <a:t>43</a:t>
+              <a:t>50</a:t>
             </a:fld>
             <a:endParaRPr lang="en-US"/>
           </a:p>
@@ -17220,9 +20132,9 @@
 </p:sld>
 </file>
 
-<file path=ppt/slides/slide44.xml><?xml version="1.0" encoding="utf-8"?>
+<file path=ppt/slides/slide51.xml><?xml version="1.0" encoding="utf-8"?>
 <p:sld xmlns:a="http://schemas.openxmlformats.org/drawingml/2006/main" xmlns:r="http://schemas.openxmlformats.org/officeDocument/2006/relationships" xmlns:p="http://schemas.openxmlformats.org/presentationml/2006/main">
-  <p:cSld name="Slide 44">
+  <p:cSld name="Slide 51">
     <p:spTree>
       <p:nvGrpSpPr>
         <p:cNvPr id="1" name=""/>
@@ -17317,7 +20229,7 @@
       </p:sp>
       <p:graphicFrame>
         <p:nvGraphicFramePr>
-          <p:cNvPr id="45" name="Table 0"/>
+          <p:cNvPr id="52" name="Table 0"/>
           <p:cNvGraphicFramePr>
             <a:graphicFrameLocks noGrp="1"/>
           </p:cNvGraphicFramePr>
@@ -17427,7 +20339,7 @@
                           <a:ea typeface="Calibri" pitchFamily="34" charset="-122"/>
                           <a:cs typeface="Calibri" pitchFamily="34" charset="-120"/>
                         </a:rPr>
-                        <a:t>DEFINITIONS; Local and Standard Time; Time Zones.</a:t>
+                        <a:t>DEFINITIONS; Local Time; Illustration; Reasons for Time Zones; Why Some Countries Have Many Time Zones.</a:t>
                       </a:r>
                       <a:endParaRPr lang="en-US" sz="1600" dirty="0">
                         <a:latin typeface="Calibri" charset="0"/>
@@ -18077,7 +20989,7 @@
             <a:pPr algn="ctr"/>
             <a:fld id="{F7021451-1387-4CA6-816F-3879F97B5CBC}" type="slidenum">
               <a:rPr b="1" lang="en-US"/>
-              <a:t>44</a:t>
+              <a:t>51</a:t>
             </a:fld>
             <a:endParaRPr lang="en-US"/>
           </a:p>
@@ -18091,9 +21003,9 @@
 </p:sld>
 </file>
 
-<file path=ppt/slides/slide45.xml><?xml version="1.0" encoding="utf-8"?>
+<file path=ppt/slides/slide52.xml><?xml version="1.0" encoding="utf-8"?>
 <p:sld xmlns:a="http://schemas.openxmlformats.org/drawingml/2006/main" xmlns:r="http://schemas.openxmlformats.org/officeDocument/2006/relationships" xmlns:p="http://schemas.openxmlformats.org/presentationml/2006/main">
-  <p:cSld name="Slide 45">
+  <p:cSld name="Slide 52">
     <p:spTree>
       <p:nvGrpSpPr>
         <p:cNvPr id="1" name=""/>
@@ -18312,7 +21224,7 @@
                 <a:ea typeface="Calibri" pitchFamily="34" charset="-122"/>
                 <a:cs typeface="Calibri" pitchFamily="34" charset="-120"/>
               </a:rPr>
-              <a:t>Without the projector (Activity 3): ask learners to compare the time on a phone set to another country.</a:t>
+              <a:t>Without the projector (Activity 3): compare the time on a phone set to another country.</a:t>
             </a:r>
             <a:endParaRPr lang="en-US" sz="2000" dirty="0"/>
           </a:p>
@@ -18360,7 +21272,7 @@
             <a:pPr algn="ctr"/>
             <a:fld id="{F7021451-1387-4CA6-816F-3879F97B5CBC}" type="slidenum">
               <a:rPr b="1" lang="en-US"/>
-              <a:t>45</a:t>
+              <a:t>52</a:t>
             </a:fld>
             <a:endParaRPr lang="en-US"/>
           </a:p>
@@ -18374,9 +21286,9 @@
 </p:sld>
 </file>
 
-<file path=ppt/slides/slide46.xml><?xml version="1.0" encoding="utf-8"?>
+<file path=ppt/slides/slide53.xml><?xml version="1.0" encoding="utf-8"?>
 <p:sld xmlns:a="http://schemas.openxmlformats.org/drawingml/2006/main" xmlns:r="http://schemas.openxmlformats.org/officeDocument/2006/relationships" xmlns:p="http://schemas.openxmlformats.org/presentationml/2006/main">
-  <p:cSld name="Slide 46">
+  <p:cSld name="Slide 53">
     <p:spTree>
       <p:nvGrpSpPr>
         <p:cNvPr id="1" name=""/>
@@ -18643,226 +21555,7 @@
             <a:pPr algn="ctr"/>
             <a:fld id="{F7021451-1387-4CA6-816F-3879F97B5CBC}" type="slidenum">
               <a:rPr b="1" lang="en-US"/>
-              <a:t>46</a:t>
-            </a:fld>
-            <a:endParaRPr lang="en-US"/>
-          </a:p>
-        </p:txBody>
-      </p:sp>
-    </p:spTree>
-  </p:cSld>
-  <p:clrMapOvr>
-    <a:masterClrMapping/>
-  </p:clrMapOvr>
-</p:sld>
-</file>
-
-<file path=ppt/slides/slide5.xml><?xml version="1.0" encoding="utf-8"?>
-<p:sld xmlns:a="http://schemas.openxmlformats.org/drawingml/2006/main" xmlns:r="http://schemas.openxmlformats.org/officeDocument/2006/relationships" xmlns:p="http://schemas.openxmlformats.org/presentationml/2006/main">
-  <p:cSld name="Slide 5">
-    <p:spTree>
-      <p:nvGrpSpPr>
-        <p:cNvPr id="1" name=""/>
-        <p:cNvGrpSpPr/>
-        <p:nvPr/>
-      </p:nvGrpSpPr>
-      <p:grpSpPr>
-        <a:xfrm>
-          <a:off x="0" y="0"/>
-          <a:ext cx="0" cy="0"/>
-          <a:chOff x="0" y="0"/>
-          <a:chExt cx="0" cy="0"/>
-        </a:xfrm>
-      </p:grpSpPr>
-      <p:sp>
-        <p:nvSpPr>
-          <p:cNvPr id="2" name="Text 0"/>
-          <p:cNvSpPr/>
-          <p:nvPr/>
-        </p:nvSpPr>
-        <p:spPr>
-          <a:xfrm>
-            <a:off x="457200" y="713232"/>
-            <a:ext cx="11368735" cy="274320"/>
-          </a:xfrm>
-          <a:prstGeom prst="rect">
-            <a:avLst/>
-          </a:prstGeom>
-          <a:noFill/>
-          <a:ln/>
-        </p:spPr>
-        <p:txBody>
-          <a:bodyPr wrap="square" lIns="0" tIns="0" rIns="0" bIns="0" rtlCol="0" anchor="ctr"/>
-          <a:lstStyle/>
-          <a:p>
-            <a:pPr algn="r" indent="0" marL="0">
-              <a:buNone/>
-            </a:pPr>
-            <a:r>
-              <a:rPr lang="en-US" sz="1400" b="1" dirty="0">
-                <a:solidFill>
-                  <a:srgbClr val="1C3F6E"/>
-                </a:solidFill>
-                <a:latin typeface="Calibri" pitchFamily="34" charset="0"/>
-                <a:ea typeface="Calibri" pitchFamily="34" charset="-122"/>
-                <a:cs typeface="Calibri" pitchFamily="34" charset="-120"/>
-              </a:rPr>
-              <a:t>HOMEWORK CORRECTION</a:t>
-            </a:r>
-            <a:endParaRPr lang="en-US" sz="1400" dirty="0"/>
-          </a:p>
-        </p:txBody>
-      </p:sp>
-      <p:pic>
-        <p:nvPicPr>
-          <p:cNvPr id="3" name="Image 0" descr="/home/claude/f4/img/minesec_sheet.png">    </p:cNvPr>
-          <p:cNvPicPr>
-            <a:picLocks noChangeAspect="1"/>
-          </p:cNvPicPr>
-          <p:nvPr/>
-        </p:nvPicPr>
-        <p:blipFill>
-          <a:blip r:embed="rId1"/>
-          <a:stretch>
-            <a:fillRect/>
-          </a:stretch>
-        </p:blipFill>
-        <p:spPr>
-          <a:xfrm>
-            <a:off x="0" y="658368"/>
-            <a:ext cx="5120640" cy="5833872"/>
-          </a:xfrm>
-          <a:prstGeom prst="rect">
-            <a:avLst/>
-          </a:prstGeom>
-        </p:spPr>
-      </p:pic>
-      <p:sp>
-        <p:nvSpPr>
-          <p:cNvPr id="4" name="Text 1"/>
-          <p:cNvSpPr/>
-          <p:nvPr/>
-        </p:nvSpPr>
-        <p:spPr>
-          <a:xfrm>
-            <a:off x="5349240" y="1005840"/>
-            <a:ext cx="6522415" cy="731520"/>
-          </a:xfrm>
-          <a:prstGeom prst="rect">
-            <a:avLst/>
-          </a:prstGeom>
-          <a:noFill/>
-          <a:ln/>
-        </p:spPr>
-        <p:txBody>
-          <a:bodyPr wrap="square" lIns="0" tIns="0" rIns="0" bIns="0" rtlCol="0" anchor="ctr">
-            <a:normAutofit/>
-          </a:bodyPr>
-          <a:lstStyle/>
-          <a:p>
-            <a:pPr algn="ctr" indent="0" marL="0">
-              <a:buNone/>
-            </a:pPr>
-            <a:r>
-              <a:rPr lang="en-US" sz="3600" b="1" dirty="0">
-                <a:solidFill>
-                  <a:srgbClr val="990011"/>
-                </a:solidFill>
-                <a:latin typeface="Times New Roman" pitchFamily="34" charset="0"/>
-                <a:ea typeface="Times New Roman" pitchFamily="34" charset="-122"/>
-                <a:cs typeface="Times New Roman" pitchFamily="34" charset="-120"/>
-              </a:rPr>
-              <a:t>Correction: Possible Answer</a:t>
-            </a:r>
-            <a:endParaRPr lang="en-US" sz="3600" dirty="0"/>
-          </a:p>
-        </p:txBody>
-      </p:sp>
-      <p:sp>
-        <p:nvSpPr>
-          <p:cNvPr id="5" name="Text 2"/>
-          <p:cNvSpPr/>
-          <p:nvPr/>
-        </p:nvSpPr>
-        <p:spPr>
-          <a:xfrm>
-            <a:off x="5349240" y="1783080"/>
-            <a:ext cx="6522415" cy="4663440"/>
-          </a:xfrm>
-          <a:prstGeom prst="rect">
-            <a:avLst/>
-          </a:prstGeom>
-          <a:noFill/>
-          <a:ln/>
-        </p:spPr>
-        <p:txBody>
-          <a:bodyPr wrap="square" lIns="0" tIns="0" rIns="0" bIns="0" rtlCol="0" anchor="t"/>
-          <a:lstStyle/>
-          <a:p>
-            <a:pPr algn="l" indent="0" marL="0">
-              <a:spcAft>
-                <a:spcPts val="800"/>
-              </a:spcAft>
-              <a:buNone/>
-            </a:pPr>
-            <a:r>
-              <a:rPr lang="en-US" sz="4000" dirty="0">
-                <a:solidFill>
-                  <a:srgbClr val="111111"/>
-                </a:solidFill>
-                <a:latin typeface="Times New Roman" pitchFamily="34" charset="0"/>
-                <a:ea typeface="Times New Roman" pitchFamily="34" charset="-122"/>
-                <a:cs typeface="Times New Roman" pitchFamily="34" charset="-120"/>
-              </a:rPr>
-              <a:t>Example: Cameroon 12:00, Dubai 15:00 (difference 3 hours ahead); Brazil (Brasília) 08:00 (4 hours behind). Places to the east are ahead in time.</a:t>
-            </a:r>
-            <a:endParaRPr lang="en-US" sz="4000" dirty="0"/>
-          </a:p>
-        </p:txBody>
-      </p:sp>
-      <p:sp>
-        <p:nvSpPr>
-          <p:cNvPr id="25" name="Slide Number Placeholder 0"/>
-          <p:cNvSpPr>
-            <a:spLocks noGrp="1"/>
-          </p:cNvSpPr>
-          <p:nvPr>
-            <p:ph type="sldNum" sz="quarter" idx="4294967295"/>
-          </p:nvPr>
-        </p:nvSpPr>
-        <p:spPr>
-          <a:xfrm>
-            <a:off x="27432" y="91440"/>
-            <a:ext cx="585216" cy="475488"/>
-          </a:xfrm>
-          <a:prstGeom prst="rect">
-            <a:avLst/>
-          </a:prstGeom>
-          <a:extLst>
-            <a:ext uri="{C572A759-6A51-4108-AA02-DFA0A04FC94B}">
-              <ma14:wrappingTextBoxFlag xmlns:ma14="http://schemas.microsoft.com/office/mac/drawingml/2011/main" val="0"/>
-            </a:ext>
-          </a:extLst>
-        </p:spPr>
-        <p:txBody>
-          <a:bodyPr/>
-          <a:lstStyle>
-            <a:lvl1pPr>
-              <a:defRPr sz="2000">
-                <a:solidFill>
-                  <a:srgbClr val="FFFFFF"/>
-                </a:solidFill>
-                <a:latin typeface="Calibri"/>
-                <a:ea typeface="Calibri"/>
-                <a:cs typeface="Calibri"/>
-              </a:defRPr>
-            </a:lvl1pPr>
-          </a:lstStyle>
-          <a:p>
-            <a:pPr algn="ctr"/>
-            <a:fld id="{F7021451-1387-4CA6-816F-3879F97B5CBC}" type="slidenum">
-              <a:rPr b="1" lang="en-US"/>
-              <a:t>5</a:t>
+              <a:t>53</a:t>
             </a:fld>
             <a:endParaRPr lang="en-US"/>
           </a:p>

--- a/lecons/F3/06_FORM4_LESSON04_Local_Time_Standard_Time_Time_Zones.pptx
+++ b/lecons/F3/06_FORM4_LESSON04_Local_Time_Standard_Time_Time_Zones.pptx
@@ -3546,7 +3546,7 @@
           <a:p>
             <a:r>
               <a:rPr lang="en-US" dirty="0"/>
-              <a:t>Let us copy Why Some Countries Have Many Time Zones. Some countries have many time zones for the following reasons. On this slide we have Great width from east to west. Write each point on a new line, with the key term first, and explain it in your own words when we revise. When you finish, we go to the next slide.</a:t>
+              <a:t>Let us copy Why Some Countries Have Many Time Zones. The reasons why some countries have many time zones, with examples, are the following. On this slide we have Great width from east to west. Write each point on a new line, with the key term first, and explain it in your own words when we revise. When you finish, we go to the next slide.</a:t>
             </a:r>
             <a:endParaRPr lang="en-US" dirty="0"/>
           </a:p>
@@ -15604,7 +15604,7 @@
         <p:spPr>
           <a:xfrm>
             <a:off x="0" y="658368"/>
-            <a:ext cx="3840480" cy="5833872"/>
+            <a:ext cx="2468880" cy="5833872"/>
           </a:xfrm>
           <a:prstGeom prst="rect">
             <a:avLst/>
@@ -15619,8 +15619,8 @@
         </p:nvSpPr>
         <p:spPr>
           <a:xfrm>
-            <a:off x="4069080" y="1005840"/>
-            <a:ext cx="7802575" cy="731520"/>
+            <a:off x="2697480" y="1005840"/>
+            <a:ext cx="9174175" cy="731520"/>
           </a:xfrm>
           <a:prstGeom prst="rect">
             <a:avLst/>
@@ -15660,8 +15660,8 @@
         </p:nvSpPr>
         <p:spPr>
           <a:xfrm>
-            <a:off x="4069080" y="1737360"/>
-            <a:ext cx="7802575" cy="457200"/>
+            <a:off x="2697480" y="1737360"/>
+            <a:ext cx="9174175" cy="457200"/>
           </a:xfrm>
           <a:prstGeom prst="rect">
             <a:avLst/>
@@ -15677,7 +15677,7 @@
               <a:buNone/>
             </a:pPr>
             <a:r>
-              <a:rPr lang="en-US" sz="2900" b="1" dirty="0">
+              <a:rPr lang="en-US" sz="3200" b="1" dirty="0">
                 <a:solidFill>
                   <a:srgbClr val="990011"/>
                 </a:solidFill>
@@ -15687,7 +15687,7 @@
               </a:rPr>
               <a:t>C) Why Some Countries Have Many Time Zones</a:t>
             </a:r>
-            <a:endParaRPr lang="en-US" sz="2900" dirty="0"/>
+            <a:endParaRPr lang="en-US" sz="3200" dirty="0"/>
           </a:p>
         </p:txBody>
       </p:sp>
@@ -15699,8 +15699,8 @@
         </p:nvSpPr>
         <p:spPr>
           <a:xfrm>
-            <a:off x="4069080" y="2240280"/>
-            <a:ext cx="7802575" cy="4206240"/>
+            <a:off x="2697480" y="2240280"/>
+            <a:ext cx="9174175" cy="4206240"/>
           </a:xfrm>
           <a:prstGeom prst="rect">
             <a:avLst/>
@@ -15727,7 +15727,7 @@
                 <a:ea typeface="Times New Roman" pitchFamily="34" charset="-122"/>
                 <a:cs typeface="Times New Roman" pitchFamily="34" charset="-120"/>
               </a:rPr>
-              <a:t>Some countries have many time zones for the following reasons:</a:t>
+              <a:t>The reasons why some countries have many time zones, with examples, are the following:</a:t>
             </a:r>
             <a:endParaRPr lang="en-US" sz="4000" dirty="0"/>
           </a:p>

--- a/lecons/F3/06_FORM4_LESSON04_Local_Time_Standard_Time_Time_Zones.pptx
+++ b/lecons/F3/06_FORM4_LESSON04_Local_Time_Standard_Time_Time_Zones.pptx
@@ -3458,7 +3458,7 @@
           <a:p>
             <a:r>
               <a:rPr lang="en-US" dirty="0"/>
-              <a:t>Before we start the new lesson, let us correct the homework I gave you at the end of Practical Work 1: Locate a Place on a Map. The question was: Look at the time on a phone set to Cameroon time and on a phone or television showing the time in another country (for example Dubai or Brazil). Write both times and the difference. Take out your exercise books.</a:t>
+              <a:t>Before we start the new lesson, let us correct the homework I gave you at the end of Practical Work 1: Locate a Place on a Map. The question was: State how many minutes of time equal 1° of longitude. Take out your exercise books.</a:t>
             </a:r>
             <a:endParaRPr lang="en-US" dirty="0"/>
           </a:p>
@@ -4162,7 +4162,7 @@
           <a:p>
             <a:r>
               <a:rPr lang="en-US" dirty="0"/>
-              <a:t>For your homework: Find the time in Garoua when it is 12 noon in London in winter (GMT). Then try: what time is it in a town at 45° E when it is 12 noon at 0°? We shall correct it at the beginning of our next lesson.</a:t>
+              <a:t>For your homework: Calculate the local time at 30° E when it is 12:00 at 0°. We shall correct it at the beginning of our next lesson.</a:t>
             </a:r>
             <a:endParaRPr lang="en-US" dirty="0"/>
           </a:p>
@@ -4426,7 +4426,7 @@
           <a:p>
             <a:r>
               <a:rPr lang="en-US" dirty="0"/>
-              <a:t>Here is a good answer. Example: Cameroon 12:00, Dubai 15:00 (difference 3 hours ahead); Brazil (Brasília) 08:00 (4 hours behind). Places to the east are ahead in time. Compare it with your own answer and correct your work in red.</a:t>
+              <a:t>Here is a good answer. 4 minutes. Compare it with your own answer and correct your work in red.</a:t>
             </a:r>
             <a:endParaRPr lang="en-US" dirty="0"/>
           </a:p>
@@ -15365,7 +15365,7 @@
         <p:spPr>
           <a:xfrm>
             <a:off x="0" y="658368"/>
-            <a:ext cx="2468880" cy="5833872"/>
+            <a:ext cx="5120640" cy="5833872"/>
           </a:xfrm>
           <a:prstGeom prst="rect">
             <a:avLst/>
@@ -15380,8 +15380,8 @@
         </p:nvSpPr>
         <p:spPr>
           <a:xfrm>
-            <a:off x="2697480" y="1005840"/>
-            <a:ext cx="9174175" cy="731520"/>
+            <a:off x="5349240" y="1005840"/>
+            <a:ext cx="6522415" cy="731520"/>
           </a:xfrm>
           <a:prstGeom prst="rect">
             <a:avLst/>
@@ -15421,8 +15421,8 @@
         </p:nvSpPr>
         <p:spPr>
           <a:xfrm>
-            <a:off x="2697480" y="1783080"/>
-            <a:ext cx="9174175" cy="4663440"/>
+            <a:off x="5349240" y="1783080"/>
+            <a:ext cx="6522415" cy="4663440"/>
           </a:xfrm>
           <a:prstGeom prst="rect">
             <a:avLst/>
@@ -15469,7 +15469,7 @@
                 <a:ea typeface="Times New Roman" pitchFamily="34" charset="-122"/>
                 <a:cs typeface="Times New Roman" pitchFamily="34" charset="-120"/>
               </a:rPr>
-              <a:t>Look at the time on a phone set to Cameroon time and on a phone or television showing the time in another country (for example Dubai or Brazil). Write both times and the difference.</a:t>
+              <a:t>State how many minutes of time equal 1° of longitude.</a:t>
             </a:r>
             <a:endParaRPr lang="en-US" sz="4000" dirty="0"/>
           </a:p>
@@ -17456,7 +17456,7 @@
                 <a:ea typeface="Times New Roman" pitchFamily="34" charset="-122"/>
                 <a:cs typeface="Times New Roman" pitchFamily="34" charset="-120"/>
               </a:rPr>
-              <a:t>Find the time in Garoua when it is 12 noon in London in winter (GMT). Then try: what time is it in a town at 45° E when it is 12 noon at 0°?</a:t>
+              <a:t>Calculate the local time at 30° E when it is 12:00 at 0°.</a:t>
             </a:r>
             <a:endParaRPr lang="en-US" sz="4000" dirty="0"/>
           </a:p>
@@ -19337,7 +19337,7 @@
                 <a:ea typeface="Times New Roman" pitchFamily="34" charset="-122"/>
                 <a:cs typeface="Times New Roman" pitchFamily="34" charset="-120"/>
               </a:rPr>
-              <a:t>Example: Cameroon 12:00, Dubai 15:00 (difference 3 hours ahead); Brazil (Brasília) 08:00 (4 hours behind). Places to the east are ahead in time.</a:t>
+              <a:t>4 minutes.</a:t>
             </a:r>
             <a:endParaRPr lang="en-US" sz="4000" dirty="0"/>
           </a:p>
@@ -20615,7 +20615,7 @@
                           <a:ea typeface="Calibri" pitchFamily="34" charset="-122"/>
                           <a:cs typeface="Calibri" pitchFamily="34" charset="-120"/>
                         </a:rPr>
-                        <a:t>Find the time in Garoua when it is 12 noon in London in winter (GMT). Then try: what time is it in a town at 45° E when it is 12 noon at 0°?</a:t>
+                        <a:t>Calculate the local time at 30° E when it is 12:00 at 0°.</a:t>
                       </a:r>
                       <a:endParaRPr lang="en-US" sz="1600" dirty="0">
                         <a:latin typeface="Calibri" charset="0"/>
